--- a/docs/pptx/auc3/jx-auc3-linsubhr-sens-anemia3.pptx
+++ b/docs/pptx/auc3/jx-auc3-linsubhr-sens-anemia3.pptx
@@ -5339,7 +5339,7 @@
           <p:spPr>
             <a:xfrm>
               <a:off x="817517" y="1896563"/>
-              <a:ext cx="6169365" cy="82021"/>
+              <a:ext cx="6833128" cy="82021"/>
             </a:xfrm>
             <a:prstGeom prst="rect">
               <a:avLst/>
@@ -5371,7 +5371,7 @@
                   <a:latin typeface="Helvetica"/>
                   <a:cs typeface="Helvetica"/>
                 </a:rPr>
-                <a:t>subHR per 0.1 ratio decline: 1.22 (1.02-1.45), p = 0.028  |  per IQR decline (Δ = 0.28): 1.73 (1.06-2.83)  |  IQR: [0.70, 0.98]</a:t>
+                <a:t>subHR per 0.1 ratio decline: 1.22 (1.02-1.45), p_Bonf = 0.165 (n = 6)  |  per IQR decline (Δ = 0.28): 1.73 (1.06-2.83)  |  IQR: [0.70, 0.98]</a:t>
               </a:r>
             </a:p>
           </p:txBody>

--- a/docs/pptx/auc3/jx-auc3-linsubhr-sens-anemia3.pptx
+++ b/docs/pptx/auc3/jx-auc3-linsubhr-sens-anemia3.pptx
@@ -5062,8 +5062,8 @@
           </p:nvSpPr>
           <p:spPr>
             <a:xfrm>
-              <a:off x="2137719" y="5785772"/>
-              <a:ext cx="155356" cy="80101"/>
+              <a:off x="2134610" y="5785772"/>
+              <a:ext cx="161574" cy="80101"/>
             </a:xfrm>
             <a:prstGeom prst="rect">
               <a:avLst/>
@@ -5095,7 +5095,7 @@
                   <a:latin typeface="Helvetica"/>
                   <a:cs typeface="Helvetica"/>
                 </a:rPr>
-                <a:t>0.6</a:t>
+                <a:t>-40</a:t>
               </a:r>
             </a:p>
           </p:txBody>
@@ -5108,8 +5108,8 @@
           </p:nvSpPr>
           <p:spPr>
             <a:xfrm>
-              <a:off x="3878840" y="5785772"/>
-              <a:ext cx="155356" cy="80101"/>
+              <a:off x="3875731" y="5785772"/>
+              <a:ext cx="161574" cy="80101"/>
             </a:xfrm>
             <a:prstGeom prst="rect">
               <a:avLst/>
@@ -5141,7 +5141,7 @@
                   <a:latin typeface="Helvetica"/>
                   <a:cs typeface="Helvetica"/>
                 </a:rPr>
-                <a:t>0.8</a:t>
+                <a:t>-20</a:t>
               </a:r>
             </a:p>
           </p:txBody>
@@ -5154,8 +5154,8 @@
           </p:nvSpPr>
           <p:spPr>
             <a:xfrm>
-              <a:off x="5619961" y="5785772"/>
-              <a:ext cx="155356" cy="80101"/>
+              <a:off x="5666549" y="5785772"/>
+              <a:ext cx="62179" cy="80101"/>
             </a:xfrm>
             <a:prstGeom prst="rect">
               <a:avLst/>
@@ -5187,7 +5187,7 @@
                   <a:latin typeface="Helvetica"/>
                   <a:cs typeface="Helvetica"/>
                 </a:rPr>
-                <a:t>1.0</a:t>
+                <a:t>0</a:t>
               </a:r>
             </a:p>
           </p:txBody>
@@ -5200,8 +5200,8 @@
           </p:nvSpPr>
           <p:spPr>
             <a:xfrm>
-              <a:off x="7361081" y="5785772"/>
-              <a:ext cx="155356" cy="80101"/>
+              <a:off x="7376580" y="5785772"/>
+              <a:ext cx="124358" cy="80101"/>
             </a:xfrm>
             <a:prstGeom prst="rect">
               <a:avLst/>
@@ -5233,7 +5233,7 @@
                   <a:latin typeface="Helvetica"/>
                   <a:cs typeface="Helvetica"/>
                 </a:rPr>
-                <a:t>1.2</a:t>
+                <a:t>20</a:t>
               </a:r>
             </a:p>
           </p:txBody>
@@ -5246,8 +5246,8 @@
           </p:nvSpPr>
           <p:spPr>
             <a:xfrm>
-              <a:off x="2691419" y="5925448"/>
-              <a:ext cx="4051889" cy="100218"/>
+              <a:off x="1561815" y="5925448"/>
+              <a:ext cx="6311097" cy="100218"/>
             </a:xfrm>
             <a:prstGeom prst="rect">
               <a:avLst/>
@@ -5279,7 +5279,7 @@
                   <a:latin typeface="Helvetica"/>
                   <a:cs typeface="Helvetica"/>
                 </a:rPr>
-                <a:t>Sensitivity eGFR Ratio (CKD-EPI 2012 CysC / CKD-EPI 2021 Cr)</a:t>
+                <a:t>Sensitivity eGFR Difference (%): 100 × (CKD-EPI 2012 CysC − CKD-EPI 2021 Cr) / CKD-EPI 2021 Cr</a:t>
               </a:r>
             </a:p>
           </p:txBody>
@@ -5339,7 +5339,7 @@
           <p:spPr>
             <a:xfrm>
               <a:off x="817517" y="1896563"/>
-              <a:ext cx="6833128" cy="82021"/>
+              <a:ext cx="6959864" cy="82021"/>
             </a:xfrm>
             <a:prstGeom prst="rect">
               <a:avLst/>
@@ -5371,7 +5371,7 @@
                   <a:latin typeface="Helvetica"/>
                   <a:cs typeface="Helvetica"/>
                 </a:rPr>
-                <a:t>subHR per 0.1 ratio decline: 1.22 (1.02-1.45), p_Bonf = 0.165 (n = 6)  |  per IQR decline (Δ = 0.28): 1.73 (1.06-2.83)  |  IQR: [0.70, 0.98]</a:t>
+                <a:t>subHR per 10 % decline: 1.22 (1.02-1.45), p_Bonf = 0.165 (n = 6)  |  per IQR decline (Δ = 28.1 %): 1.73 (1.06-2.83)  |  IQR: [-30.1, -2.1] %</a:t>
               </a:r>
             </a:p>
           </p:txBody>

--- a/docs/pptx/auc3/jx-auc3-linsubhr-sens-anemia3.pptx
+++ b/docs/pptx/auc3/jx-auc3-linsubhr-sens-anemia3.pptx
@@ -2265,34 +2265,26 @@
         </p:sp>
         <p:sp>
           <p:nvSpPr>
-            <p:cNvPr id="4" name="pl4"/>
+            <p:cNvPr id="4" name="rc4"/>
             <p:cNvSpPr/>
             <p:nvPr/>
           </p:nvSpPr>
           <p:spPr>
             <a:xfrm>
-              <a:off x="817517" y="5142518"/>
-              <a:ext cx="7799693" cy="0"/>
+              <a:off x="457200" y="1600200"/>
+              <a:ext cx="8229600" cy="4525962"/>
             </a:xfrm>
-            <a:custGeom>
+            <a:prstGeom prst="rect">
               <a:avLst/>
-              <a:pathLst>
-                <a:path w="7799693" h="0">
-                  <a:moveTo>
-                    <a:pt x="0" y="0"/>
-                  </a:moveTo>
-                  <a:lnTo>
-                    <a:pt x="7799693" y="0"/>
-                  </a:lnTo>
-                  <a:lnTo>
-                    <a:pt x="7799693" y="0"/>
-                  </a:lnTo>
-                </a:path>
-              </a:pathLst>
-            </a:custGeom>
-            <a:ln w="6775" cap="flat">
+            </a:prstGeom>
+            <a:solidFill>
+              <a:srgbClr val="FFFFFF">
+                <a:alpha val="100000"/>
+              </a:srgbClr>
+            </a:solidFill>
+            <a:ln w="13550" cap="rnd">
               <a:solidFill>
-                <a:srgbClr val="EBEBEB">
+                <a:srgbClr val="FFFFFF">
                   <a:alpha val="100000"/>
                 </a:srgbClr>
               </a:solidFill>
@@ -2314,21 +2306,21 @@
           </p:nvSpPr>
           <p:spPr>
             <a:xfrm>
-              <a:off x="817517" y="4313054"/>
-              <a:ext cx="7799693" cy="0"/>
+              <a:off x="887106" y="3250627"/>
+              <a:ext cx="7660515" cy="0"/>
             </a:xfrm>
             <a:custGeom>
               <a:avLst/>
               <a:pathLst>
-                <a:path w="7799693" h="0">
+                <a:path w="7660515" h="0">
                   <a:moveTo>
                     <a:pt x="0" y="0"/>
                   </a:moveTo>
                   <a:lnTo>
-                    <a:pt x="7799693" y="0"/>
-                  </a:lnTo>
-                  <a:lnTo>
-                    <a:pt x="7799693" y="0"/>
+                    <a:pt x="7660515" y="0"/>
+                  </a:lnTo>
+                  <a:lnTo>
+                    <a:pt x="7660515" y="0"/>
                   </a:lnTo>
                 </a:path>
               </a:pathLst>
@@ -2357,21 +2349,21 @@
           </p:nvSpPr>
           <p:spPr>
             <a:xfrm>
-              <a:off x="817517" y="3483591"/>
-              <a:ext cx="7799693" cy="0"/>
+              <a:off x="887106" y="2951293"/>
+              <a:ext cx="7660515" cy="0"/>
             </a:xfrm>
             <a:custGeom>
               <a:avLst/>
               <a:pathLst>
-                <a:path w="7799693" h="0">
+                <a:path w="7660515" h="0">
                   <a:moveTo>
                     <a:pt x="0" y="0"/>
                   </a:moveTo>
                   <a:lnTo>
-                    <a:pt x="7799693" y="0"/>
-                  </a:lnTo>
-                  <a:lnTo>
-                    <a:pt x="7799693" y="0"/>
+                    <a:pt x="7660515" y="0"/>
+                  </a:lnTo>
+                  <a:lnTo>
+                    <a:pt x="7660515" y="0"/>
                   </a:lnTo>
                 </a:path>
               </a:pathLst>
@@ -2400,21 +2392,21 @@
           </p:nvSpPr>
           <p:spPr>
             <a:xfrm>
-              <a:off x="817517" y="2654127"/>
-              <a:ext cx="7799693" cy="0"/>
+              <a:off x="887106" y="2651959"/>
+              <a:ext cx="7660515" cy="0"/>
             </a:xfrm>
             <a:custGeom>
               <a:avLst/>
               <a:pathLst>
-                <a:path w="7799693" h="0">
+                <a:path w="7660515" h="0">
                   <a:moveTo>
                     <a:pt x="0" y="0"/>
                   </a:moveTo>
                   <a:lnTo>
-                    <a:pt x="7799693" y="0"/>
-                  </a:lnTo>
-                  <a:lnTo>
-                    <a:pt x="7799693" y="0"/>
+                    <a:pt x="7660515" y="0"/>
+                  </a:lnTo>
+                  <a:lnTo>
+                    <a:pt x="7660515" y="0"/>
                   </a:lnTo>
                 </a:path>
               </a:pathLst>
@@ -2443,21 +2435,21 @@
           </p:nvSpPr>
           <p:spPr>
             <a:xfrm>
-              <a:off x="1344837" y="2073503"/>
-              <a:ext cx="0" cy="3649639"/>
+              <a:off x="887106" y="2352625"/>
+              <a:ext cx="7660515" cy="0"/>
             </a:xfrm>
             <a:custGeom>
               <a:avLst/>
               <a:pathLst>
-                <a:path w="0" h="3649639">
+                <a:path w="7660515" h="0">
                   <a:moveTo>
-                    <a:pt x="0" y="3649639"/>
+                    <a:pt x="0" y="0"/>
                   </a:moveTo>
                   <a:lnTo>
-                    <a:pt x="0" y="0"/>
-                  </a:lnTo>
-                  <a:lnTo>
-                    <a:pt x="0" y="0"/>
+                    <a:pt x="7660515" y="0"/>
+                  </a:lnTo>
+                  <a:lnTo>
+                    <a:pt x="7660515" y="0"/>
                   </a:lnTo>
                 </a:path>
               </a:pathLst>
@@ -2486,15 +2478,15 @@
           </p:nvSpPr>
           <p:spPr>
             <a:xfrm>
-              <a:off x="3085958" y="2073503"/>
-              <a:ext cx="0" cy="3649639"/>
+              <a:off x="1405017" y="2143092"/>
+              <a:ext cx="0" cy="1317069"/>
             </a:xfrm>
             <a:custGeom>
               <a:avLst/>
               <a:pathLst>
-                <a:path w="0" h="3649639">
+                <a:path w="0" h="1317069">
                   <a:moveTo>
-                    <a:pt x="0" y="3649639"/>
+                    <a:pt x="0" y="1317069"/>
                   </a:moveTo>
                   <a:lnTo>
                     <a:pt x="0" y="0"/>
@@ -2529,15 +2521,15 @@
           </p:nvSpPr>
           <p:spPr>
             <a:xfrm>
-              <a:off x="4827079" y="2073503"/>
-              <a:ext cx="0" cy="3649639"/>
+              <a:off x="3115069" y="2143092"/>
+              <a:ext cx="0" cy="1317069"/>
             </a:xfrm>
             <a:custGeom>
               <a:avLst/>
               <a:pathLst>
-                <a:path w="0" h="3649639">
+                <a:path w="0" h="1317069">
                   <a:moveTo>
-                    <a:pt x="0" y="3649639"/>
+                    <a:pt x="0" y="1317069"/>
                   </a:moveTo>
                   <a:lnTo>
                     <a:pt x="0" y="0"/>
@@ -2572,15 +2564,15 @@
           </p:nvSpPr>
           <p:spPr>
             <a:xfrm>
-              <a:off x="6568199" y="2073503"/>
-              <a:ext cx="0" cy="3649639"/>
+              <a:off x="4825121" y="2143092"/>
+              <a:ext cx="0" cy="1317069"/>
             </a:xfrm>
             <a:custGeom>
               <a:avLst/>
               <a:pathLst>
-                <a:path w="0" h="3649639">
+                <a:path w="0" h="1317069">
                   <a:moveTo>
-                    <a:pt x="0" y="3649639"/>
+                    <a:pt x="0" y="1317069"/>
                   </a:moveTo>
                   <a:lnTo>
                     <a:pt x="0" y="0"/>
@@ -2615,15 +2607,15 @@
           </p:nvSpPr>
           <p:spPr>
             <a:xfrm>
-              <a:off x="8309320" y="2073503"/>
-              <a:ext cx="0" cy="3649639"/>
+              <a:off x="6535173" y="2143092"/>
+              <a:ext cx="0" cy="1317069"/>
             </a:xfrm>
             <a:custGeom>
               <a:avLst/>
               <a:pathLst>
-                <a:path w="0" h="3649639">
+                <a:path w="0" h="1317069">
                   <a:moveTo>
-                    <a:pt x="0" y="3649639"/>
+                    <a:pt x="0" y="1317069"/>
                   </a:moveTo>
                   <a:lnTo>
                     <a:pt x="0" y="0"/>
@@ -2658,26 +2650,26 @@
           </p:nvSpPr>
           <p:spPr>
             <a:xfrm>
-              <a:off x="817517" y="5557249"/>
-              <a:ext cx="7799693" cy="0"/>
+              <a:off x="8245225" y="2143092"/>
+              <a:ext cx="0" cy="1317069"/>
             </a:xfrm>
             <a:custGeom>
               <a:avLst/>
               <a:pathLst>
-                <a:path w="7799693" h="0">
+                <a:path w="0" h="1317069">
                   <a:moveTo>
+                    <a:pt x="0" y="1317069"/>
+                  </a:moveTo>
+                  <a:lnTo>
                     <a:pt x="0" y="0"/>
-                  </a:moveTo>
-                  <a:lnTo>
-                    <a:pt x="7799693" y="0"/>
-                  </a:lnTo>
-                  <a:lnTo>
-                    <a:pt x="7799693" y="0"/>
+                  </a:lnTo>
+                  <a:lnTo>
+                    <a:pt x="0" y="0"/>
                   </a:lnTo>
                 </a:path>
               </a:pathLst>
             </a:custGeom>
-            <a:ln w="13550" cap="flat">
+            <a:ln w="6775" cap="flat">
               <a:solidFill>
                 <a:srgbClr val="EBEBEB">
                   <a:alpha val="100000"/>
@@ -2701,21 +2693,21 @@
           </p:nvSpPr>
           <p:spPr>
             <a:xfrm>
-              <a:off x="817517" y="4727786"/>
-              <a:ext cx="7799693" cy="0"/>
+              <a:off x="887106" y="3400294"/>
+              <a:ext cx="7660515" cy="0"/>
             </a:xfrm>
             <a:custGeom>
               <a:avLst/>
               <a:pathLst>
-                <a:path w="7799693" h="0">
+                <a:path w="7660515" h="0">
                   <a:moveTo>
                     <a:pt x="0" y="0"/>
                   </a:moveTo>
                   <a:lnTo>
-                    <a:pt x="7799693" y="0"/>
-                  </a:lnTo>
-                  <a:lnTo>
-                    <a:pt x="7799693" y="0"/>
+                    <a:pt x="7660515" y="0"/>
+                  </a:lnTo>
+                  <a:lnTo>
+                    <a:pt x="7660515" y="0"/>
                   </a:lnTo>
                 </a:path>
               </a:pathLst>
@@ -2744,21 +2736,21 @@
           </p:nvSpPr>
           <p:spPr>
             <a:xfrm>
-              <a:off x="817517" y="3898322"/>
-              <a:ext cx="7799693" cy="0"/>
+              <a:off x="887106" y="3100960"/>
+              <a:ext cx="7660515" cy="0"/>
             </a:xfrm>
             <a:custGeom>
               <a:avLst/>
               <a:pathLst>
-                <a:path w="7799693" h="0">
+                <a:path w="7660515" h="0">
                   <a:moveTo>
                     <a:pt x="0" y="0"/>
                   </a:moveTo>
                   <a:lnTo>
-                    <a:pt x="7799693" y="0"/>
-                  </a:lnTo>
-                  <a:lnTo>
-                    <a:pt x="7799693" y="0"/>
+                    <a:pt x="7660515" y="0"/>
+                  </a:lnTo>
+                  <a:lnTo>
+                    <a:pt x="7660515" y="0"/>
                   </a:lnTo>
                 </a:path>
               </a:pathLst>
@@ -2787,21 +2779,21 @@
           </p:nvSpPr>
           <p:spPr>
             <a:xfrm>
-              <a:off x="817517" y="3068859"/>
-              <a:ext cx="7799693" cy="0"/>
+              <a:off x="887106" y="2801626"/>
+              <a:ext cx="7660515" cy="0"/>
             </a:xfrm>
             <a:custGeom>
               <a:avLst/>
               <a:pathLst>
-                <a:path w="7799693" h="0">
+                <a:path w="7660515" h="0">
                   <a:moveTo>
                     <a:pt x="0" y="0"/>
                   </a:moveTo>
                   <a:lnTo>
-                    <a:pt x="7799693" y="0"/>
-                  </a:lnTo>
-                  <a:lnTo>
-                    <a:pt x="7799693" y="0"/>
+                    <a:pt x="7660515" y="0"/>
+                  </a:lnTo>
+                  <a:lnTo>
+                    <a:pt x="7660515" y="0"/>
                   </a:lnTo>
                 </a:path>
               </a:pathLst>
@@ -2830,21 +2822,21 @@
           </p:nvSpPr>
           <p:spPr>
             <a:xfrm>
-              <a:off x="817517" y="2239395"/>
-              <a:ext cx="7799693" cy="0"/>
+              <a:off x="887106" y="2502292"/>
+              <a:ext cx="7660515" cy="0"/>
             </a:xfrm>
             <a:custGeom>
               <a:avLst/>
               <a:pathLst>
-                <a:path w="7799693" h="0">
+                <a:path w="7660515" h="0">
                   <a:moveTo>
                     <a:pt x="0" y="0"/>
                   </a:moveTo>
                   <a:lnTo>
-                    <a:pt x="7799693" y="0"/>
-                  </a:lnTo>
-                  <a:lnTo>
-                    <a:pt x="7799693" y="0"/>
+                    <a:pt x="7660515" y="0"/>
+                  </a:lnTo>
+                  <a:lnTo>
+                    <a:pt x="7660515" y="0"/>
                   </a:lnTo>
                 </a:path>
               </a:pathLst>
@@ -2873,21 +2865,21 @@
           </p:nvSpPr>
           <p:spPr>
             <a:xfrm>
-              <a:off x="2215398" y="2073503"/>
-              <a:ext cx="0" cy="3649639"/>
+              <a:off x="887106" y="2202958"/>
+              <a:ext cx="7660515" cy="0"/>
             </a:xfrm>
             <a:custGeom>
               <a:avLst/>
               <a:pathLst>
-                <a:path w="0" h="3649639">
+                <a:path w="7660515" h="0">
                   <a:moveTo>
-                    <a:pt x="0" y="3649639"/>
+                    <a:pt x="0" y="0"/>
                   </a:moveTo>
                   <a:lnTo>
-                    <a:pt x="0" y="0"/>
-                  </a:lnTo>
-                  <a:lnTo>
-                    <a:pt x="0" y="0"/>
+                    <a:pt x="7660515" y="0"/>
+                  </a:lnTo>
+                  <a:lnTo>
+                    <a:pt x="7660515" y="0"/>
                   </a:lnTo>
                 </a:path>
               </a:pathLst>
@@ -2916,15 +2908,15 @@
           </p:nvSpPr>
           <p:spPr>
             <a:xfrm>
-              <a:off x="3956518" y="2073503"/>
-              <a:ext cx="0" cy="3649639"/>
+              <a:off x="2260043" y="2143092"/>
+              <a:ext cx="0" cy="1317069"/>
             </a:xfrm>
             <a:custGeom>
               <a:avLst/>
               <a:pathLst>
-                <a:path w="0" h="3649639">
+                <a:path w="0" h="1317069">
                   <a:moveTo>
-                    <a:pt x="0" y="3649639"/>
+                    <a:pt x="0" y="1317069"/>
                   </a:moveTo>
                   <a:lnTo>
                     <a:pt x="0" y="0"/>
@@ -2959,15 +2951,15 @@
           </p:nvSpPr>
           <p:spPr>
             <a:xfrm>
-              <a:off x="5697639" y="2073503"/>
-              <a:ext cx="0" cy="3649639"/>
+              <a:off x="3970095" y="2143092"/>
+              <a:ext cx="0" cy="1317069"/>
             </a:xfrm>
             <a:custGeom>
               <a:avLst/>
               <a:pathLst>
-                <a:path w="0" h="3649639">
+                <a:path w="0" h="1317069">
                   <a:moveTo>
-                    <a:pt x="0" y="3649639"/>
+                    <a:pt x="0" y="1317069"/>
                   </a:moveTo>
                   <a:lnTo>
                     <a:pt x="0" y="0"/>
@@ -3002,15 +2994,15 @@
           </p:nvSpPr>
           <p:spPr>
             <a:xfrm>
-              <a:off x="7438760" y="2073503"/>
-              <a:ext cx="0" cy="3649639"/>
+              <a:off x="5680147" y="2143092"/>
+              <a:ext cx="0" cy="1317069"/>
             </a:xfrm>
             <a:custGeom>
               <a:avLst/>
               <a:pathLst>
-                <a:path w="0" h="3649639">
+                <a:path w="0" h="1317069">
                   <a:moveTo>
-                    <a:pt x="0" y="3649639"/>
+                    <a:pt x="0" y="1317069"/>
                   </a:moveTo>
                   <a:lnTo>
                     <a:pt x="0" y="0"/>
@@ -3039,618 +3031,661 @@
         </p:sp>
         <p:sp>
           <p:nvSpPr>
-            <p:cNvPr id="22" name="pg22"/>
+            <p:cNvPr id="22" name="pl22"/>
             <p:cNvSpPr/>
             <p:nvPr/>
           </p:nvSpPr>
           <p:spPr>
             <a:xfrm>
-              <a:off x="1172049" y="2423217"/>
-              <a:ext cx="7090630" cy="2981080"/>
+              <a:off x="7390199" y="2143092"/>
+              <a:ext cx="0" cy="1317069"/>
             </a:xfrm>
             <a:custGeom>
               <a:avLst/>
               <a:pathLst>
-                <a:path w="7090630" h="2981080">
+                <a:path w="0" h="1317069">
+                  <a:moveTo>
+                    <a:pt x="0" y="1317069"/>
+                  </a:moveTo>
+                  <a:lnTo>
+                    <a:pt x="0" y="0"/>
+                  </a:lnTo>
+                  <a:lnTo>
+                    <a:pt x="0" y="0"/>
+                  </a:lnTo>
+                </a:path>
+              </a:pathLst>
+            </a:custGeom>
+            <a:ln w="13550" cap="flat">
+              <a:solidFill>
+                <a:srgbClr val="EBEBEB">
+                  <a:alpha val="100000"/>
+                </a:srgbClr>
+              </a:solidFill>
+              <a:prstDash val="solid"/>
+              <a:round/>
+            </a:ln>
+          </p:spPr>
+          <p:txBody>
+            <a:bodyPr/>
+            <a:lstStyle/>
+            <a:p/>
+          </p:txBody>
+        </p:sp>
+        <p:sp>
+          <p:nvSpPr>
+            <p:cNvPr id="23" name="pg23"/>
+            <p:cNvSpPr/>
+            <p:nvPr/>
+          </p:nvSpPr>
+          <p:spPr>
+            <a:xfrm>
+              <a:off x="1235312" y="2269295"/>
+              <a:ext cx="6964104" cy="1075801"/>
+            </a:xfrm>
+            <a:custGeom>
+              <a:avLst/>
+              <a:pathLst>
+                <a:path w="6964104" h="1075801">
                   <a:moveTo>
                     <a:pt x="0" y="0"/>
                   </a:moveTo>
                   <a:lnTo>
-                    <a:pt x="71622" y="94158"/>
-                  </a:lnTo>
-                  <a:lnTo>
-                    <a:pt x="143245" y="185488"/>
-                  </a:lnTo>
-                  <a:lnTo>
-                    <a:pt x="214867" y="274074"/>
-                  </a:lnTo>
-                  <a:lnTo>
-                    <a:pt x="286490" y="359999"/>
-                  </a:lnTo>
-                  <a:lnTo>
-                    <a:pt x="358112" y="443342"/>
-                  </a:lnTo>
-                  <a:lnTo>
-                    <a:pt x="429735" y="524181"/>
-                  </a:lnTo>
-                  <a:lnTo>
-                    <a:pt x="501357" y="602591"/>
-                  </a:lnTo>
-                  <a:lnTo>
-                    <a:pt x="572980" y="678646"/>
-                  </a:lnTo>
-                  <a:lnTo>
-                    <a:pt x="644602" y="752415"/>
-                  </a:lnTo>
-                  <a:lnTo>
-                    <a:pt x="716225" y="823969"/>
-                  </a:lnTo>
-                  <a:lnTo>
-                    <a:pt x="787847" y="893372"/>
-                  </a:lnTo>
-                  <a:lnTo>
-                    <a:pt x="859470" y="960690"/>
-                  </a:lnTo>
-                  <a:lnTo>
-                    <a:pt x="931092" y="1025986"/>
-                  </a:lnTo>
-                  <a:lnTo>
-                    <a:pt x="1002715" y="1089320"/>
-                  </a:lnTo>
-                  <a:lnTo>
-                    <a:pt x="1074337" y="1150752"/>
-                  </a:lnTo>
-                  <a:lnTo>
-                    <a:pt x="1145960" y="1210337"/>
-                  </a:lnTo>
-                  <a:lnTo>
-                    <a:pt x="1217582" y="1268133"/>
-                  </a:lnTo>
-                  <a:lnTo>
-                    <a:pt x="1289205" y="1324192"/>
-                  </a:lnTo>
-                  <a:lnTo>
-                    <a:pt x="1360827" y="1378567"/>
-                  </a:lnTo>
-                  <a:lnTo>
-                    <a:pt x="1432450" y="1431308"/>
-                  </a:lnTo>
-                  <a:lnTo>
-                    <a:pt x="1504073" y="1482464"/>
-                  </a:lnTo>
-                  <a:lnTo>
-                    <a:pt x="1575695" y="1532084"/>
-                  </a:lnTo>
-                  <a:lnTo>
-                    <a:pt x="1647318" y="1580213"/>
-                  </a:lnTo>
-                  <a:lnTo>
-                    <a:pt x="1718940" y="1626896"/>
-                  </a:lnTo>
-                  <a:lnTo>
-                    <a:pt x="1790563" y="1672176"/>
-                  </a:lnTo>
-                  <a:lnTo>
-                    <a:pt x="1862185" y="1716096"/>
-                  </a:lnTo>
-                  <a:lnTo>
-                    <a:pt x="1933808" y="1758697"/>
-                  </a:lnTo>
-                  <a:lnTo>
-                    <a:pt x="2005430" y="1800017"/>
-                  </a:lnTo>
-                  <a:lnTo>
-                    <a:pt x="2077053" y="1840096"/>
-                  </a:lnTo>
-                  <a:lnTo>
-                    <a:pt x="2148675" y="1878971"/>
-                  </a:lnTo>
-                  <a:lnTo>
-                    <a:pt x="2220298" y="1916678"/>
-                  </a:lnTo>
-                  <a:lnTo>
-                    <a:pt x="2291920" y="1953252"/>
-                  </a:lnTo>
-                  <a:lnTo>
-                    <a:pt x="2363543" y="1988728"/>
-                  </a:lnTo>
-                  <a:lnTo>
-                    <a:pt x="2435165" y="2023137"/>
-                  </a:lnTo>
-                  <a:lnTo>
-                    <a:pt x="2506788" y="2056513"/>
-                  </a:lnTo>
-                  <a:lnTo>
-                    <a:pt x="2578410" y="2088886"/>
-                  </a:lnTo>
-                  <a:lnTo>
-                    <a:pt x="2650033" y="2120286"/>
-                  </a:lnTo>
-                  <a:lnTo>
-                    <a:pt x="2721655" y="2150743"/>
-                  </a:lnTo>
-                  <a:lnTo>
-                    <a:pt x="2793278" y="2180285"/>
-                  </a:lnTo>
-                  <a:lnTo>
-                    <a:pt x="2864901" y="2208940"/>
-                  </a:lnTo>
-                  <a:lnTo>
-                    <a:pt x="2936523" y="2236733"/>
-                  </a:lnTo>
-                  <a:lnTo>
-                    <a:pt x="3008146" y="2263691"/>
-                  </a:lnTo>
-                  <a:lnTo>
-                    <a:pt x="3079768" y="2289840"/>
-                  </a:lnTo>
-                  <a:lnTo>
-                    <a:pt x="3151391" y="2305195"/>
-                  </a:lnTo>
-                  <a:lnTo>
-                    <a:pt x="3223013" y="2306673"/>
-                  </a:lnTo>
-                  <a:lnTo>
-                    <a:pt x="3294636" y="2308148"/>
-                  </a:lnTo>
-                  <a:lnTo>
-                    <a:pt x="3366258" y="2309621"/>
-                  </a:lnTo>
-                  <a:lnTo>
-                    <a:pt x="3437881" y="2311092"/>
-                  </a:lnTo>
-                  <a:lnTo>
-                    <a:pt x="3509503" y="2312559"/>
-                  </a:lnTo>
-                  <a:lnTo>
-                    <a:pt x="3581126" y="2314024"/>
-                  </a:lnTo>
-                  <a:lnTo>
-                    <a:pt x="3652748" y="2315487"/>
-                  </a:lnTo>
-                  <a:lnTo>
-                    <a:pt x="3724371" y="2316947"/>
-                  </a:lnTo>
-                  <a:lnTo>
-                    <a:pt x="3795993" y="2318404"/>
-                  </a:lnTo>
-                  <a:lnTo>
-                    <a:pt x="3867616" y="2319859"/>
-                  </a:lnTo>
-                  <a:lnTo>
-                    <a:pt x="3939238" y="2321311"/>
-                  </a:lnTo>
-                  <a:lnTo>
-                    <a:pt x="4010861" y="2322760"/>
-                  </a:lnTo>
-                  <a:lnTo>
-                    <a:pt x="4082483" y="2324207"/>
-                  </a:lnTo>
-                  <a:lnTo>
-                    <a:pt x="4154106" y="2325651"/>
-                  </a:lnTo>
-                  <a:lnTo>
-                    <a:pt x="4225729" y="2327093"/>
-                  </a:lnTo>
-                  <a:lnTo>
-                    <a:pt x="4297351" y="2328532"/>
-                  </a:lnTo>
-                  <a:lnTo>
-                    <a:pt x="4368974" y="2329969"/>
-                  </a:lnTo>
-                  <a:lnTo>
-                    <a:pt x="4440596" y="2331403"/>
-                  </a:lnTo>
-                  <a:lnTo>
-                    <a:pt x="4512219" y="2332834"/>
-                  </a:lnTo>
-                  <a:lnTo>
-                    <a:pt x="4583841" y="2334263"/>
-                  </a:lnTo>
-                  <a:lnTo>
-                    <a:pt x="4655464" y="2335689"/>
-                  </a:lnTo>
-                  <a:lnTo>
-                    <a:pt x="4727086" y="2337113"/>
-                  </a:lnTo>
-                  <a:lnTo>
-                    <a:pt x="4798709" y="2338535"/>
-                  </a:lnTo>
-                  <a:lnTo>
-                    <a:pt x="4870331" y="2339953"/>
-                  </a:lnTo>
-                  <a:lnTo>
-                    <a:pt x="4941954" y="2341370"/>
-                  </a:lnTo>
-                  <a:lnTo>
-                    <a:pt x="5013576" y="2342783"/>
-                  </a:lnTo>
-                  <a:lnTo>
-                    <a:pt x="5085199" y="2344194"/>
-                  </a:lnTo>
-                  <a:lnTo>
-                    <a:pt x="5156821" y="2345603"/>
-                  </a:lnTo>
-                  <a:lnTo>
-                    <a:pt x="5228444" y="2347009"/>
-                  </a:lnTo>
-                  <a:lnTo>
-                    <a:pt x="5300066" y="2348413"/>
-                  </a:lnTo>
-                  <a:lnTo>
-                    <a:pt x="5371689" y="2349814"/>
-                  </a:lnTo>
-                  <a:lnTo>
-                    <a:pt x="5443311" y="2351213"/>
-                  </a:lnTo>
-                  <a:lnTo>
-                    <a:pt x="5514934" y="2352609"/>
-                  </a:lnTo>
-                  <a:lnTo>
-                    <a:pt x="5586557" y="2354002"/>
-                  </a:lnTo>
-                  <a:lnTo>
-                    <a:pt x="5658179" y="2355393"/>
-                  </a:lnTo>
-                  <a:lnTo>
-                    <a:pt x="5729802" y="2356782"/>
-                  </a:lnTo>
-                  <a:lnTo>
-                    <a:pt x="5801424" y="2358168"/>
-                  </a:lnTo>
-                  <a:lnTo>
-                    <a:pt x="5873047" y="2359552"/>
-                  </a:lnTo>
-                  <a:lnTo>
-                    <a:pt x="5944669" y="2360933"/>
-                  </a:lnTo>
-                  <a:lnTo>
-                    <a:pt x="6016292" y="2362312"/>
-                  </a:lnTo>
-                  <a:lnTo>
-                    <a:pt x="6087914" y="2363688"/>
-                  </a:lnTo>
-                  <a:lnTo>
-                    <a:pt x="6159537" y="2365062"/>
-                  </a:lnTo>
-                  <a:lnTo>
-                    <a:pt x="6231159" y="2366434"/>
-                  </a:lnTo>
-                  <a:lnTo>
-                    <a:pt x="6302782" y="2367803"/>
-                  </a:lnTo>
-                  <a:lnTo>
-                    <a:pt x="6374404" y="2369169"/>
-                  </a:lnTo>
-                  <a:lnTo>
-                    <a:pt x="6446027" y="2370533"/>
-                  </a:lnTo>
-                  <a:lnTo>
-                    <a:pt x="6517649" y="2371895"/>
-                  </a:lnTo>
-                  <a:lnTo>
-                    <a:pt x="6589272" y="2373254"/>
-                  </a:lnTo>
-                  <a:lnTo>
-                    <a:pt x="6660894" y="2374611"/>
-                  </a:lnTo>
-                  <a:lnTo>
-                    <a:pt x="6732517" y="2375965"/>
-                  </a:lnTo>
-                  <a:lnTo>
-                    <a:pt x="6804139" y="2377317"/>
-                  </a:lnTo>
-                  <a:lnTo>
-                    <a:pt x="6875762" y="2378667"/>
-                  </a:lnTo>
-                  <a:lnTo>
-                    <a:pt x="6947385" y="2380014"/>
-                  </a:lnTo>
-                  <a:lnTo>
-                    <a:pt x="7019007" y="2381359"/>
-                  </a:lnTo>
-                  <a:lnTo>
-                    <a:pt x="7090630" y="2382701"/>
-                  </a:lnTo>
-                  <a:lnTo>
-                    <a:pt x="7090630" y="2981080"/>
-                  </a:lnTo>
-                  <a:lnTo>
-                    <a:pt x="7019007" y="2976342"/>
-                  </a:lnTo>
-                  <a:lnTo>
-                    <a:pt x="6947385" y="2971458"/>
-                  </a:lnTo>
-                  <a:lnTo>
-                    <a:pt x="6875762" y="2966422"/>
-                  </a:lnTo>
-                  <a:lnTo>
-                    <a:pt x="6804139" y="2961231"/>
-                  </a:lnTo>
-                  <a:lnTo>
-                    <a:pt x="6732517" y="2955878"/>
-                  </a:lnTo>
-                  <a:lnTo>
-                    <a:pt x="6660894" y="2950360"/>
-                  </a:lnTo>
-                  <a:lnTo>
-                    <a:pt x="6589272" y="2944671"/>
-                  </a:lnTo>
-                  <a:lnTo>
-                    <a:pt x="6517649" y="2938805"/>
-                  </a:lnTo>
-                  <a:lnTo>
-                    <a:pt x="6446027" y="2932758"/>
-                  </a:lnTo>
-                  <a:lnTo>
-                    <a:pt x="6374404" y="2926524"/>
-                  </a:lnTo>
-                  <a:lnTo>
-                    <a:pt x="6302782" y="2920096"/>
-                  </a:lnTo>
-                  <a:lnTo>
-                    <a:pt x="6231159" y="2913470"/>
-                  </a:lnTo>
-                  <a:lnTo>
-                    <a:pt x="6159537" y="2906638"/>
-                  </a:lnTo>
-                  <a:lnTo>
-                    <a:pt x="6087914" y="2899595"/>
-                  </a:lnTo>
-                  <a:lnTo>
-                    <a:pt x="6016292" y="2892333"/>
-                  </a:lnTo>
-                  <a:lnTo>
-                    <a:pt x="5944669" y="2884847"/>
-                  </a:lnTo>
-                  <a:lnTo>
-                    <a:pt x="5873047" y="2877128"/>
-                  </a:lnTo>
-                  <a:lnTo>
-                    <a:pt x="5801424" y="2869171"/>
-                  </a:lnTo>
-                  <a:lnTo>
-                    <a:pt x="5729802" y="2860967"/>
-                  </a:lnTo>
-                  <a:lnTo>
-                    <a:pt x="5658179" y="2852509"/>
-                  </a:lnTo>
-                  <a:lnTo>
-                    <a:pt x="5586557" y="2843788"/>
-                  </a:lnTo>
-                  <a:lnTo>
-                    <a:pt x="5514934" y="2834798"/>
-                  </a:lnTo>
-                  <a:lnTo>
-                    <a:pt x="5443311" y="2825530"/>
-                  </a:lnTo>
-                  <a:lnTo>
-                    <a:pt x="5371689" y="2815974"/>
-                  </a:lnTo>
-                  <a:lnTo>
-                    <a:pt x="5300066" y="2806122"/>
-                  </a:lnTo>
-                  <a:lnTo>
-                    <a:pt x="5228444" y="2795965"/>
-                  </a:lnTo>
-                  <a:lnTo>
-                    <a:pt x="5156821" y="2785494"/>
-                  </a:lnTo>
-                  <a:lnTo>
-                    <a:pt x="5085199" y="2774698"/>
-                  </a:lnTo>
-                  <a:lnTo>
-                    <a:pt x="5013576" y="2763568"/>
-                  </a:lnTo>
-                  <a:lnTo>
-                    <a:pt x="4941954" y="2752093"/>
-                  </a:lnTo>
-                  <a:lnTo>
-                    <a:pt x="4870331" y="2740262"/>
-                  </a:lnTo>
-                  <a:lnTo>
-                    <a:pt x="4798709" y="2728066"/>
-                  </a:lnTo>
-                  <a:lnTo>
-                    <a:pt x="4727086" y="2715491"/>
-                  </a:lnTo>
-                  <a:lnTo>
-                    <a:pt x="4655464" y="2702527"/>
-                  </a:lnTo>
-                  <a:lnTo>
-                    <a:pt x="4583841" y="2689161"/>
-                  </a:lnTo>
-                  <a:lnTo>
-                    <a:pt x="4512219" y="2675381"/>
-                  </a:lnTo>
-                  <a:lnTo>
-                    <a:pt x="4440596" y="2661175"/>
-                  </a:lnTo>
-                  <a:lnTo>
-                    <a:pt x="4368974" y="2646528"/>
-                  </a:lnTo>
-                  <a:lnTo>
-                    <a:pt x="4297351" y="2631428"/>
-                  </a:lnTo>
-                  <a:lnTo>
-                    <a:pt x="4225729" y="2615860"/>
-                  </a:lnTo>
-                  <a:lnTo>
-                    <a:pt x="4154106" y="2599810"/>
-                  </a:lnTo>
-                  <a:lnTo>
-                    <a:pt x="4082483" y="2583263"/>
-                  </a:lnTo>
-                  <a:lnTo>
-                    <a:pt x="4010861" y="2566203"/>
-                  </a:lnTo>
-                  <a:lnTo>
-                    <a:pt x="3939238" y="2548614"/>
-                  </a:lnTo>
-                  <a:lnTo>
-                    <a:pt x="3867616" y="2530481"/>
-                  </a:lnTo>
-                  <a:lnTo>
-                    <a:pt x="3795993" y="2511787"/>
-                  </a:lnTo>
-                  <a:lnTo>
-                    <a:pt x="3724371" y="2492513"/>
-                  </a:lnTo>
-                  <a:lnTo>
-                    <a:pt x="3652748" y="2472642"/>
-                  </a:lnTo>
-                  <a:lnTo>
-                    <a:pt x="3581126" y="2452156"/>
-                  </a:lnTo>
-                  <a:lnTo>
-                    <a:pt x="3509503" y="2431035"/>
-                  </a:lnTo>
-                  <a:lnTo>
-                    <a:pt x="3437881" y="2409260"/>
-                  </a:lnTo>
-                  <a:lnTo>
-                    <a:pt x="3366258" y="2386810"/>
-                  </a:lnTo>
-                  <a:lnTo>
-                    <a:pt x="3294636" y="2363666"/>
-                  </a:lnTo>
-                  <a:lnTo>
-                    <a:pt x="3223013" y="2339804"/>
-                  </a:lnTo>
-                  <a:lnTo>
-                    <a:pt x="3151391" y="2315203"/>
-                  </a:lnTo>
-                  <a:lnTo>
-                    <a:pt x="3079768" y="2303714"/>
-                  </a:lnTo>
-                  <a:lnTo>
-                    <a:pt x="3008146" y="2302230"/>
-                  </a:lnTo>
-                  <a:lnTo>
-                    <a:pt x="2936523" y="2300744"/>
-                  </a:lnTo>
-                  <a:lnTo>
-                    <a:pt x="2864901" y="2299255"/>
-                  </a:lnTo>
-                  <a:lnTo>
-                    <a:pt x="2793278" y="2297764"/>
-                  </a:lnTo>
-                  <a:lnTo>
-                    <a:pt x="2721655" y="2296270"/>
-                  </a:lnTo>
-                  <a:lnTo>
-                    <a:pt x="2650033" y="2294773"/>
-                  </a:lnTo>
-                  <a:lnTo>
-                    <a:pt x="2578410" y="2293274"/>
-                  </a:lnTo>
-                  <a:lnTo>
-                    <a:pt x="2506788" y="2291772"/>
-                  </a:lnTo>
-                  <a:lnTo>
-                    <a:pt x="2435165" y="2290267"/>
-                  </a:lnTo>
-                  <a:lnTo>
-                    <a:pt x="2363543" y="2288759"/>
-                  </a:lnTo>
-                  <a:lnTo>
-                    <a:pt x="2291920" y="2287249"/>
-                  </a:lnTo>
-                  <a:lnTo>
-                    <a:pt x="2220298" y="2285736"/>
-                  </a:lnTo>
-                  <a:lnTo>
-                    <a:pt x="2148675" y="2284220"/>
-                  </a:lnTo>
-                  <a:lnTo>
-                    <a:pt x="2077053" y="2282702"/>
-                  </a:lnTo>
-                  <a:lnTo>
-                    <a:pt x="2005430" y="2281181"/>
-                  </a:lnTo>
-                  <a:lnTo>
-                    <a:pt x="1933808" y="2279657"/>
-                  </a:lnTo>
-                  <a:lnTo>
-                    <a:pt x="1862185" y="2278131"/>
-                  </a:lnTo>
-                  <a:lnTo>
-                    <a:pt x="1790563" y="2276602"/>
-                  </a:lnTo>
-                  <a:lnTo>
-                    <a:pt x="1718940" y="2275070"/>
-                  </a:lnTo>
-                  <a:lnTo>
-                    <a:pt x="1647318" y="2273535"/>
-                  </a:lnTo>
-                  <a:lnTo>
-                    <a:pt x="1575695" y="2271998"/>
-                  </a:lnTo>
-                  <a:lnTo>
-                    <a:pt x="1504073" y="2270458"/>
-                  </a:lnTo>
-                  <a:lnTo>
-                    <a:pt x="1432450" y="2268915"/>
-                  </a:lnTo>
-                  <a:lnTo>
-                    <a:pt x="1360827" y="2267369"/>
-                  </a:lnTo>
-                  <a:lnTo>
-                    <a:pt x="1289205" y="2265821"/>
-                  </a:lnTo>
-                  <a:lnTo>
-                    <a:pt x="1217582" y="2264269"/>
-                  </a:lnTo>
-                  <a:lnTo>
-                    <a:pt x="1145960" y="2262715"/>
-                  </a:lnTo>
-                  <a:lnTo>
-                    <a:pt x="1074337" y="2261159"/>
-                  </a:lnTo>
-                  <a:lnTo>
-                    <a:pt x="1002715" y="2259599"/>
-                  </a:lnTo>
-                  <a:lnTo>
-                    <a:pt x="931092" y="2258037"/>
-                  </a:lnTo>
-                  <a:lnTo>
-                    <a:pt x="859470" y="2256472"/>
-                  </a:lnTo>
-                  <a:lnTo>
-                    <a:pt x="787847" y="2254904"/>
-                  </a:lnTo>
-                  <a:lnTo>
-                    <a:pt x="716225" y="2253333"/>
-                  </a:lnTo>
-                  <a:lnTo>
-                    <a:pt x="644602" y="2251760"/>
-                  </a:lnTo>
-                  <a:lnTo>
-                    <a:pt x="572980" y="2250183"/>
-                  </a:lnTo>
-                  <a:lnTo>
-                    <a:pt x="501357" y="2248604"/>
-                  </a:lnTo>
-                  <a:lnTo>
-                    <a:pt x="429735" y="2247022"/>
-                  </a:lnTo>
-                  <a:lnTo>
-                    <a:pt x="358112" y="2245438"/>
-                  </a:lnTo>
-                  <a:lnTo>
-                    <a:pt x="286490" y="2243850"/>
-                  </a:lnTo>
-                  <a:lnTo>
-                    <a:pt x="214867" y="2242259"/>
-                  </a:lnTo>
-                  <a:lnTo>
-                    <a:pt x="143245" y="2240666"/>
-                  </a:lnTo>
-                  <a:lnTo>
-                    <a:pt x="71622" y="2239070"/>
-                  </a:lnTo>
-                  <a:lnTo>
-                    <a:pt x="0" y="2237471"/>
+                    <a:pt x="70344" y="33979"/>
+                  </a:lnTo>
+                  <a:lnTo>
+                    <a:pt x="140688" y="66938"/>
+                  </a:lnTo>
+                  <a:lnTo>
+                    <a:pt x="211033" y="98907"/>
+                  </a:lnTo>
+                  <a:lnTo>
+                    <a:pt x="281377" y="129915"/>
+                  </a:lnTo>
+                  <a:lnTo>
+                    <a:pt x="351722" y="159991"/>
+                  </a:lnTo>
+                  <a:lnTo>
+                    <a:pt x="422066" y="189164"/>
+                  </a:lnTo>
+                  <a:lnTo>
+                    <a:pt x="492411" y="217461"/>
+                  </a:lnTo>
+                  <a:lnTo>
+                    <a:pt x="562755" y="244907"/>
+                  </a:lnTo>
+                  <a:lnTo>
+                    <a:pt x="633100" y="271529"/>
+                  </a:lnTo>
+                  <a:lnTo>
+                    <a:pt x="703444" y="297351"/>
+                  </a:lnTo>
+                  <a:lnTo>
+                    <a:pt x="773789" y="322397"/>
+                  </a:lnTo>
+                  <a:lnTo>
+                    <a:pt x="844133" y="346690"/>
+                  </a:lnTo>
+                  <a:lnTo>
+                    <a:pt x="914478" y="370254"/>
+                  </a:lnTo>
+                  <a:lnTo>
+                    <a:pt x="984822" y="393110"/>
+                  </a:lnTo>
+                  <a:lnTo>
+                    <a:pt x="1055167" y="415279"/>
+                  </a:lnTo>
+                  <a:lnTo>
+                    <a:pt x="1125511" y="436782"/>
+                  </a:lnTo>
+                  <a:lnTo>
+                    <a:pt x="1195856" y="457639"/>
+                  </a:lnTo>
+                  <a:lnTo>
+                    <a:pt x="1266200" y="477869"/>
+                  </a:lnTo>
+                  <a:lnTo>
+                    <a:pt x="1336545" y="497492"/>
+                  </a:lnTo>
+                  <a:lnTo>
+                    <a:pt x="1406889" y="516525"/>
+                  </a:lnTo>
+                  <a:lnTo>
+                    <a:pt x="1477234" y="534986"/>
+                  </a:lnTo>
+                  <a:lnTo>
+                    <a:pt x="1547578" y="552893"/>
+                  </a:lnTo>
+                  <a:lnTo>
+                    <a:pt x="1617923" y="570261"/>
+                  </a:lnTo>
+                  <a:lnTo>
+                    <a:pt x="1688267" y="587108"/>
+                  </a:lnTo>
+                  <a:lnTo>
+                    <a:pt x="1758612" y="603449"/>
+                  </a:lnTo>
+                  <a:lnTo>
+                    <a:pt x="1828956" y="619298"/>
+                  </a:lnTo>
+                  <a:lnTo>
+                    <a:pt x="1899301" y="634672"/>
+                  </a:lnTo>
+                  <a:lnTo>
+                    <a:pt x="1969645" y="649584"/>
+                  </a:lnTo>
+                  <a:lnTo>
+                    <a:pt x="2039990" y="664047"/>
+                  </a:lnTo>
+                  <a:lnTo>
+                    <a:pt x="2110334" y="678076"/>
+                  </a:lnTo>
+                  <a:lnTo>
+                    <a:pt x="2180679" y="691684"/>
+                  </a:lnTo>
+                  <a:lnTo>
+                    <a:pt x="2251023" y="704883"/>
+                  </a:lnTo>
+                  <a:lnTo>
+                    <a:pt x="2321368" y="717685"/>
+                  </a:lnTo>
+                  <a:lnTo>
+                    <a:pt x="2391712" y="730102"/>
+                  </a:lnTo>
+                  <a:lnTo>
+                    <a:pt x="2462057" y="742147"/>
+                  </a:lnTo>
+                  <a:lnTo>
+                    <a:pt x="2532401" y="753829"/>
+                  </a:lnTo>
+                  <a:lnTo>
+                    <a:pt x="2602746" y="765161"/>
+                  </a:lnTo>
+                  <a:lnTo>
+                    <a:pt x="2673090" y="776152"/>
+                  </a:lnTo>
+                  <a:lnTo>
+                    <a:pt x="2743435" y="786813"/>
+                  </a:lnTo>
+                  <a:lnTo>
+                    <a:pt x="2813779" y="797154"/>
+                  </a:lnTo>
+                  <a:lnTo>
+                    <a:pt x="2884124" y="807184"/>
+                  </a:lnTo>
+                  <a:lnTo>
+                    <a:pt x="2954468" y="816913"/>
+                  </a:lnTo>
+                  <a:lnTo>
+                    <a:pt x="3024813" y="826349"/>
+                  </a:lnTo>
+                  <a:lnTo>
+                    <a:pt x="3095157" y="831890"/>
+                  </a:lnTo>
+                  <a:lnTo>
+                    <a:pt x="3165502" y="832424"/>
+                  </a:lnTo>
+                  <a:lnTo>
+                    <a:pt x="3235846" y="832956"/>
+                  </a:lnTo>
+                  <a:lnTo>
+                    <a:pt x="3306191" y="833488"/>
+                  </a:lnTo>
+                  <a:lnTo>
+                    <a:pt x="3376535" y="834018"/>
+                  </a:lnTo>
+                  <a:lnTo>
+                    <a:pt x="3446880" y="834548"/>
+                  </a:lnTo>
+                  <a:lnTo>
+                    <a:pt x="3517224" y="835077"/>
+                  </a:lnTo>
+                  <a:lnTo>
+                    <a:pt x="3587569" y="835604"/>
+                  </a:lnTo>
+                  <a:lnTo>
+                    <a:pt x="3657913" y="836131"/>
+                  </a:lnTo>
+                  <a:lnTo>
+                    <a:pt x="3728257" y="836657"/>
+                  </a:lnTo>
+                  <a:lnTo>
+                    <a:pt x="3798602" y="837182"/>
+                  </a:lnTo>
+                  <a:lnTo>
+                    <a:pt x="3868946" y="837706"/>
+                  </a:lnTo>
+                  <a:lnTo>
+                    <a:pt x="3939291" y="838229"/>
+                  </a:lnTo>
+                  <a:lnTo>
+                    <a:pt x="4009635" y="838751"/>
+                  </a:lnTo>
+                  <a:lnTo>
+                    <a:pt x="4079980" y="839273"/>
+                  </a:lnTo>
+                  <a:lnTo>
+                    <a:pt x="4150324" y="839793"/>
+                  </a:lnTo>
+                  <a:lnTo>
+                    <a:pt x="4220669" y="840312"/>
+                  </a:lnTo>
+                  <a:lnTo>
+                    <a:pt x="4291013" y="840831"/>
+                  </a:lnTo>
+                  <a:lnTo>
+                    <a:pt x="4361358" y="841348"/>
+                  </a:lnTo>
+                  <a:lnTo>
+                    <a:pt x="4431702" y="841865"/>
+                  </a:lnTo>
+                  <a:lnTo>
+                    <a:pt x="4502047" y="842380"/>
+                  </a:lnTo>
+                  <a:lnTo>
+                    <a:pt x="4572391" y="842895"/>
+                  </a:lnTo>
+                  <a:lnTo>
+                    <a:pt x="4642736" y="843409"/>
+                  </a:lnTo>
+                  <a:lnTo>
+                    <a:pt x="4713080" y="843922"/>
+                  </a:lnTo>
+                  <a:lnTo>
+                    <a:pt x="4783425" y="844434"/>
+                  </a:lnTo>
+                  <a:lnTo>
+                    <a:pt x="4853769" y="844945"/>
+                  </a:lnTo>
+                  <a:lnTo>
+                    <a:pt x="4924114" y="845455"/>
+                  </a:lnTo>
+                  <a:lnTo>
+                    <a:pt x="4994458" y="845964"/>
+                  </a:lnTo>
+                  <a:lnTo>
+                    <a:pt x="5064803" y="846473"/>
+                  </a:lnTo>
+                  <a:lnTo>
+                    <a:pt x="5135147" y="846980"/>
+                  </a:lnTo>
+                  <a:lnTo>
+                    <a:pt x="5205492" y="847487"/>
+                  </a:lnTo>
+                  <a:lnTo>
+                    <a:pt x="5275836" y="847992"/>
+                  </a:lnTo>
+                  <a:lnTo>
+                    <a:pt x="5346181" y="848497"/>
+                  </a:lnTo>
+                  <a:lnTo>
+                    <a:pt x="5416525" y="849001"/>
+                  </a:lnTo>
+                  <a:lnTo>
+                    <a:pt x="5486870" y="849504"/>
+                  </a:lnTo>
+                  <a:lnTo>
+                    <a:pt x="5557214" y="850006"/>
+                  </a:lnTo>
+                  <a:lnTo>
+                    <a:pt x="5627559" y="850507"/>
+                  </a:lnTo>
+                  <a:lnTo>
+                    <a:pt x="5697903" y="851007"/>
+                  </a:lnTo>
+                  <a:lnTo>
+                    <a:pt x="5768248" y="851506"/>
+                  </a:lnTo>
+                  <a:lnTo>
+                    <a:pt x="5838592" y="852005"/>
+                  </a:lnTo>
+                  <a:lnTo>
+                    <a:pt x="5908937" y="852503"/>
+                  </a:lnTo>
+                  <a:lnTo>
+                    <a:pt x="5979281" y="852999"/>
+                  </a:lnTo>
+                  <a:lnTo>
+                    <a:pt x="6049626" y="853495"/>
+                  </a:lnTo>
+                  <a:lnTo>
+                    <a:pt x="6119970" y="853990"/>
+                  </a:lnTo>
+                  <a:lnTo>
+                    <a:pt x="6190315" y="854484"/>
+                  </a:lnTo>
+                  <a:lnTo>
+                    <a:pt x="6260659" y="854977"/>
+                  </a:lnTo>
+                  <a:lnTo>
+                    <a:pt x="6331004" y="855469"/>
+                  </a:lnTo>
+                  <a:lnTo>
+                    <a:pt x="6401348" y="855961"/>
+                  </a:lnTo>
+                  <a:lnTo>
+                    <a:pt x="6471693" y="856451"/>
+                  </a:lnTo>
+                  <a:lnTo>
+                    <a:pt x="6542037" y="856941"/>
+                  </a:lnTo>
+                  <a:lnTo>
+                    <a:pt x="6612382" y="857430"/>
+                  </a:lnTo>
+                  <a:lnTo>
+                    <a:pt x="6682726" y="857918"/>
+                  </a:lnTo>
+                  <a:lnTo>
+                    <a:pt x="6753071" y="858405"/>
+                  </a:lnTo>
+                  <a:lnTo>
+                    <a:pt x="6823415" y="858891"/>
+                  </a:lnTo>
+                  <a:lnTo>
+                    <a:pt x="6893760" y="859376"/>
+                  </a:lnTo>
+                  <a:lnTo>
+                    <a:pt x="6964104" y="859861"/>
+                  </a:lnTo>
+                  <a:lnTo>
+                    <a:pt x="6964104" y="1075801"/>
+                  </a:lnTo>
+                  <a:lnTo>
+                    <a:pt x="6893760" y="1074092"/>
+                  </a:lnTo>
+                  <a:lnTo>
+                    <a:pt x="6823415" y="1072329"/>
+                  </a:lnTo>
+                  <a:lnTo>
+                    <a:pt x="6753071" y="1070512"/>
+                  </a:lnTo>
+                  <a:lnTo>
+                    <a:pt x="6682726" y="1068638"/>
+                  </a:lnTo>
+                  <a:lnTo>
+                    <a:pt x="6612382" y="1066707"/>
+                  </a:lnTo>
+                  <a:lnTo>
+                    <a:pt x="6542037" y="1064715"/>
+                  </a:lnTo>
+                  <a:lnTo>
+                    <a:pt x="6471693" y="1062662"/>
+                  </a:lnTo>
+                  <a:lnTo>
+                    <a:pt x="6401348" y="1060545"/>
+                  </a:lnTo>
+                  <a:lnTo>
+                    <a:pt x="6331004" y="1058363"/>
+                  </a:lnTo>
+                  <a:lnTo>
+                    <a:pt x="6260659" y="1056113"/>
+                  </a:lnTo>
+                  <a:lnTo>
+                    <a:pt x="6190315" y="1053794"/>
+                  </a:lnTo>
+                  <a:lnTo>
+                    <a:pt x="6119970" y="1051402"/>
+                  </a:lnTo>
+                  <a:lnTo>
+                    <a:pt x="6049626" y="1048937"/>
+                  </a:lnTo>
+                  <a:lnTo>
+                    <a:pt x="5979281" y="1046395"/>
+                  </a:lnTo>
+                  <a:lnTo>
+                    <a:pt x="5908937" y="1043775"/>
+                  </a:lnTo>
+                  <a:lnTo>
+                    <a:pt x="5838592" y="1041073"/>
+                  </a:lnTo>
+                  <a:lnTo>
+                    <a:pt x="5768248" y="1038288"/>
+                  </a:lnTo>
+                  <a:lnTo>
+                    <a:pt x="5697903" y="1035416"/>
+                  </a:lnTo>
+                  <a:lnTo>
+                    <a:pt x="5627559" y="1032455"/>
+                  </a:lnTo>
+                  <a:lnTo>
+                    <a:pt x="5557214" y="1029403"/>
+                  </a:lnTo>
+                  <a:lnTo>
+                    <a:pt x="5486870" y="1026256"/>
+                  </a:lnTo>
+                  <a:lnTo>
+                    <a:pt x="5416525" y="1023012"/>
+                  </a:lnTo>
+                  <a:lnTo>
+                    <a:pt x="5346181" y="1019667"/>
+                  </a:lnTo>
+                  <a:lnTo>
+                    <a:pt x="5275836" y="1016218"/>
+                  </a:lnTo>
+                  <a:lnTo>
+                    <a:pt x="5205492" y="1012663"/>
+                  </a:lnTo>
+                  <a:lnTo>
+                    <a:pt x="5135147" y="1008998"/>
+                  </a:lnTo>
+                  <a:lnTo>
+                    <a:pt x="5064803" y="1005219"/>
+                  </a:lnTo>
+                  <a:lnTo>
+                    <a:pt x="4994458" y="1001323"/>
+                  </a:lnTo>
+                  <a:lnTo>
+                    <a:pt x="4924114" y="997306"/>
+                  </a:lnTo>
+                  <a:lnTo>
+                    <a:pt x="4853769" y="993165"/>
+                  </a:lnTo>
+                  <a:lnTo>
+                    <a:pt x="4783425" y="988896"/>
+                  </a:lnTo>
+                  <a:lnTo>
+                    <a:pt x="4713080" y="984494"/>
+                  </a:lnTo>
+                  <a:lnTo>
+                    <a:pt x="4642736" y="979956"/>
+                  </a:lnTo>
+                  <a:lnTo>
+                    <a:pt x="4572391" y="975278"/>
+                  </a:lnTo>
+                  <a:lnTo>
+                    <a:pt x="4502047" y="970455"/>
+                  </a:lnTo>
+                  <a:lnTo>
+                    <a:pt x="4431702" y="965482"/>
+                  </a:lnTo>
+                  <a:lnTo>
+                    <a:pt x="4361358" y="960355"/>
+                  </a:lnTo>
+                  <a:lnTo>
+                    <a:pt x="4291013" y="955069"/>
+                  </a:lnTo>
+                  <a:lnTo>
+                    <a:pt x="4220669" y="949620"/>
+                  </a:lnTo>
+                  <a:lnTo>
+                    <a:pt x="4150324" y="944002"/>
+                  </a:lnTo>
+                  <a:lnTo>
+                    <a:pt x="4079980" y="938210"/>
+                  </a:lnTo>
+                  <a:lnTo>
+                    <a:pt x="4009635" y="932238"/>
+                  </a:lnTo>
+                  <a:lnTo>
+                    <a:pt x="3939291" y="926082"/>
+                  </a:lnTo>
+                  <a:lnTo>
+                    <a:pt x="3868946" y="919735"/>
+                  </a:lnTo>
+                  <a:lnTo>
+                    <a:pt x="3798602" y="913191"/>
+                  </a:lnTo>
+                  <a:lnTo>
+                    <a:pt x="3728257" y="906444"/>
+                  </a:lnTo>
+                  <a:lnTo>
+                    <a:pt x="3657913" y="899489"/>
+                  </a:lnTo>
+                  <a:lnTo>
+                    <a:pt x="3587569" y="892318"/>
+                  </a:lnTo>
+                  <a:lnTo>
+                    <a:pt x="3517224" y="884925"/>
+                  </a:lnTo>
+                  <a:lnTo>
+                    <a:pt x="3446880" y="877303"/>
+                  </a:lnTo>
+                  <a:lnTo>
+                    <a:pt x="3376535" y="869445"/>
+                  </a:lnTo>
+                  <a:lnTo>
+                    <a:pt x="3306191" y="861343"/>
+                  </a:lnTo>
+                  <a:lnTo>
+                    <a:pt x="3235846" y="852991"/>
+                  </a:lnTo>
+                  <a:lnTo>
+                    <a:pt x="3165502" y="844380"/>
+                  </a:lnTo>
+                  <a:lnTo>
+                    <a:pt x="3095157" y="835502"/>
+                  </a:lnTo>
+                  <a:lnTo>
+                    <a:pt x="3024813" y="831356"/>
+                  </a:lnTo>
+                  <a:lnTo>
+                    <a:pt x="2954468" y="830820"/>
+                  </a:lnTo>
+                  <a:lnTo>
+                    <a:pt x="2884124" y="830284"/>
+                  </a:lnTo>
+                  <a:lnTo>
+                    <a:pt x="2813779" y="829747"/>
+                  </a:lnTo>
+                  <a:lnTo>
+                    <a:pt x="2743435" y="829209"/>
+                  </a:lnTo>
+                  <a:lnTo>
+                    <a:pt x="2673090" y="828669"/>
+                  </a:lnTo>
+                  <a:lnTo>
+                    <a:pt x="2602746" y="828129"/>
+                  </a:lnTo>
+                  <a:lnTo>
+                    <a:pt x="2532401" y="827588"/>
+                  </a:lnTo>
+                  <a:lnTo>
+                    <a:pt x="2462057" y="827046"/>
+                  </a:lnTo>
+                  <a:lnTo>
+                    <a:pt x="2391712" y="826503"/>
+                  </a:lnTo>
+                  <a:lnTo>
+                    <a:pt x="2321368" y="825959"/>
+                  </a:lnTo>
+                  <a:lnTo>
+                    <a:pt x="2251023" y="825414"/>
+                  </a:lnTo>
+                  <a:lnTo>
+                    <a:pt x="2180679" y="824868"/>
+                  </a:lnTo>
+                  <a:lnTo>
+                    <a:pt x="2110334" y="824321"/>
+                  </a:lnTo>
+                  <a:lnTo>
+                    <a:pt x="2039990" y="823773"/>
+                  </a:lnTo>
+                  <a:lnTo>
+                    <a:pt x="1969645" y="823224"/>
+                  </a:lnTo>
+                  <a:lnTo>
+                    <a:pt x="1899301" y="822674"/>
+                  </a:lnTo>
+                  <a:lnTo>
+                    <a:pt x="1828956" y="822124"/>
+                  </a:lnTo>
+                  <a:lnTo>
+                    <a:pt x="1758612" y="821572"/>
+                  </a:lnTo>
+                  <a:lnTo>
+                    <a:pt x="1688267" y="821019"/>
+                  </a:lnTo>
+                  <a:lnTo>
+                    <a:pt x="1617923" y="820465"/>
+                  </a:lnTo>
+                  <a:lnTo>
+                    <a:pt x="1547578" y="819910"/>
+                  </a:lnTo>
+                  <a:lnTo>
+                    <a:pt x="1477234" y="819354"/>
+                  </a:lnTo>
+                  <a:lnTo>
+                    <a:pt x="1406889" y="818798"/>
+                  </a:lnTo>
+                  <a:lnTo>
+                    <a:pt x="1336545" y="818240"/>
+                  </a:lnTo>
+                  <a:lnTo>
+                    <a:pt x="1266200" y="817681"/>
+                  </a:lnTo>
+                  <a:lnTo>
+                    <a:pt x="1195856" y="817121"/>
+                  </a:lnTo>
+                  <a:lnTo>
+                    <a:pt x="1125511" y="816560"/>
+                  </a:lnTo>
+                  <a:lnTo>
+                    <a:pt x="1055167" y="815999"/>
+                  </a:lnTo>
+                  <a:lnTo>
+                    <a:pt x="984822" y="815436"/>
+                  </a:lnTo>
+                  <a:lnTo>
+                    <a:pt x="914478" y="814872"/>
+                  </a:lnTo>
+                  <a:lnTo>
+                    <a:pt x="844133" y="814307"/>
+                  </a:lnTo>
+                  <a:lnTo>
+                    <a:pt x="773789" y="813741"/>
+                  </a:lnTo>
+                  <a:lnTo>
+                    <a:pt x="703444" y="813175"/>
+                  </a:lnTo>
+                  <a:lnTo>
+                    <a:pt x="633100" y="812607"/>
+                  </a:lnTo>
+                  <a:lnTo>
+                    <a:pt x="562755" y="812038"/>
+                  </a:lnTo>
+                  <a:lnTo>
+                    <a:pt x="492411" y="811468"/>
+                  </a:lnTo>
+                  <a:lnTo>
+                    <a:pt x="422066" y="810897"/>
+                  </a:lnTo>
+                  <a:lnTo>
+                    <a:pt x="351722" y="810325"/>
+                  </a:lnTo>
+                  <a:lnTo>
+                    <a:pt x="281377" y="809752"/>
+                  </a:lnTo>
+                  <a:lnTo>
+                    <a:pt x="211033" y="809178"/>
+                  </a:lnTo>
+                  <a:lnTo>
+                    <a:pt x="140688" y="808603"/>
+                  </a:lnTo>
+                  <a:lnTo>
+                    <a:pt x="70344" y="808027"/>
+                  </a:lnTo>
+                  <a:lnTo>
+                    <a:pt x="0" y="807450"/>
                   </a:lnTo>
                   <a:close/>
                 </a:path>
@@ -3670,643 +3705,318 @@
         </p:sp>
         <p:sp>
           <p:nvSpPr>
-            <p:cNvPr id="23" name="pl23"/>
-            <p:cNvSpPr/>
-            <p:nvPr/>
-          </p:nvSpPr>
-          <p:spPr>
-            <a:xfrm>
-              <a:off x="1172049" y="2423217"/>
-              <a:ext cx="7090630" cy="2382701"/>
-            </a:xfrm>
-            <a:custGeom>
-              <a:avLst/>
-              <a:pathLst>
-                <a:path w="7090630" h="2382701">
-                  <a:moveTo>
-                    <a:pt x="0" y="0"/>
-                  </a:moveTo>
-                  <a:lnTo>
-                    <a:pt x="71622" y="94158"/>
-                  </a:lnTo>
-                  <a:lnTo>
-                    <a:pt x="143245" y="185488"/>
-                  </a:lnTo>
-                  <a:lnTo>
-                    <a:pt x="214867" y="274074"/>
-                  </a:lnTo>
-                  <a:lnTo>
-                    <a:pt x="286490" y="359999"/>
-                  </a:lnTo>
-                  <a:lnTo>
-                    <a:pt x="358112" y="443342"/>
-                  </a:lnTo>
-                  <a:lnTo>
-                    <a:pt x="429735" y="524181"/>
-                  </a:lnTo>
-                  <a:lnTo>
-                    <a:pt x="501357" y="602591"/>
-                  </a:lnTo>
-                  <a:lnTo>
-                    <a:pt x="572980" y="678646"/>
-                  </a:lnTo>
-                  <a:lnTo>
-                    <a:pt x="644602" y="752415"/>
-                  </a:lnTo>
-                  <a:lnTo>
-                    <a:pt x="716225" y="823969"/>
-                  </a:lnTo>
-                  <a:lnTo>
-                    <a:pt x="787847" y="893372"/>
-                  </a:lnTo>
-                  <a:lnTo>
-                    <a:pt x="859470" y="960690"/>
-                  </a:lnTo>
-                  <a:lnTo>
-                    <a:pt x="931092" y="1025986"/>
-                  </a:lnTo>
-                  <a:lnTo>
-                    <a:pt x="1002715" y="1089320"/>
-                  </a:lnTo>
-                  <a:lnTo>
-                    <a:pt x="1074337" y="1150752"/>
-                  </a:lnTo>
-                  <a:lnTo>
-                    <a:pt x="1145960" y="1210337"/>
-                  </a:lnTo>
-                  <a:lnTo>
-                    <a:pt x="1217582" y="1268133"/>
-                  </a:lnTo>
-                  <a:lnTo>
-                    <a:pt x="1289205" y="1324192"/>
-                  </a:lnTo>
-                  <a:lnTo>
-                    <a:pt x="1360827" y="1378567"/>
-                  </a:lnTo>
-                  <a:lnTo>
-                    <a:pt x="1432450" y="1431308"/>
-                  </a:lnTo>
-                  <a:lnTo>
-                    <a:pt x="1504073" y="1482464"/>
-                  </a:lnTo>
-                  <a:lnTo>
-                    <a:pt x="1575695" y="1532084"/>
-                  </a:lnTo>
-                  <a:lnTo>
-                    <a:pt x="1647318" y="1580213"/>
-                  </a:lnTo>
-                  <a:lnTo>
-                    <a:pt x="1718940" y="1626896"/>
-                  </a:lnTo>
-                  <a:lnTo>
-                    <a:pt x="1790563" y="1672176"/>
-                  </a:lnTo>
-                  <a:lnTo>
-                    <a:pt x="1862185" y="1716096"/>
-                  </a:lnTo>
-                  <a:lnTo>
-                    <a:pt x="1933808" y="1758697"/>
-                  </a:lnTo>
-                  <a:lnTo>
-                    <a:pt x="2005430" y="1800017"/>
-                  </a:lnTo>
-                  <a:lnTo>
-                    <a:pt x="2077053" y="1840096"/>
-                  </a:lnTo>
-                  <a:lnTo>
-                    <a:pt x="2148675" y="1878971"/>
-                  </a:lnTo>
-                  <a:lnTo>
-                    <a:pt x="2220298" y="1916678"/>
-                  </a:lnTo>
-                  <a:lnTo>
-                    <a:pt x="2291920" y="1953252"/>
-                  </a:lnTo>
-                  <a:lnTo>
-                    <a:pt x="2363543" y="1988728"/>
-                  </a:lnTo>
-                  <a:lnTo>
-                    <a:pt x="2435165" y="2023137"/>
-                  </a:lnTo>
-                  <a:lnTo>
-                    <a:pt x="2506788" y="2056513"/>
-                  </a:lnTo>
-                  <a:lnTo>
-                    <a:pt x="2578410" y="2088886"/>
-                  </a:lnTo>
-                  <a:lnTo>
-                    <a:pt x="2650033" y="2120286"/>
-                  </a:lnTo>
-                  <a:lnTo>
-                    <a:pt x="2721655" y="2150743"/>
-                  </a:lnTo>
-                  <a:lnTo>
-                    <a:pt x="2793278" y="2180285"/>
-                  </a:lnTo>
-                  <a:lnTo>
-                    <a:pt x="2864901" y="2208940"/>
-                  </a:lnTo>
-                  <a:lnTo>
-                    <a:pt x="2936523" y="2236733"/>
-                  </a:lnTo>
-                  <a:lnTo>
-                    <a:pt x="3008146" y="2263691"/>
-                  </a:lnTo>
-                  <a:lnTo>
-                    <a:pt x="3079768" y="2289840"/>
-                  </a:lnTo>
-                  <a:lnTo>
-                    <a:pt x="3151391" y="2305195"/>
-                  </a:lnTo>
-                  <a:lnTo>
-                    <a:pt x="3223013" y="2306673"/>
-                  </a:lnTo>
-                  <a:lnTo>
-                    <a:pt x="3294636" y="2308148"/>
-                  </a:lnTo>
-                  <a:lnTo>
-                    <a:pt x="3366258" y="2309621"/>
-                  </a:lnTo>
-                  <a:lnTo>
-                    <a:pt x="3437881" y="2311092"/>
-                  </a:lnTo>
-                  <a:lnTo>
-                    <a:pt x="3509503" y="2312559"/>
-                  </a:lnTo>
-                  <a:lnTo>
-                    <a:pt x="3581126" y="2314024"/>
-                  </a:lnTo>
-                  <a:lnTo>
-                    <a:pt x="3652748" y="2315487"/>
-                  </a:lnTo>
-                  <a:lnTo>
-                    <a:pt x="3724371" y="2316947"/>
-                  </a:lnTo>
-                  <a:lnTo>
-                    <a:pt x="3795993" y="2318404"/>
-                  </a:lnTo>
-                  <a:lnTo>
-                    <a:pt x="3867616" y="2319859"/>
-                  </a:lnTo>
-                  <a:lnTo>
-                    <a:pt x="3939238" y="2321311"/>
-                  </a:lnTo>
-                  <a:lnTo>
-                    <a:pt x="4010861" y="2322760"/>
-                  </a:lnTo>
-                  <a:lnTo>
-                    <a:pt x="4082483" y="2324207"/>
-                  </a:lnTo>
-                  <a:lnTo>
-                    <a:pt x="4154106" y="2325651"/>
-                  </a:lnTo>
-                  <a:lnTo>
-                    <a:pt x="4225729" y="2327093"/>
-                  </a:lnTo>
-                  <a:lnTo>
-                    <a:pt x="4297351" y="2328532"/>
-                  </a:lnTo>
-                  <a:lnTo>
-                    <a:pt x="4368974" y="2329969"/>
-                  </a:lnTo>
-                  <a:lnTo>
-                    <a:pt x="4440596" y="2331403"/>
-                  </a:lnTo>
-                  <a:lnTo>
-                    <a:pt x="4512219" y="2332834"/>
-                  </a:lnTo>
-                  <a:lnTo>
-                    <a:pt x="4583841" y="2334263"/>
-                  </a:lnTo>
-                  <a:lnTo>
-                    <a:pt x="4655464" y="2335689"/>
-                  </a:lnTo>
-                  <a:lnTo>
-                    <a:pt x="4727086" y="2337113"/>
-                  </a:lnTo>
-                  <a:lnTo>
-                    <a:pt x="4798709" y="2338535"/>
-                  </a:lnTo>
-                  <a:lnTo>
-                    <a:pt x="4870331" y="2339953"/>
-                  </a:lnTo>
-                  <a:lnTo>
-                    <a:pt x="4941954" y="2341370"/>
-                  </a:lnTo>
-                  <a:lnTo>
-                    <a:pt x="5013576" y="2342783"/>
-                  </a:lnTo>
-                  <a:lnTo>
-                    <a:pt x="5085199" y="2344194"/>
-                  </a:lnTo>
-                  <a:lnTo>
-                    <a:pt x="5156821" y="2345603"/>
-                  </a:lnTo>
-                  <a:lnTo>
-                    <a:pt x="5228444" y="2347009"/>
-                  </a:lnTo>
-                  <a:lnTo>
-                    <a:pt x="5300066" y="2348413"/>
-                  </a:lnTo>
-                  <a:lnTo>
-                    <a:pt x="5371689" y="2349814"/>
-                  </a:lnTo>
-                  <a:lnTo>
-                    <a:pt x="5443311" y="2351213"/>
-                  </a:lnTo>
-                  <a:lnTo>
-                    <a:pt x="5514934" y="2352609"/>
-                  </a:lnTo>
-                  <a:lnTo>
-                    <a:pt x="5586557" y="2354002"/>
-                  </a:lnTo>
-                  <a:lnTo>
-                    <a:pt x="5658179" y="2355393"/>
-                  </a:lnTo>
-                  <a:lnTo>
-                    <a:pt x="5729802" y="2356782"/>
-                  </a:lnTo>
-                  <a:lnTo>
-                    <a:pt x="5801424" y="2358168"/>
-                  </a:lnTo>
-                  <a:lnTo>
-                    <a:pt x="5873047" y="2359552"/>
-                  </a:lnTo>
-                  <a:lnTo>
-                    <a:pt x="5944669" y="2360933"/>
-                  </a:lnTo>
-                  <a:lnTo>
-                    <a:pt x="6016292" y="2362312"/>
-                  </a:lnTo>
-                  <a:lnTo>
-                    <a:pt x="6087914" y="2363688"/>
-                  </a:lnTo>
-                  <a:lnTo>
-                    <a:pt x="6159537" y="2365062"/>
-                  </a:lnTo>
-                  <a:lnTo>
-                    <a:pt x="6231159" y="2366434"/>
-                  </a:lnTo>
-                  <a:lnTo>
-                    <a:pt x="6302782" y="2367803"/>
-                  </a:lnTo>
-                  <a:lnTo>
-                    <a:pt x="6374404" y="2369169"/>
-                  </a:lnTo>
-                  <a:lnTo>
-                    <a:pt x="6446027" y="2370533"/>
-                  </a:lnTo>
-                  <a:lnTo>
-                    <a:pt x="6517649" y="2371895"/>
-                  </a:lnTo>
-                  <a:lnTo>
-                    <a:pt x="6589272" y="2373254"/>
-                  </a:lnTo>
-                  <a:lnTo>
-                    <a:pt x="6660894" y="2374611"/>
-                  </a:lnTo>
-                  <a:lnTo>
-                    <a:pt x="6732517" y="2375965"/>
-                  </a:lnTo>
-                  <a:lnTo>
-                    <a:pt x="6804139" y="2377317"/>
-                  </a:lnTo>
-                  <a:lnTo>
-                    <a:pt x="6875762" y="2378667"/>
-                  </a:lnTo>
-                  <a:lnTo>
-                    <a:pt x="6947385" y="2380014"/>
-                  </a:lnTo>
-                  <a:lnTo>
-                    <a:pt x="7019007" y="2381359"/>
-                  </a:lnTo>
-                  <a:lnTo>
-                    <a:pt x="7090630" y="2382701"/>
-                  </a:lnTo>
-                </a:path>
-              </a:pathLst>
-            </a:custGeom>
-          </p:spPr>
-          <p:txBody>
-            <a:bodyPr/>
-            <a:lstStyle/>
-            <a:p/>
-          </p:txBody>
-        </p:sp>
-        <p:sp>
-          <p:nvSpPr>
             <p:cNvPr id="24" name="pl24"/>
             <p:cNvSpPr/>
             <p:nvPr/>
           </p:nvSpPr>
           <p:spPr>
             <a:xfrm>
-              <a:off x="1172049" y="4660688"/>
-              <a:ext cx="7090630" cy="743608"/>
+              <a:off x="1235312" y="2269295"/>
+              <a:ext cx="6964104" cy="859861"/>
             </a:xfrm>
             <a:custGeom>
               <a:avLst/>
               <a:pathLst>
-                <a:path w="7090630" h="743608">
+                <a:path w="6964104" h="859861">
                   <a:moveTo>
-                    <a:pt x="7090630" y="743608"/>
+                    <a:pt x="0" y="0"/>
                   </a:moveTo>
                   <a:lnTo>
-                    <a:pt x="7019007" y="738871"/>
-                  </a:lnTo>
-                  <a:lnTo>
-                    <a:pt x="6947385" y="733986"/>
-                  </a:lnTo>
-                  <a:lnTo>
-                    <a:pt x="6875762" y="728951"/>
-                  </a:lnTo>
-                  <a:lnTo>
-                    <a:pt x="6804139" y="723759"/>
-                  </a:lnTo>
-                  <a:lnTo>
-                    <a:pt x="6732517" y="718407"/>
-                  </a:lnTo>
-                  <a:lnTo>
-                    <a:pt x="6660894" y="712888"/>
-                  </a:lnTo>
-                  <a:lnTo>
-                    <a:pt x="6589272" y="707199"/>
-                  </a:lnTo>
-                  <a:lnTo>
-                    <a:pt x="6517649" y="701334"/>
-                  </a:lnTo>
-                  <a:lnTo>
-                    <a:pt x="6446027" y="695287"/>
-                  </a:lnTo>
-                  <a:lnTo>
-                    <a:pt x="6374404" y="689052"/>
-                  </a:lnTo>
-                  <a:lnTo>
-                    <a:pt x="6302782" y="682625"/>
-                  </a:lnTo>
-                  <a:lnTo>
-                    <a:pt x="6231159" y="675998"/>
-                  </a:lnTo>
-                  <a:lnTo>
-                    <a:pt x="6159537" y="669166"/>
-                  </a:lnTo>
-                  <a:lnTo>
-                    <a:pt x="6087914" y="662123"/>
-                  </a:lnTo>
-                  <a:lnTo>
-                    <a:pt x="6016292" y="654861"/>
-                  </a:lnTo>
-                  <a:lnTo>
-                    <a:pt x="5944669" y="647375"/>
-                  </a:lnTo>
-                  <a:lnTo>
-                    <a:pt x="5873047" y="639656"/>
-                  </a:lnTo>
-                  <a:lnTo>
-                    <a:pt x="5801424" y="631699"/>
-                  </a:lnTo>
-                  <a:lnTo>
-                    <a:pt x="5729802" y="623495"/>
-                  </a:lnTo>
-                  <a:lnTo>
-                    <a:pt x="5658179" y="615037"/>
-                  </a:lnTo>
-                  <a:lnTo>
-                    <a:pt x="5586557" y="606317"/>
-                  </a:lnTo>
-                  <a:lnTo>
-                    <a:pt x="5514934" y="597327"/>
-                  </a:lnTo>
-                  <a:lnTo>
-                    <a:pt x="5443311" y="588058"/>
-                  </a:lnTo>
-                  <a:lnTo>
-                    <a:pt x="5371689" y="578502"/>
-                  </a:lnTo>
-                  <a:lnTo>
-                    <a:pt x="5300066" y="568651"/>
-                  </a:lnTo>
-                  <a:lnTo>
-                    <a:pt x="5228444" y="558494"/>
-                  </a:lnTo>
-                  <a:lnTo>
-                    <a:pt x="5156821" y="548022"/>
-                  </a:lnTo>
-                  <a:lnTo>
-                    <a:pt x="5085199" y="537226"/>
-                  </a:lnTo>
-                  <a:lnTo>
-                    <a:pt x="5013576" y="526096"/>
-                  </a:lnTo>
-                  <a:lnTo>
-                    <a:pt x="4941954" y="514621"/>
-                  </a:lnTo>
-                  <a:lnTo>
-                    <a:pt x="4870331" y="502791"/>
-                  </a:lnTo>
-                  <a:lnTo>
-                    <a:pt x="4798709" y="490594"/>
-                  </a:lnTo>
-                  <a:lnTo>
-                    <a:pt x="4727086" y="478019"/>
-                  </a:lnTo>
-                  <a:lnTo>
-                    <a:pt x="4655464" y="465055"/>
-                  </a:lnTo>
-                  <a:lnTo>
-                    <a:pt x="4583841" y="451689"/>
-                  </a:lnTo>
-                  <a:lnTo>
-                    <a:pt x="4512219" y="437910"/>
-                  </a:lnTo>
-                  <a:lnTo>
-                    <a:pt x="4440596" y="423703"/>
-                  </a:lnTo>
-                  <a:lnTo>
-                    <a:pt x="4368974" y="409057"/>
-                  </a:lnTo>
-                  <a:lnTo>
-                    <a:pt x="4297351" y="393956"/>
-                  </a:lnTo>
-                  <a:lnTo>
-                    <a:pt x="4225729" y="378388"/>
-                  </a:lnTo>
-                  <a:lnTo>
-                    <a:pt x="4154106" y="362338"/>
-                  </a:lnTo>
-                  <a:lnTo>
-                    <a:pt x="4082483" y="345791"/>
-                  </a:lnTo>
-                  <a:lnTo>
-                    <a:pt x="4010861" y="328731"/>
-                  </a:lnTo>
-                  <a:lnTo>
-                    <a:pt x="3939238" y="311143"/>
-                  </a:lnTo>
-                  <a:lnTo>
-                    <a:pt x="3867616" y="293010"/>
-                  </a:lnTo>
-                  <a:lnTo>
-                    <a:pt x="3795993" y="274315"/>
-                  </a:lnTo>
-                  <a:lnTo>
-                    <a:pt x="3724371" y="255041"/>
-                  </a:lnTo>
-                  <a:lnTo>
-                    <a:pt x="3652748" y="235170"/>
-                  </a:lnTo>
-                  <a:lnTo>
-                    <a:pt x="3581126" y="214684"/>
-                  </a:lnTo>
-                  <a:lnTo>
-                    <a:pt x="3509503" y="193563"/>
-                  </a:lnTo>
-                  <a:lnTo>
-                    <a:pt x="3437881" y="171788"/>
-                  </a:lnTo>
-                  <a:lnTo>
-                    <a:pt x="3366258" y="149339"/>
-                  </a:lnTo>
-                  <a:lnTo>
-                    <a:pt x="3294636" y="126194"/>
-                  </a:lnTo>
-                  <a:lnTo>
-                    <a:pt x="3223013" y="102332"/>
-                  </a:lnTo>
-                  <a:lnTo>
-                    <a:pt x="3151391" y="77731"/>
-                  </a:lnTo>
-                  <a:lnTo>
-                    <a:pt x="3079768" y="66242"/>
-                  </a:lnTo>
-                  <a:lnTo>
-                    <a:pt x="3008146" y="64759"/>
-                  </a:lnTo>
-                  <a:lnTo>
-                    <a:pt x="2936523" y="63273"/>
-                  </a:lnTo>
-                  <a:lnTo>
-                    <a:pt x="2864901" y="61784"/>
-                  </a:lnTo>
-                  <a:lnTo>
-                    <a:pt x="2793278" y="60292"/>
-                  </a:lnTo>
-                  <a:lnTo>
-                    <a:pt x="2721655" y="58798"/>
-                  </a:lnTo>
-                  <a:lnTo>
-                    <a:pt x="2650033" y="57302"/>
-                  </a:lnTo>
-                  <a:lnTo>
-                    <a:pt x="2578410" y="55802"/>
-                  </a:lnTo>
-                  <a:lnTo>
-                    <a:pt x="2506788" y="54300"/>
-                  </a:lnTo>
-                  <a:lnTo>
-                    <a:pt x="2435165" y="52795"/>
-                  </a:lnTo>
-                  <a:lnTo>
-                    <a:pt x="2363543" y="51288"/>
-                  </a:lnTo>
-                  <a:lnTo>
-                    <a:pt x="2291920" y="49777"/>
-                  </a:lnTo>
-                  <a:lnTo>
-                    <a:pt x="2220298" y="48264"/>
-                  </a:lnTo>
-                  <a:lnTo>
-                    <a:pt x="2148675" y="46749"/>
-                  </a:lnTo>
-                  <a:lnTo>
-                    <a:pt x="2077053" y="45231"/>
-                  </a:lnTo>
-                  <a:lnTo>
-                    <a:pt x="2005430" y="43710"/>
-                  </a:lnTo>
-                  <a:lnTo>
-                    <a:pt x="1933808" y="42186"/>
-                  </a:lnTo>
-                  <a:lnTo>
-                    <a:pt x="1862185" y="40659"/>
-                  </a:lnTo>
-                  <a:lnTo>
-                    <a:pt x="1790563" y="39130"/>
-                  </a:lnTo>
-                  <a:lnTo>
-                    <a:pt x="1718940" y="37598"/>
-                  </a:lnTo>
-                  <a:lnTo>
-                    <a:pt x="1647318" y="36064"/>
-                  </a:lnTo>
-                  <a:lnTo>
-                    <a:pt x="1575695" y="34526"/>
-                  </a:lnTo>
-                  <a:lnTo>
-                    <a:pt x="1504073" y="32986"/>
-                  </a:lnTo>
-                  <a:lnTo>
-                    <a:pt x="1432450" y="31443"/>
-                  </a:lnTo>
-                  <a:lnTo>
-                    <a:pt x="1360827" y="29897"/>
-                  </a:lnTo>
-                  <a:lnTo>
-                    <a:pt x="1289205" y="28349"/>
-                  </a:lnTo>
-                  <a:lnTo>
-                    <a:pt x="1217582" y="26798"/>
-                  </a:lnTo>
-                  <a:lnTo>
-                    <a:pt x="1145960" y="25244"/>
-                  </a:lnTo>
-                  <a:lnTo>
-                    <a:pt x="1074337" y="23687"/>
-                  </a:lnTo>
-                  <a:lnTo>
-                    <a:pt x="1002715" y="22128"/>
-                  </a:lnTo>
-                  <a:lnTo>
-                    <a:pt x="931092" y="20565"/>
-                  </a:lnTo>
-                  <a:lnTo>
-                    <a:pt x="859470" y="19000"/>
-                  </a:lnTo>
-                  <a:lnTo>
-                    <a:pt x="787847" y="17432"/>
-                  </a:lnTo>
-                  <a:lnTo>
-                    <a:pt x="716225" y="15862"/>
-                  </a:lnTo>
-                  <a:lnTo>
-                    <a:pt x="644602" y="14288"/>
-                  </a:lnTo>
-                  <a:lnTo>
-                    <a:pt x="572980" y="12712"/>
-                  </a:lnTo>
-                  <a:lnTo>
-                    <a:pt x="501357" y="11133"/>
-                  </a:lnTo>
-                  <a:lnTo>
-                    <a:pt x="429735" y="9551"/>
-                  </a:lnTo>
-                  <a:lnTo>
-                    <a:pt x="358112" y="7966"/>
-                  </a:lnTo>
-                  <a:lnTo>
-                    <a:pt x="286490" y="6378"/>
-                  </a:lnTo>
-                  <a:lnTo>
-                    <a:pt x="214867" y="4788"/>
-                  </a:lnTo>
-                  <a:lnTo>
-                    <a:pt x="143245" y="3195"/>
-                  </a:lnTo>
-                  <a:lnTo>
-                    <a:pt x="71622" y="1598"/>
-                  </a:lnTo>
-                  <a:lnTo>
-                    <a:pt x="0" y="0"/>
+                    <a:pt x="70344" y="33979"/>
+                  </a:lnTo>
+                  <a:lnTo>
+                    <a:pt x="140688" y="66938"/>
+                  </a:lnTo>
+                  <a:lnTo>
+                    <a:pt x="211033" y="98907"/>
+                  </a:lnTo>
+                  <a:lnTo>
+                    <a:pt x="281377" y="129915"/>
+                  </a:lnTo>
+                  <a:lnTo>
+                    <a:pt x="351722" y="159991"/>
+                  </a:lnTo>
+                  <a:lnTo>
+                    <a:pt x="422066" y="189164"/>
+                  </a:lnTo>
+                  <a:lnTo>
+                    <a:pt x="492411" y="217461"/>
+                  </a:lnTo>
+                  <a:lnTo>
+                    <a:pt x="562755" y="244907"/>
+                  </a:lnTo>
+                  <a:lnTo>
+                    <a:pt x="633100" y="271529"/>
+                  </a:lnTo>
+                  <a:lnTo>
+                    <a:pt x="703444" y="297351"/>
+                  </a:lnTo>
+                  <a:lnTo>
+                    <a:pt x="773789" y="322397"/>
+                  </a:lnTo>
+                  <a:lnTo>
+                    <a:pt x="844133" y="346690"/>
+                  </a:lnTo>
+                  <a:lnTo>
+                    <a:pt x="914478" y="370254"/>
+                  </a:lnTo>
+                  <a:lnTo>
+                    <a:pt x="984822" y="393110"/>
+                  </a:lnTo>
+                  <a:lnTo>
+                    <a:pt x="1055167" y="415279"/>
+                  </a:lnTo>
+                  <a:lnTo>
+                    <a:pt x="1125511" y="436782"/>
+                  </a:lnTo>
+                  <a:lnTo>
+                    <a:pt x="1195856" y="457639"/>
+                  </a:lnTo>
+                  <a:lnTo>
+                    <a:pt x="1266200" y="477869"/>
+                  </a:lnTo>
+                  <a:lnTo>
+                    <a:pt x="1336545" y="497492"/>
+                  </a:lnTo>
+                  <a:lnTo>
+                    <a:pt x="1406889" y="516525"/>
+                  </a:lnTo>
+                  <a:lnTo>
+                    <a:pt x="1477234" y="534986"/>
+                  </a:lnTo>
+                  <a:lnTo>
+                    <a:pt x="1547578" y="552893"/>
+                  </a:lnTo>
+                  <a:lnTo>
+                    <a:pt x="1617923" y="570261"/>
+                  </a:lnTo>
+                  <a:lnTo>
+                    <a:pt x="1688267" y="587108"/>
+                  </a:lnTo>
+                  <a:lnTo>
+                    <a:pt x="1758612" y="603449"/>
+                  </a:lnTo>
+                  <a:lnTo>
+                    <a:pt x="1828956" y="619298"/>
+                  </a:lnTo>
+                  <a:lnTo>
+                    <a:pt x="1899301" y="634672"/>
+                  </a:lnTo>
+                  <a:lnTo>
+                    <a:pt x="1969645" y="649584"/>
+                  </a:lnTo>
+                  <a:lnTo>
+                    <a:pt x="2039990" y="664047"/>
+                  </a:lnTo>
+                  <a:lnTo>
+                    <a:pt x="2110334" y="678076"/>
+                  </a:lnTo>
+                  <a:lnTo>
+                    <a:pt x="2180679" y="691684"/>
+                  </a:lnTo>
+                  <a:lnTo>
+                    <a:pt x="2251023" y="704883"/>
+                  </a:lnTo>
+                  <a:lnTo>
+                    <a:pt x="2321368" y="717685"/>
+                  </a:lnTo>
+                  <a:lnTo>
+                    <a:pt x="2391712" y="730102"/>
+                  </a:lnTo>
+                  <a:lnTo>
+                    <a:pt x="2462057" y="742147"/>
+                  </a:lnTo>
+                  <a:lnTo>
+                    <a:pt x="2532401" y="753829"/>
+                  </a:lnTo>
+                  <a:lnTo>
+                    <a:pt x="2602746" y="765161"/>
+                  </a:lnTo>
+                  <a:lnTo>
+                    <a:pt x="2673090" y="776152"/>
+                  </a:lnTo>
+                  <a:lnTo>
+                    <a:pt x="2743435" y="786813"/>
+                  </a:lnTo>
+                  <a:lnTo>
+                    <a:pt x="2813779" y="797154"/>
+                  </a:lnTo>
+                  <a:lnTo>
+                    <a:pt x="2884124" y="807184"/>
+                  </a:lnTo>
+                  <a:lnTo>
+                    <a:pt x="2954468" y="816913"/>
+                  </a:lnTo>
+                  <a:lnTo>
+                    <a:pt x="3024813" y="826349"/>
+                  </a:lnTo>
+                  <a:lnTo>
+                    <a:pt x="3095157" y="831890"/>
+                  </a:lnTo>
+                  <a:lnTo>
+                    <a:pt x="3165502" y="832424"/>
+                  </a:lnTo>
+                  <a:lnTo>
+                    <a:pt x="3235846" y="832956"/>
+                  </a:lnTo>
+                  <a:lnTo>
+                    <a:pt x="3306191" y="833488"/>
+                  </a:lnTo>
+                  <a:lnTo>
+                    <a:pt x="3376535" y="834018"/>
+                  </a:lnTo>
+                  <a:lnTo>
+                    <a:pt x="3446880" y="834548"/>
+                  </a:lnTo>
+                  <a:lnTo>
+                    <a:pt x="3517224" y="835077"/>
+                  </a:lnTo>
+                  <a:lnTo>
+                    <a:pt x="3587569" y="835604"/>
+                  </a:lnTo>
+                  <a:lnTo>
+                    <a:pt x="3657913" y="836131"/>
+                  </a:lnTo>
+                  <a:lnTo>
+                    <a:pt x="3728257" y="836657"/>
+                  </a:lnTo>
+                  <a:lnTo>
+                    <a:pt x="3798602" y="837182"/>
+                  </a:lnTo>
+                  <a:lnTo>
+                    <a:pt x="3868946" y="837706"/>
+                  </a:lnTo>
+                  <a:lnTo>
+                    <a:pt x="3939291" y="838229"/>
+                  </a:lnTo>
+                  <a:lnTo>
+                    <a:pt x="4009635" y="838751"/>
+                  </a:lnTo>
+                  <a:lnTo>
+                    <a:pt x="4079980" y="839273"/>
+                  </a:lnTo>
+                  <a:lnTo>
+                    <a:pt x="4150324" y="839793"/>
+                  </a:lnTo>
+                  <a:lnTo>
+                    <a:pt x="4220669" y="840312"/>
+                  </a:lnTo>
+                  <a:lnTo>
+                    <a:pt x="4291013" y="840831"/>
+                  </a:lnTo>
+                  <a:lnTo>
+                    <a:pt x="4361358" y="841348"/>
+                  </a:lnTo>
+                  <a:lnTo>
+                    <a:pt x="4431702" y="841865"/>
+                  </a:lnTo>
+                  <a:lnTo>
+                    <a:pt x="4502047" y="842380"/>
+                  </a:lnTo>
+                  <a:lnTo>
+                    <a:pt x="4572391" y="842895"/>
+                  </a:lnTo>
+                  <a:lnTo>
+                    <a:pt x="4642736" y="843409"/>
+                  </a:lnTo>
+                  <a:lnTo>
+                    <a:pt x="4713080" y="843922"/>
+                  </a:lnTo>
+                  <a:lnTo>
+                    <a:pt x="4783425" y="844434"/>
+                  </a:lnTo>
+                  <a:lnTo>
+                    <a:pt x="4853769" y="844945"/>
+                  </a:lnTo>
+                  <a:lnTo>
+                    <a:pt x="4924114" y="845455"/>
+                  </a:lnTo>
+                  <a:lnTo>
+                    <a:pt x="4994458" y="845964"/>
+                  </a:lnTo>
+                  <a:lnTo>
+                    <a:pt x="5064803" y="846473"/>
+                  </a:lnTo>
+                  <a:lnTo>
+                    <a:pt x="5135147" y="846980"/>
+                  </a:lnTo>
+                  <a:lnTo>
+                    <a:pt x="5205492" y="847487"/>
+                  </a:lnTo>
+                  <a:lnTo>
+                    <a:pt x="5275836" y="847992"/>
+                  </a:lnTo>
+                  <a:lnTo>
+                    <a:pt x="5346181" y="848497"/>
+                  </a:lnTo>
+                  <a:lnTo>
+                    <a:pt x="5416525" y="849001"/>
+                  </a:lnTo>
+                  <a:lnTo>
+                    <a:pt x="5486870" y="849504"/>
+                  </a:lnTo>
+                  <a:lnTo>
+                    <a:pt x="5557214" y="850006"/>
+                  </a:lnTo>
+                  <a:lnTo>
+                    <a:pt x="5627559" y="850507"/>
+                  </a:lnTo>
+                  <a:lnTo>
+                    <a:pt x="5697903" y="851007"/>
+                  </a:lnTo>
+                  <a:lnTo>
+                    <a:pt x="5768248" y="851506"/>
+                  </a:lnTo>
+                  <a:lnTo>
+                    <a:pt x="5838592" y="852005"/>
+                  </a:lnTo>
+                  <a:lnTo>
+                    <a:pt x="5908937" y="852503"/>
+                  </a:lnTo>
+                  <a:lnTo>
+                    <a:pt x="5979281" y="852999"/>
+                  </a:lnTo>
+                  <a:lnTo>
+                    <a:pt x="6049626" y="853495"/>
+                  </a:lnTo>
+                  <a:lnTo>
+                    <a:pt x="6119970" y="853990"/>
+                  </a:lnTo>
+                  <a:lnTo>
+                    <a:pt x="6190315" y="854484"/>
+                  </a:lnTo>
+                  <a:lnTo>
+                    <a:pt x="6260659" y="854977"/>
+                  </a:lnTo>
+                  <a:lnTo>
+                    <a:pt x="6331004" y="855469"/>
+                  </a:lnTo>
+                  <a:lnTo>
+                    <a:pt x="6401348" y="855961"/>
+                  </a:lnTo>
+                  <a:lnTo>
+                    <a:pt x="6471693" y="856451"/>
+                  </a:lnTo>
+                  <a:lnTo>
+                    <a:pt x="6542037" y="856941"/>
+                  </a:lnTo>
+                  <a:lnTo>
+                    <a:pt x="6612382" y="857430"/>
+                  </a:lnTo>
+                  <a:lnTo>
+                    <a:pt x="6682726" y="857918"/>
+                  </a:lnTo>
+                  <a:lnTo>
+                    <a:pt x="6753071" y="858405"/>
+                  </a:lnTo>
+                  <a:lnTo>
+                    <a:pt x="6823415" y="858891"/>
+                  </a:lnTo>
+                  <a:lnTo>
+                    <a:pt x="6893760" y="859376"/>
+                  </a:lnTo>
+                  <a:lnTo>
+                    <a:pt x="6964104" y="859861"/>
                   </a:lnTo>
                 </a:path>
               </a:pathLst>
@@ -4326,312 +4036,637 @@
           </p:nvSpPr>
           <p:spPr>
             <a:xfrm>
-              <a:off x="1172049" y="3880988"/>
-              <a:ext cx="7090630" cy="1337266"/>
+              <a:off x="1235312" y="3076746"/>
+              <a:ext cx="6964104" cy="268350"/>
             </a:xfrm>
             <a:custGeom>
               <a:avLst/>
               <a:pathLst>
-                <a:path w="7090630" h="1337266">
+                <a:path w="6964104" h="268350">
+                  <a:moveTo>
+                    <a:pt x="6964104" y="268350"/>
+                  </a:moveTo>
+                  <a:lnTo>
+                    <a:pt x="6893760" y="266641"/>
+                  </a:lnTo>
+                  <a:lnTo>
+                    <a:pt x="6823415" y="264878"/>
+                  </a:lnTo>
+                  <a:lnTo>
+                    <a:pt x="6753071" y="263061"/>
+                  </a:lnTo>
+                  <a:lnTo>
+                    <a:pt x="6682726" y="261187"/>
+                  </a:lnTo>
+                  <a:lnTo>
+                    <a:pt x="6612382" y="259256"/>
+                  </a:lnTo>
+                  <a:lnTo>
+                    <a:pt x="6542037" y="257264"/>
+                  </a:lnTo>
+                  <a:lnTo>
+                    <a:pt x="6471693" y="255211"/>
+                  </a:lnTo>
+                  <a:lnTo>
+                    <a:pt x="6401348" y="253095"/>
+                  </a:lnTo>
+                  <a:lnTo>
+                    <a:pt x="6331004" y="250912"/>
+                  </a:lnTo>
+                  <a:lnTo>
+                    <a:pt x="6260659" y="248662"/>
+                  </a:lnTo>
+                  <a:lnTo>
+                    <a:pt x="6190315" y="246343"/>
+                  </a:lnTo>
+                  <a:lnTo>
+                    <a:pt x="6119970" y="243952"/>
+                  </a:lnTo>
+                  <a:lnTo>
+                    <a:pt x="6049626" y="241486"/>
+                  </a:lnTo>
+                  <a:lnTo>
+                    <a:pt x="5979281" y="238944"/>
+                  </a:lnTo>
+                  <a:lnTo>
+                    <a:pt x="5908937" y="236324"/>
+                  </a:lnTo>
+                  <a:lnTo>
+                    <a:pt x="5838592" y="233622"/>
+                  </a:lnTo>
+                  <a:lnTo>
+                    <a:pt x="5768248" y="230837"/>
+                  </a:lnTo>
+                  <a:lnTo>
+                    <a:pt x="5697903" y="227965"/>
+                  </a:lnTo>
+                  <a:lnTo>
+                    <a:pt x="5627559" y="225004"/>
+                  </a:lnTo>
+                  <a:lnTo>
+                    <a:pt x="5557214" y="221952"/>
+                  </a:lnTo>
+                  <a:lnTo>
+                    <a:pt x="5486870" y="218805"/>
+                  </a:lnTo>
+                  <a:lnTo>
+                    <a:pt x="5416525" y="215561"/>
+                  </a:lnTo>
+                  <a:lnTo>
+                    <a:pt x="5346181" y="212216"/>
+                  </a:lnTo>
+                  <a:lnTo>
+                    <a:pt x="5275836" y="208768"/>
+                  </a:lnTo>
+                  <a:lnTo>
+                    <a:pt x="5205492" y="205212"/>
+                  </a:lnTo>
+                  <a:lnTo>
+                    <a:pt x="5135147" y="201547"/>
+                  </a:lnTo>
+                  <a:lnTo>
+                    <a:pt x="5064803" y="197768"/>
+                  </a:lnTo>
+                  <a:lnTo>
+                    <a:pt x="4994458" y="193872"/>
+                  </a:lnTo>
+                  <a:lnTo>
+                    <a:pt x="4924114" y="189855"/>
+                  </a:lnTo>
+                  <a:lnTo>
+                    <a:pt x="4853769" y="185714"/>
+                  </a:lnTo>
+                  <a:lnTo>
+                    <a:pt x="4783425" y="181445"/>
+                  </a:lnTo>
+                  <a:lnTo>
+                    <a:pt x="4713080" y="177043"/>
+                  </a:lnTo>
+                  <a:lnTo>
+                    <a:pt x="4642736" y="172506"/>
+                  </a:lnTo>
+                  <a:lnTo>
+                    <a:pt x="4572391" y="167827"/>
+                  </a:lnTo>
+                  <a:lnTo>
+                    <a:pt x="4502047" y="163004"/>
+                  </a:lnTo>
+                  <a:lnTo>
+                    <a:pt x="4431702" y="158031"/>
+                  </a:lnTo>
+                  <a:lnTo>
+                    <a:pt x="4361358" y="152904"/>
+                  </a:lnTo>
+                  <a:lnTo>
+                    <a:pt x="4291013" y="147619"/>
+                  </a:lnTo>
+                  <a:lnTo>
+                    <a:pt x="4220669" y="142169"/>
+                  </a:lnTo>
+                  <a:lnTo>
+                    <a:pt x="4150324" y="136551"/>
+                  </a:lnTo>
+                  <a:lnTo>
+                    <a:pt x="4079980" y="130759"/>
+                  </a:lnTo>
+                  <a:lnTo>
+                    <a:pt x="4009635" y="124788"/>
+                  </a:lnTo>
+                  <a:lnTo>
+                    <a:pt x="3939291" y="118631"/>
+                  </a:lnTo>
+                  <a:lnTo>
+                    <a:pt x="3868946" y="112284"/>
+                  </a:lnTo>
+                  <a:lnTo>
+                    <a:pt x="3798602" y="105740"/>
+                  </a:lnTo>
+                  <a:lnTo>
+                    <a:pt x="3728257" y="98994"/>
+                  </a:lnTo>
+                  <a:lnTo>
+                    <a:pt x="3657913" y="92038"/>
+                  </a:lnTo>
+                  <a:lnTo>
+                    <a:pt x="3587569" y="84867"/>
+                  </a:lnTo>
+                  <a:lnTo>
+                    <a:pt x="3517224" y="77474"/>
+                  </a:lnTo>
+                  <a:lnTo>
+                    <a:pt x="3446880" y="69852"/>
+                  </a:lnTo>
+                  <a:lnTo>
+                    <a:pt x="3376535" y="61994"/>
+                  </a:lnTo>
+                  <a:lnTo>
+                    <a:pt x="3306191" y="53893"/>
+                  </a:lnTo>
+                  <a:lnTo>
+                    <a:pt x="3235846" y="45540"/>
+                  </a:lnTo>
+                  <a:lnTo>
+                    <a:pt x="3165502" y="36929"/>
+                  </a:lnTo>
+                  <a:lnTo>
+                    <a:pt x="3095157" y="28051"/>
+                  </a:lnTo>
+                  <a:lnTo>
+                    <a:pt x="3024813" y="23905"/>
+                  </a:lnTo>
+                  <a:lnTo>
+                    <a:pt x="2954468" y="23370"/>
+                  </a:lnTo>
+                  <a:lnTo>
+                    <a:pt x="2884124" y="22833"/>
+                  </a:lnTo>
+                  <a:lnTo>
+                    <a:pt x="2813779" y="22296"/>
+                  </a:lnTo>
+                  <a:lnTo>
+                    <a:pt x="2743435" y="21758"/>
+                  </a:lnTo>
+                  <a:lnTo>
+                    <a:pt x="2673090" y="21219"/>
+                  </a:lnTo>
+                  <a:lnTo>
+                    <a:pt x="2602746" y="20678"/>
+                  </a:lnTo>
+                  <a:lnTo>
+                    <a:pt x="2532401" y="20137"/>
+                  </a:lnTo>
+                  <a:lnTo>
+                    <a:pt x="2462057" y="19595"/>
+                  </a:lnTo>
+                  <a:lnTo>
+                    <a:pt x="2391712" y="19052"/>
+                  </a:lnTo>
+                  <a:lnTo>
+                    <a:pt x="2321368" y="18508"/>
+                  </a:lnTo>
+                  <a:lnTo>
+                    <a:pt x="2251023" y="17963"/>
+                  </a:lnTo>
+                  <a:lnTo>
+                    <a:pt x="2180679" y="17417"/>
+                  </a:lnTo>
+                  <a:lnTo>
+                    <a:pt x="2110334" y="16870"/>
+                  </a:lnTo>
+                  <a:lnTo>
+                    <a:pt x="2039990" y="16322"/>
+                  </a:lnTo>
+                  <a:lnTo>
+                    <a:pt x="1969645" y="15773"/>
+                  </a:lnTo>
+                  <a:lnTo>
+                    <a:pt x="1899301" y="15224"/>
+                  </a:lnTo>
+                  <a:lnTo>
+                    <a:pt x="1828956" y="14673"/>
+                  </a:lnTo>
+                  <a:lnTo>
+                    <a:pt x="1758612" y="14121"/>
+                  </a:lnTo>
+                  <a:lnTo>
+                    <a:pt x="1688267" y="13568"/>
+                  </a:lnTo>
+                  <a:lnTo>
+                    <a:pt x="1617923" y="13014"/>
+                  </a:lnTo>
+                  <a:lnTo>
+                    <a:pt x="1547578" y="12459"/>
+                  </a:lnTo>
+                  <a:lnTo>
+                    <a:pt x="1477234" y="11904"/>
+                  </a:lnTo>
+                  <a:lnTo>
+                    <a:pt x="1406889" y="11347"/>
+                  </a:lnTo>
+                  <a:lnTo>
+                    <a:pt x="1336545" y="10789"/>
+                  </a:lnTo>
+                  <a:lnTo>
+                    <a:pt x="1266200" y="10230"/>
+                  </a:lnTo>
+                  <a:lnTo>
+                    <a:pt x="1195856" y="9670"/>
+                  </a:lnTo>
+                  <a:lnTo>
+                    <a:pt x="1125511" y="9110"/>
+                  </a:lnTo>
+                  <a:lnTo>
+                    <a:pt x="1055167" y="8548"/>
+                  </a:lnTo>
+                  <a:lnTo>
+                    <a:pt x="984822" y="7985"/>
+                  </a:lnTo>
+                  <a:lnTo>
+                    <a:pt x="914478" y="7421"/>
+                  </a:lnTo>
+                  <a:lnTo>
+                    <a:pt x="844133" y="6856"/>
+                  </a:lnTo>
+                  <a:lnTo>
+                    <a:pt x="773789" y="6291"/>
+                  </a:lnTo>
+                  <a:lnTo>
+                    <a:pt x="703444" y="5724"/>
+                  </a:lnTo>
+                  <a:lnTo>
+                    <a:pt x="633100" y="5156"/>
+                  </a:lnTo>
+                  <a:lnTo>
+                    <a:pt x="562755" y="4587"/>
+                  </a:lnTo>
+                  <a:lnTo>
+                    <a:pt x="492411" y="4017"/>
+                  </a:lnTo>
+                  <a:lnTo>
+                    <a:pt x="422066" y="3446"/>
+                  </a:lnTo>
+                  <a:lnTo>
+                    <a:pt x="351722" y="2874"/>
+                  </a:lnTo>
+                  <a:lnTo>
+                    <a:pt x="281377" y="2301"/>
+                  </a:lnTo>
+                  <a:lnTo>
+                    <a:pt x="211033" y="1728"/>
+                  </a:lnTo>
+                  <a:lnTo>
+                    <a:pt x="140688" y="1153"/>
+                  </a:lnTo>
+                  <a:lnTo>
+                    <a:pt x="70344" y="577"/>
+                  </a:lnTo>
+                  <a:lnTo>
+                    <a:pt x="0" y="0"/>
+                  </a:lnTo>
+                </a:path>
+              </a:pathLst>
+            </a:custGeom>
+          </p:spPr>
+          <p:txBody>
+            <a:bodyPr/>
+            <a:lstStyle/>
+            <a:p/>
+          </p:txBody>
+        </p:sp>
+        <p:sp>
+          <p:nvSpPr>
+            <p:cNvPr id="26" name="pl26"/>
+            <p:cNvSpPr/>
+            <p:nvPr/>
+          </p:nvSpPr>
+          <p:spPr>
+            <a:xfrm>
+              <a:off x="1235312" y="2795371"/>
+              <a:ext cx="6964104" cy="482587"/>
+            </a:xfrm>
+            <a:custGeom>
+              <a:avLst/>
+              <a:pathLst>
+                <a:path w="6964104" h="482587">
                   <a:moveTo>
                     <a:pt x="0" y="0"/>
                   </a:moveTo>
                   <a:lnTo>
-                    <a:pt x="71622" y="26845"/>
-                  </a:lnTo>
-                  <a:lnTo>
-                    <a:pt x="143245" y="53261"/>
-                  </a:lnTo>
-                  <a:lnTo>
-                    <a:pt x="214867" y="79253"/>
-                  </a:lnTo>
-                  <a:lnTo>
-                    <a:pt x="286490" y="104830"/>
-                  </a:lnTo>
-                  <a:lnTo>
-                    <a:pt x="358112" y="129996"/>
-                  </a:lnTo>
-                  <a:lnTo>
-                    <a:pt x="429735" y="154760"/>
-                  </a:lnTo>
-                  <a:lnTo>
-                    <a:pt x="501357" y="179127"/>
-                  </a:lnTo>
-                  <a:lnTo>
-                    <a:pt x="572980" y="203104"/>
-                  </a:lnTo>
-                  <a:lnTo>
-                    <a:pt x="644602" y="226697"/>
-                  </a:lnTo>
-                  <a:lnTo>
-                    <a:pt x="716225" y="249912"/>
-                  </a:lnTo>
-                  <a:lnTo>
-                    <a:pt x="787847" y="272755"/>
-                  </a:lnTo>
-                  <a:lnTo>
-                    <a:pt x="859470" y="295233"/>
-                  </a:lnTo>
-                  <a:lnTo>
-                    <a:pt x="931092" y="317350"/>
-                  </a:lnTo>
-                  <a:lnTo>
-                    <a:pt x="1002715" y="339113"/>
-                  </a:lnTo>
-                  <a:lnTo>
-                    <a:pt x="1074337" y="360528"/>
-                  </a:lnTo>
-                  <a:lnTo>
-                    <a:pt x="1145960" y="381600"/>
-                  </a:lnTo>
-                  <a:lnTo>
-                    <a:pt x="1217582" y="402334"/>
-                  </a:lnTo>
-                  <a:lnTo>
-                    <a:pt x="1289205" y="422736"/>
-                  </a:lnTo>
-                  <a:lnTo>
-                    <a:pt x="1360827" y="442811"/>
-                  </a:lnTo>
-                  <a:lnTo>
-                    <a:pt x="1432450" y="462565"/>
-                  </a:lnTo>
-                  <a:lnTo>
-                    <a:pt x="1504073" y="482003"/>
-                  </a:lnTo>
-                  <a:lnTo>
-                    <a:pt x="1575695" y="501129"/>
-                  </a:lnTo>
-                  <a:lnTo>
-                    <a:pt x="1647318" y="519949"/>
-                  </a:lnTo>
-                  <a:lnTo>
-                    <a:pt x="1718940" y="538468"/>
-                  </a:lnTo>
-                  <a:lnTo>
-                    <a:pt x="1790563" y="556689"/>
-                  </a:lnTo>
-                  <a:lnTo>
-                    <a:pt x="1862185" y="574620"/>
-                  </a:lnTo>
-                  <a:lnTo>
-                    <a:pt x="1933808" y="592263"/>
-                  </a:lnTo>
-                  <a:lnTo>
-                    <a:pt x="2005430" y="609623"/>
-                  </a:lnTo>
-                  <a:lnTo>
-                    <a:pt x="2077053" y="626705"/>
-                  </a:lnTo>
-                  <a:lnTo>
-                    <a:pt x="2148675" y="643514"/>
-                  </a:lnTo>
-                  <a:lnTo>
-                    <a:pt x="2220298" y="660054"/>
-                  </a:lnTo>
-                  <a:lnTo>
-                    <a:pt x="2291920" y="676329"/>
-                  </a:lnTo>
-                  <a:lnTo>
-                    <a:pt x="2363543" y="692343"/>
-                  </a:lnTo>
-                  <a:lnTo>
-                    <a:pt x="2435165" y="708100"/>
-                  </a:lnTo>
-                  <a:lnTo>
-                    <a:pt x="2506788" y="723605"/>
-                  </a:lnTo>
-                  <a:lnTo>
-                    <a:pt x="2578410" y="738862"/>
-                  </a:lnTo>
-                  <a:lnTo>
-                    <a:pt x="2650033" y="753875"/>
-                  </a:lnTo>
-                  <a:lnTo>
-                    <a:pt x="2721655" y="768647"/>
-                  </a:lnTo>
-                  <a:lnTo>
-                    <a:pt x="2793278" y="783183"/>
-                  </a:lnTo>
-                  <a:lnTo>
-                    <a:pt x="2864901" y="797486"/>
-                  </a:lnTo>
-                  <a:lnTo>
-                    <a:pt x="2936523" y="811559"/>
-                  </a:lnTo>
-                  <a:lnTo>
-                    <a:pt x="3008146" y="825408"/>
-                  </a:lnTo>
-                  <a:lnTo>
-                    <a:pt x="3079768" y="839034"/>
-                  </a:lnTo>
-                  <a:lnTo>
-                    <a:pt x="3151391" y="852443"/>
-                  </a:lnTo>
-                  <a:lnTo>
-                    <a:pt x="3223013" y="865636"/>
-                  </a:lnTo>
-                  <a:lnTo>
-                    <a:pt x="3294636" y="878618"/>
-                  </a:lnTo>
-                  <a:lnTo>
-                    <a:pt x="3366258" y="891393"/>
-                  </a:lnTo>
-                  <a:lnTo>
-                    <a:pt x="3437881" y="903963"/>
-                  </a:lnTo>
-                  <a:lnTo>
-                    <a:pt x="3509503" y="916331"/>
-                  </a:lnTo>
-                  <a:lnTo>
-                    <a:pt x="3581126" y="928501"/>
-                  </a:lnTo>
-                  <a:lnTo>
-                    <a:pt x="3652748" y="940477"/>
-                  </a:lnTo>
-                  <a:lnTo>
-                    <a:pt x="3724371" y="952261"/>
-                  </a:lnTo>
-                  <a:lnTo>
-                    <a:pt x="3795993" y="963856"/>
-                  </a:lnTo>
-                  <a:lnTo>
-                    <a:pt x="3867616" y="975265"/>
-                  </a:lnTo>
-                  <a:lnTo>
-                    <a:pt x="3939238" y="986492"/>
-                  </a:lnTo>
-                  <a:lnTo>
-                    <a:pt x="4010861" y="997538"/>
-                  </a:lnTo>
-                  <a:lnTo>
-                    <a:pt x="4082483" y="1008408"/>
-                  </a:lnTo>
-                  <a:lnTo>
-                    <a:pt x="4154106" y="1019104"/>
-                  </a:lnTo>
-                  <a:lnTo>
-                    <a:pt x="4225729" y="1029628"/>
-                  </a:lnTo>
-                  <a:lnTo>
-                    <a:pt x="4297351" y="1039984"/>
-                  </a:lnTo>
-                  <a:lnTo>
-                    <a:pt x="4368974" y="1050174"/>
-                  </a:lnTo>
-                  <a:lnTo>
-                    <a:pt x="4440596" y="1060201"/>
-                  </a:lnTo>
-                  <a:lnTo>
-                    <a:pt x="4512219" y="1070068"/>
-                  </a:lnTo>
-                  <a:lnTo>
-                    <a:pt x="4583841" y="1079776"/>
-                  </a:lnTo>
-                  <a:lnTo>
-                    <a:pt x="4655464" y="1089329"/>
-                  </a:lnTo>
-                  <a:lnTo>
-                    <a:pt x="4727086" y="1098729"/>
-                  </a:lnTo>
-                  <a:lnTo>
-                    <a:pt x="4798709" y="1107978"/>
-                  </a:lnTo>
-                  <a:lnTo>
-                    <a:pt x="4870331" y="1117079"/>
-                  </a:lnTo>
-                  <a:lnTo>
-                    <a:pt x="4941954" y="1126034"/>
-                  </a:lnTo>
-                  <a:lnTo>
-                    <a:pt x="5013576" y="1134846"/>
-                  </a:lnTo>
-                  <a:lnTo>
-                    <a:pt x="5085199" y="1143517"/>
-                  </a:lnTo>
-                  <a:lnTo>
-                    <a:pt x="5156821" y="1152049"/>
-                  </a:lnTo>
-                  <a:lnTo>
-                    <a:pt x="5228444" y="1160444"/>
-                  </a:lnTo>
-                  <a:lnTo>
-                    <a:pt x="5300066" y="1168705"/>
-                  </a:lnTo>
-                  <a:lnTo>
-                    <a:pt x="5371689" y="1176834"/>
-                  </a:lnTo>
-                  <a:lnTo>
-                    <a:pt x="5443311" y="1184832"/>
-                  </a:lnTo>
-                  <a:lnTo>
-                    <a:pt x="5514934" y="1192703"/>
-                  </a:lnTo>
-                  <a:lnTo>
-                    <a:pt x="5586557" y="1200447"/>
-                  </a:lnTo>
-                  <a:lnTo>
-                    <a:pt x="5658179" y="1208067"/>
-                  </a:lnTo>
-                  <a:lnTo>
-                    <a:pt x="5729802" y="1215565"/>
-                  </a:lnTo>
-                  <a:lnTo>
-                    <a:pt x="5801424" y="1222943"/>
-                  </a:lnTo>
-                  <a:lnTo>
-                    <a:pt x="5873047" y="1230203"/>
-                  </a:lnTo>
-                  <a:lnTo>
-                    <a:pt x="5944669" y="1237347"/>
-                  </a:lnTo>
-                  <a:lnTo>
-                    <a:pt x="6016292" y="1244376"/>
-                  </a:lnTo>
-                  <a:lnTo>
-                    <a:pt x="6087914" y="1251293"/>
-                  </a:lnTo>
-                  <a:lnTo>
-                    <a:pt x="6159537" y="1258099"/>
-                  </a:lnTo>
-                  <a:lnTo>
-                    <a:pt x="6231159" y="1264796"/>
-                  </a:lnTo>
-                  <a:lnTo>
-                    <a:pt x="6302782" y="1271386"/>
-                  </a:lnTo>
-                  <a:lnTo>
-                    <a:pt x="6374404" y="1277870"/>
-                  </a:lnTo>
-                  <a:lnTo>
-                    <a:pt x="6446027" y="1284250"/>
-                  </a:lnTo>
-                  <a:lnTo>
-                    <a:pt x="6517649" y="1290528"/>
-                  </a:lnTo>
-                  <a:lnTo>
-                    <a:pt x="6589272" y="1296706"/>
-                  </a:lnTo>
-                  <a:lnTo>
-                    <a:pt x="6660894" y="1302784"/>
-                  </a:lnTo>
-                  <a:lnTo>
-                    <a:pt x="6732517" y="1308766"/>
-                  </a:lnTo>
-                  <a:lnTo>
-                    <a:pt x="6804139" y="1314651"/>
-                  </a:lnTo>
-                  <a:lnTo>
-                    <a:pt x="6875762" y="1320442"/>
-                  </a:lnTo>
-                  <a:lnTo>
-                    <a:pt x="6947385" y="1326141"/>
-                  </a:lnTo>
-                  <a:lnTo>
-                    <a:pt x="7019007" y="1331748"/>
-                  </a:lnTo>
-                  <a:lnTo>
-                    <a:pt x="7090630" y="1337266"/>
+                    <a:pt x="70344" y="9687"/>
+                  </a:lnTo>
+                  <a:lnTo>
+                    <a:pt x="140688" y="19220"/>
+                  </a:lnTo>
+                  <a:lnTo>
+                    <a:pt x="211033" y="28600"/>
+                  </a:lnTo>
+                  <a:lnTo>
+                    <a:pt x="281377" y="37830"/>
+                  </a:lnTo>
+                  <a:lnTo>
+                    <a:pt x="351722" y="46912"/>
+                  </a:lnTo>
+                  <a:lnTo>
+                    <a:pt x="422066" y="55849"/>
+                  </a:lnTo>
+                  <a:lnTo>
+                    <a:pt x="492411" y="64643"/>
+                  </a:lnTo>
+                  <a:lnTo>
+                    <a:pt x="562755" y="73295"/>
+                  </a:lnTo>
+                  <a:lnTo>
+                    <a:pt x="633100" y="81809"/>
+                  </a:lnTo>
+                  <a:lnTo>
+                    <a:pt x="703444" y="90187"/>
+                  </a:lnTo>
+                  <a:lnTo>
+                    <a:pt x="773789" y="98431"/>
+                  </a:lnTo>
+                  <a:lnTo>
+                    <a:pt x="844133" y="106542"/>
+                  </a:lnTo>
+                  <a:lnTo>
+                    <a:pt x="914478" y="114524"/>
+                  </a:lnTo>
+                  <a:lnTo>
+                    <a:pt x="984822" y="122378"/>
+                  </a:lnTo>
+                  <a:lnTo>
+                    <a:pt x="1055167" y="130106"/>
+                  </a:lnTo>
+                  <a:lnTo>
+                    <a:pt x="1125511" y="137710"/>
+                  </a:lnTo>
+                  <a:lnTo>
+                    <a:pt x="1195856" y="145192"/>
+                  </a:lnTo>
+                  <a:lnTo>
+                    <a:pt x="1266200" y="152555"/>
+                  </a:lnTo>
+                  <a:lnTo>
+                    <a:pt x="1336545" y="159800"/>
+                  </a:lnTo>
+                  <a:lnTo>
+                    <a:pt x="1406889" y="166929"/>
+                  </a:lnTo>
+                  <a:lnTo>
+                    <a:pt x="1477234" y="173943"/>
+                  </a:lnTo>
+                  <a:lnTo>
+                    <a:pt x="1547578" y="180845"/>
+                  </a:lnTo>
+                  <a:lnTo>
+                    <a:pt x="1617923" y="187637"/>
+                  </a:lnTo>
+                  <a:lnTo>
+                    <a:pt x="1688267" y="194320"/>
+                  </a:lnTo>
+                  <a:lnTo>
+                    <a:pt x="1758612" y="200896"/>
+                  </a:lnTo>
+                  <a:lnTo>
+                    <a:pt x="1828956" y="207366"/>
+                  </a:lnTo>
+                  <a:lnTo>
+                    <a:pt x="1899301" y="213733"/>
+                  </a:lnTo>
+                  <a:lnTo>
+                    <a:pt x="1969645" y="219998"/>
+                  </a:lnTo>
+                  <a:lnTo>
+                    <a:pt x="2039990" y="226163"/>
+                  </a:lnTo>
+                  <a:lnTo>
+                    <a:pt x="2110334" y="232229"/>
+                  </a:lnTo>
+                  <a:lnTo>
+                    <a:pt x="2180679" y="238198"/>
+                  </a:lnTo>
+                  <a:lnTo>
+                    <a:pt x="2251023" y="244071"/>
+                  </a:lnTo>
+                  <a:lnTo>
+                    <a:pt x="2321368" y="249850"/>
+                  </a:lnTo>
+                  <a:lnTo>
+                    <a:pt x="2391712" y="255536"/>
+                  </a:lnTo>
+                  <a:lnTo>
+                    <a:pt x="2462057" y="261132"/>
+                  </a:lnTo>
+                  <a:lnTo>
+                    <a:pt x="2532401" y="266638"/>
+                  </a:lnTo>
+                  <a:lnTo>
+                    <a:pt x="2602746" y="272055"/>
+                  </a:lnTo>
+                  <a:lnTo>
+                    <a:pt x="2673090" y="277386"/>
+                  </a:lnTo>
+                  <a:lnTo>
+                    <a:pt x="2743435" y="282632"/>
+                  </a:lnTo>
+                  <a:lnTo>
+                    <a:pt x="2813779" y="287793"/>
+                  </a:lnTo>
+                  <a:lnTo>
+                    <a:pt x="2884124" y="292872"/>
+                  </a:lnTo>
+                  <a:lnTo>
+                    <a:pt x="2954468" y="297870"/>
+                  </a:lnTo>
+                  <a:lnTo>
+                    <a:pt x="3024813" y="302787"/>
+                  </a:lnTo>
+                  <a:lnTo>
+                    <a:pt x="3095157" y="307626"/>
+                  </a:lnTo>
+                  <a:lnTo>
+                    <a:pt x="3165502" y="312387"/>
+                  </a:lnTo>
+                  <a:lnTo>
+                    <a:pt x="3235846" y="317072"/>
+                  </a:lnTo>
+                  <a:lnTo>
+                    <a:pt x="3306191" y="321682"/>
+                  </a:lnTo>
+                  <a:lnTo>
+                    <a:pt x="3376535" y="326219"/>
+                  </a:lnTo>
+                  <a:lnTo>
+                    <a:pt x="3446880" y="330682"/>
+                  </a:lnTo>
+                  <a:lnTo>
+                    <a:pt x="3517224" y="335074"/>
+                  </a:lnTo>
+                  <a:lnTo>
+                    <a:pt x="3587569" y="339396"/>
+                  </a:lnTo>
+                  <a:lnTo>
+                    <a:pt x="3657913" y="343648"/>
+                  </a:lnTo>
+                  <a:lnTo>
+                    <a:pt x="3728257" y="347833"/>
+                  </a:lnTo>
+                  <a:lnTo>
+                    <a:pt x="3798602" y="351950"/>
+                  </a:lnTo>
+                  <a:lnTo>
+                    <a:pt x="3868946" y="356001"/>
+                  </a:lnTo>
+                  <a:lnTo>
+                    <a:pt x="3939291" y="359988"/>
+                  </a:lnTo>
+                  <a:lnTo>
+                    <a:pt x="4009635" y="363910"/>
+                  </a:lnTo>
+                  <a:lnTo>
+                    <a:pt x="4079980" y="367770"/>
+                  </a:lnTo>
+                  <a:lnTo>
+                    <a:pt x="4150324" y="371568"/>
+                  </a:lnTo>
+                  <a:lnTo>
+                    <a:pt x="4220669" y="375306"/>
+                  </a:lnTo>
+                  <a:lnTo>
+                    <a:pt x="4291013" y="378983"/>
+                  </a:lnTo>
+                  <a:lnTo>
+                    <a:pt x="4361358" y="382601"/>
+                  </a:lnTo>
+                  <a:lnTo>
+                    <a:pt x="4431702" y="386162"/>
+                  </a:lnTo>
+                  <a:lnTo>
+                    <a:pt x="4502047" y="389665"/>
+                  </a:lnTo>
+                  <a:lnTo>
+                    <a:pt x="4572391" y="393113"/>
+                  </a:lnTo>
+                  <a:lnTo>
+                    <a:pt x="4642736" y="396505"/>
+                  </a:lnTo>
+                  <a:lnTo>
+                    <a:pt x="4713080" y="399843"/>
+                  </a:lnTo>
+                  <a:lnTo>
+                    <a:pt x="4783425" y="403127"/>
+                  </a:lnTo>
+                  <a:lnTo>
+                    <a:pt x="4853769" y="406359"/>
+                  </a:lnTo>
+                  <a:lnTo>
+                    <a:pt x="4924114" y="409539"/>
+                  </a:lnTo>
+                  <a:lnTo>
+                    <a:pt x="4994458" y="412668"/>
+                  </a:lnTo>
+                  <a:lnTo>
+                    <a:pt x="5064803" y="415747"/>
+                  </a:lnTo>
+                  <a:lnTo>
+                    <a:pt x="5135147" y="418777"/>
+                  </a:lnTo>
+                  <a:lnTo>
+                    <a:pt x="5205492" y="421758"/>
+                  </a:lnTo>
+                  <a:lnTo>
+                    <a:pt x="5275836" y="424691"/>
+                  </a:lnTo>
+                  <a:lnTo>
+                    <a:pt x="5346181" y="427578"/>
+                  </a:lnTo>
+                  <a:lnTo>
+                    <a:pt x="5416525" y="430418"/>
+                  </a:lnTo>
+                  <a:lnTo>
+                    <a:pt x="5486870" y="433213"/>
+                  </a:lnTo>
+                  <a:lnTo>
+                    <a:pt x="5557214" y="435963"/>
+                  </a:lnTo>
+                  <a:lnTo>
+                    <a:pt x="5627559" y="438669"/>
+                  </a:lnTo>
+                  <a:lnTo>
+                    <a:pt x="5697903" y="441331"/>
+                  </a:lnTo>
+                  <a:lnTo>
+                    <a:pt x="5768248" y="443951"/>
+                  </a:lnTo>
+                  <a:lnTo>
+                    <a:pt x="5838592" y="446529"/>
+                  </a:lnTo>
+                  <a:lnTo>
+                    <a:pt x="5908937" y="449066"/>
+                  </a:lnTo>
+                  <a:lnTo>
+                    <a:pt x="5979281" y="451562"/>
+                  </a:lnTo>
+                  <a:lnTo>
+                    <a:pt x="6049626" y="454018"/>
+                  </a:lnTo>
+                  <a:lnTo>
+                    <a:pt x="6119970" y="456435"/>
+                  </a:lnTo>
+                  <a:lnTo>
+                    <a:pt x="6190315" y="458813"/>
+                  </a:lnTo>
+                  <a:lnTo>
+                    <a:pt x="6260659" y="461153"/>
+                  </a:lnTo>
+                  <a:lnTo>
+                    <a:pt x="6331004" y="463455"/>
+                  </a:lnTo>
+                  <a:lnTo>
+                    <a:pt x="6401348" y="465721"/>
+                  </a:lnTo>
+                  <a:lnTo>
+                    <a:pt x="6471693" y="467950"/>
+                  </a:lnTo>
+                  <a:lnTo>
+                    <a:pt x="6542037" y="470144"/>
+                  </a:lnTo>
+                  <a:lnTo>
+                    <a:pt x="6612382" y="472302"/>
+                  </a:lnTo>
+                  <a:lnTo>
+                    <a:pt x="6682726" y="474426"/>
+                  </a:lnTo>
+                  <a:lnTo>
+                    <a:pt x="6753071" y="476516"/>
+                  </a:lnTo>
+                  <a:lnTo>
+                    <a:pt x="6823415" y="478573"/>
+                  </a:lnTo>
+                  <a:lnTo>
+                    <a:pt x="6893760" y="480596"/>
+                  </a:lnTo>
+                  <a:lnTo>
+                    <a:pt x="6964104" y="482587"/>
                   </a:lnTo>
                 </a:path>
               </a:pathLst>
@@ -4654,27 +4689,27 @@
         </p:sp>
         <p:sp>
           <p:nvSpPr>
-            <p:cNvPr id="26" name="pl26"/>
+            <p:cNvPr id="27" name="pl27"/>
             <p:cNvSpPr/>
             <p:nvPr/>
           </p:nvSpPr>
           <p:spPr>
             <a:xfrm>
-              <a:off x="817517" y="4727786"/>
-              <a:ext cx="7799693" cy="0"/>
+              <a:off x="887106" y="3100960"/>
+              <a:ext cx="7660515" cy="0"/>
             </a:xfrm>
             <a:custGeom>
               <a:avLst/>
               <a:pathLst>
-                <a:path w="7799693" h="0">
+                <a:path w="7660515" h="0">
                   <a:moveTo>
                     <a:pt x="0" y="0"/>
                   </a:moveTo>
                   <a:lnTo>
-                    <a:pt x="7799693" y="0"/>
-                  </a:lnTo>
-                  <a:lnTo>
-                    <a:pt x="7799693" y="0"/>
+                    <a:pt x="7660515" y="0"/>
+                  </a:lnTo>
+                  <a:lnTo>
+                    <a:pt x="7660515" y="0"/>
                   </a:lnTo>
                 </a:path>
               </a:pathLst>
@@ -4697,21 +4732,21 @@
         </p:sp>
         <p:sp>
           <p:nvSpPr>
-            <p:cNvPr id="27" name="pl27"/>
+            <p:cNvPr id="28" name="pl28"/>
             <p:cNvSpPr/>
             <p:nvPr/>
           </p:nvSpPr>
           <p:spPr>
             <a:xfrm>
-              <a:off x="4293144" y="2073503"/>
-              <a:ext cx="0" cy="3649639"/>
+              <a:off x="4300713" y="2143092"/>
+              <a:ext cx="0" cy="1317069"/>
             </a:xfrm>
             <a:custGeom>
               <a:avLst/>
               <a:pathLst>
-                <a:path w="0" h="3649639">
+                <a:path w="0" h="1317069">
                   <a:moveTo>
-                    <a:pt x="0" y="3649639"/>
+                    <a:pt x="0" y="1317069"/>
                   </a:moveTo>
                   <a:lnTo>
                     <a:pt x="0" y="0"/>
@@ -4740,21 +4775,21 @@
         </p:sp>
         <p:sp>
           <p:nvSpPr>
-            <p:cNvPr id="28" name="pl28"/>
+            <p:cNvPr id="29" name="pl29"/>
             <p:cNvSpPr/>
             <p:nvPr/>
           </p:nvSpPr>
           <p:spPr>
             <a:xfrm>
-              <a:off x="3074393" y="2073503"/>
-              <a:ext cx="0" cy="3649639"/>
+              <a:off x="3103710" y="2143092"/>
+              <a:ext cx="0" cy="1317069"/>
             </a:xfrm>
             <a:custGeom>
               <a:avLst/>
               <a:pathLst>
-                <a:path w="0" h="3649639">
+                <a:path w="0" h="1317069">
                   <a:moveTo>
-                    <a:pt x="0" y="3649639"/>
+                    <a:pt x="0" y="1317069"/>
                   </a:moveTo>
                   <a:lnTo>
                     <a:pt x="0" y="0"/>
@@ -4783,21 +4818,21 @@
         </p:sp>
         <p:sp>
           <p:nvSpPr>
-            <p:cNvPr id="29" name="pl29"/>
+            <p:cNvPr id="30" name="pl30"/>
             <p:cNvSpPr/>
             <p:nvPr/>
           </p:nvSpPr>
           <p:spPr>
             <a:xfrm>
-              <a:off x="5518580" y="2073503"/>
-              <a:ext cx="0" cy="3649639"/>
+              <a:off x="5504283" y="2143092"/>
+              <a:ext cx="0" cy="1317069"/>
             </a:xfrm>
             <a:custGeom>
               <a:avLst/>
               <a:pathLst>
-                <a:path w="0" h="3649639">
+                <a:path w="0" h="1317069">
                   <a:moveTo>
-                    <a:pt x="0" y="3649639"/>
+                    <a:pt x="0" y="1317069"/>
                   </a:moveTo>
                   <a:lnTo>
                     <a:pt x="0" y="0"/>
@@ -4826,13 +4861,13 @@
         </p:sp>
         <p:sp>
           <p:nvSpPr>
-            <p:cNvPr id="30" name="tx30"/>
+            <p:cNvPr id="31" name="tx31"/>
             <p:cNvSpPr/>
             <p:nvPr/>
           </p:nvSpPr>
           <p:spPr>
             <a:xfrm>
-              <a:off x="692708" y="5517199"/>
+              <a:off x="762297" y="3360243"/>
               <a:ext cx="62179" cy="80101"/>
             </a:xfrm>
             <a:prstGeom prst="rect">
@@ -4872,13 +4907,13 @@
         </p:sp>
         <p:sp>
           <p:nvSpPr>
-            <p:cNvPr id="31" name="tx31"/>
+            <p:cNvPr id="32" name="tx32"/>
             <p:cNvSpPr/>
             <p:nvPr/>
           </p:nvSpPr>
           <p:spPr>
             <a:xfrm>
-              <a:off x="692708" y="4687735"/>
+              <a:off x="762297" y="3060909"/>
               <a:ext cx="62179" cy="80101"/>
             </a:xfrm>
             <a:prstGeom prst="rect">
@@ -4918,13 +4953,13 @@
         </p:sp>
         <p:sp>
           <p:nvSpPr>
-            <p:cNvPr id="32" name="tx32"/>
+            <p:cNvPr id="33" name="tx33"/>
             <p:cNvSpPr/>
             <p:nvPr/>
           </p:nvSpPr>
           <p:spPr>
             <a:xfrm>
-              <a:off x="692708" y="3858272"/>
+              <a:off x="762297" y="2761575"/>
               <a:ext cx="62179" cy="80101"/>
             </a:xfrm>
             <a:prstGeom prst="rect">
@@ -4964,13 +4999,13 @@
         </p:sp>
         <p:sp>
           <p:nvSpPr>
-            <p:cNvPr id="33" name="tx33"/>
+            <p:cNvPr id="34" name="tx34"/>
             <p:cNvSpPr/>
             <p:nvPr/>
           </p:nvSpPr>
           <p:spPr>
             <a:xfrm>
-              <a:off x="692708" y="3028808"/>
+              <a:off x="762297" y="2462242"/>
               <a:ext cx="62179" cy="80101"/>
             </a:xfrm>
             <a:prstGeom prst="rect">
@@ -5010,13 +5045,13 @@
         </p:sp>
         <p:sp>
           <p:nvSpPr>
-            <p:cNvPr id="34" name="tx34"/>
+            <p:cNvPr id="35" name="tx35"/>
             <p:cNvSpPr/>
             <p:nvPr/>
           </p:nvSpPr>
           <p:spPr>
             <a:xfrm>
-              <a:off x="692708" y="2199345"/>
+              <a:off x="762297" y="2162908"/>
               <a:ext cx="62179" cy="80101"/>
             </a:xfrm>
             <a:prstGeom prst="rect">
@@ -5056,13 +5091,13 @@
         </p:sp>
         <p:sp>
           <p:nvSpPr>
-            <p:cNvPr id="35" name="tx35"/>
+            <p:cNvPr id="36" name="tx36"/>
             <p:cNvSpPr/>
             <p:nvPr/>
           </p:nvSpPr>
           <p:spPr>
             <a:xfrm>
-              <a:off x="2134610" y="5785772"/>
+              <a:off x="2179256" y="3522791"/>
               <a:ext cx="161574" cy="80101"/>
             </a:xfrm>
             <a:prstGeom prst="rect">
@@ -5102,13 +5137,13 @@
         </p:sp>
         <p:sp>
           <p:nvSpPr>
-            <p:cNvPr id="36" name="tx36"/>
+            <p:cNvPr id="37" name="tx37"/>
             <p:cNvSpPr/>
             <p:nvPr/>
           </p:nvSpPr>
           <p:spPr>
             <a:xfrm>
-              <a:off x="3875731" y="5785772"/>
+              <a:off x="3889308" y="3522791"/>
               <a:ext cx="161574" cy="80101"/>
             </a:xfrm>
             <a:prstGeom prst="rect">
@@ -5148,13 +5183,13 @@
         </p:sp>
         <p:sp>
           <p:nvSpPr>
-            <p:cNvPr id="37" name="tx37"/>
+            <p:cNvPr id="38" name="tx38"/>
             <p:cNvSpPr/>
             <p:nvPr/>
           </p:nvSpPr>
           <p:spPr>
             <a:xfrm>
-              <a:off x="5666549" y="5785772"/>
+              <a:off x="5649057" y="3522791"/>
               <a:ext cx="62179" cy="80101"/>
             </a:xfrm>
             <a:prstGeom prst="rect">
@@ -5194,13 +5229,13 @@
         </p:sp>
         <p:sp>
           <p:nvSpPr>
-            <p:cNvPr id="38" name="tx38"/>
+            <p:cNvPr id="39" name="tx39"/>
             <p:cNvSpPr/>
             <p:nvPr/>
           </p:nvSpPr>
           <p:spPr>
             <a:xfrm>
-              <a:off x="7376580" y="5785772"/>
+              <a:off x="7328020" y="3522791"/>
               <a:ext cx="124358" cy="80101"/>
             </a:xfrm>
             <a:prstGeom prst="rect">
@@ -5240,13 +5275,13 @@
         </p:sp>
         <p:sp>
           <p:nvSpPr>
-            <p:cNvPr id="39" name="tx39"/>
+            <p:cNvPr id="40" name="tx40"/>
             <p:cNvSpPr/>
             <p:nvPr/>
           </p:nvSpPr>
           <p:spPr>
             <a:xfrm>
-              <a:off x="1561815" y="5925448"/>
+              <a:off x="1561815" y="3662467"/>
               <a:ext cx="6311097" cy="100218"/>
             </a:xfrm>
             <a:prstGeom prst="rect">
@@ -5286,13 +5321,13 @@
         </p:sp>
         <p:sp>
           <p:nvSpPr>
-            <p:cNvPr id="40" name="tx40"/>
+            <p:cNvPr id="41" name="tx41"/>
             <p:cNvSpPr/>
             <p:nvPr/>
           </p:nvSpPr>
           <p:spPr>
             <a:xfrm rot="-5400000">
-              <a:off x="68446" y="3848213"/>
+              <a:off x="138035" y="2751517"/>
               <a:ext cx="1016904" cy="100218"/>
             </a:xfrm>
             <a:prstGeom prst="rect">
@@ -5332,13 +5367,13 @@
         </p:sp>
         <p:sp>
           <p:nvSpPr>
-            <p:cNvPr id="41" name="tx41"/>
+            <p:cNvPr id="42" name="tx42"/>
             <p:cNvSpPr/>
             <p:nvPr/>
           </p:nvSpPr>
           <p:spPr>
             <a:xfrm>
-              <a:off x="817517" y="1896563"/>
+              <a:off x="887106" y="1966152"/>
               <a:ext cx="6959864" cy="82021"/>
             </a:xfrm>
             <a:prstGeom prst="rect">
@@ -5378,13 +5413,3789 @@
         </p:sp>
         <p:sp>
           <p:nvSpPr>
-            <p:cNvPr id="42" name="tx42"/>
+            <p:cNvPr id="43" name="tx43"/>
             <p:cNvSpPr/>
             <p:nvPr/>
           </p:nvSpPr>
           <p:spPr>
             <a:xfrm>
-              <a:off x="817517" y="1669789"/>
+              <a:off x="887106" y="1739378"/>
+              <a:ext cx="3760378" cy="120152"/>
+            </a:xfrm>
+            <a:prstGeom prst="rect">
+              <a:avLst/>
+            </a:prstGeom>
+            <a:noFill/>
+          </p:spPr>
+          <p:txBody>
+            <a:bodyPr lIns="0" rIns="0" tIns="0" bIns="0" anchorCtr="1" anchor="ctr" wrap="none"/>
+            <a:lstStyle/>
+            <a:p>
+              <a:pPr algn="l" marL="0" marR="0" indent="0">
+                <a:lnSpc>
+                  <a:spcPts val="1320"/>
+                </a:lnSpc>
+                <a:spcBef>
+                  <a:spcPts val="0"/>
+                </a:spcBef>
+                <a:spcAft>
+                  <a:spcPts val="0"/>
+                </a:spcAft>
+              </a:pPr>
+              <a:r>
+                <a:rPr sz="1320">
+                  <a:solidFill>
+                    <a:srgbClr val="000000">
+                      <a:alpha val="100000"/>
+                    </a:srgbClr>
+                  </a:solidFill>
+                  <a:latin typeface="Helvetica"/>
+                  <a:cs typeface="Helvetica"/>
+                </a:rPr>
+                <a:t>Anemia Grade 3 (Sensitivity, Carboplatin AUC ≥ 3)</a:t>
+              </a:r>
+            </a:p>
+          </p:txBody>
+        </p:sp>
+        <p:sp>
+          <p:nvSpPr>
+            <p:cNvPr id="44" name="pl44"/>
+            <p:cNvSpPr/>
+            <p:nvPr/>
+          </p:nvSpPr>
+          <p:spPr>
+            <a:xfrm>
+              <a:off x="887106" y="5444019"/>
+              <a:ext cx="7660515" cy="0"/>
+            </a:xfrm>
+            <a:custGeom>
+              <a:avLst/>
+              <a:pathLst>
+                <a:path w="7660515" h="0">
+                  <a:moveTo>
+                    <a:pt x="0" y="0"/>
+                  </a:moveTo>
+                  <a:lnTo>
+                    <a:pt x="7660515" y="0"/>
+                  </a:lnTo>
+                  <a:lnTo>
+                    <a:pt x="7660515" y="0"/>
+                  </a:lnTo>
+                </a:path>
+              </a:pathLst>
+            </a:custGeom>
+            <a:ln w="6775" cap="flat">
+              <a:solidFill>
+                <a:srgbClr val="EBEBEB">
+                  <a:alpha val="100000"/>
+                </a:srgbClr>
+              </a:solidFill>
+              <a:prstDash val="solid"/>
+              <a:round/>
+            </a:ln>
+          </p:spPr>
+          <p:txBody>
+            <a:bodyPr/>
+            <a:lstStyle/>
+            <a:p/>
+          </p:txBody>
+        </p:sp>
+        <p:sp>
+          <p:nvSpPr>
+            <p:cNvPr id="45" name="pl45"/>
+            <p:cNvSpPr/>
+            <p:nvPr/>
+          </p:nvSpPr>
+          <p:spPr>
+            <a:xfrm>
+              <a:off x="887106" y="5144686"/>
+              <a:ext cx="7660515" cy="0"/>
+            </a:xfrm>
+            <a:custGeom>
+              <a:avLst/>
+              <a:pathLst>
+                <a:path w="7660515" h="0">
+                  <a:moveTo>
+                    <a:pt x="0" y="0"/>
+                  </a:moveTo>
+                  <a:lnTo>
+                    <a:pt x="7660515" y="0"/>
+                  </a:lnTo>
+                  <a:lnTo>
+                    <a:pt x="7660515" y="0"/>
+                  </a:lnTo>
+                </a:path>
+              </a:pathLst>
+            </a:custGeom>
+            <a:ln w="6775" cap="flat">
+              <a:solidFill>
+                <a:srgbClr val="EBEBEB">
+                  <a:alpha val="100000"/>
+                </a:srgbClr>
+              </a:solidFill>
+              <a:prstDash val="solid"/>
+              <a:round/>
+            </a:ln>
+          </p:spPr>
+          <p:txBody>
+            <a:bodyPr/>
+            <a:lstStyle/>
+            <a:p/>
+          </p:txBody>
+        </p:sp>
+        <p:sp>
+          <p:nvSpPr>
+            <p:cNvPr id="46" name="pl46"/>
+            <p:cNvSpPr/>
+            <p:nvPr/>
+          </p:nvSpPr>
+          <p:spPr>
+            <a:xfrm>
+              <a:off x="887106" y="4845352"/>
+              <a:ext cx="7660515" cy="0"/>
+            </a:xfrm>
+            <a:custGeom>
+              <a:avLst/>
+              <a:pathLst>
+                <a:path w="7660515" h="0">
+                  <a:moveTo>
+                    <a:pt x="0" y="0"/>
+                  </a:moveTo>
+                  <a:lnTo>
+                    <a:pt x="7660515" y="0"/>
+                  </a:lnTo>
+                  <a:lnTo>
+                    <a:pt x="7660515" y="0"/>
+                  </a:lnTo>
+                </a:path>
+              </a:pathLst>
+            </a:custGeom>
+            <a:ln w="6775" cap="flat">
+              <a:solidFill>
+                <a:srgbClr val="EBEBEB">
+                  <a:alpha val="100000"/>
+                </a:srgbClr>
+              </a:solidFill>
+              <a:prstDash val="solid"/>
+              <a:round/>
+            </a:ln>
+          </p:spPr>
+          <p:txBody>
+            <a:bodyPr/>
+            <a:lstStyle/>
+            <a:p/>
+          </p:txBody>
+        </p:sp>
+        <p:sp>
+          <p:nvSpPr>
+            <p:cNvPr id="47" name="pl47"/>
+            <p:cNvSpPr/>
+            <p:nvPr/>
+          </p:nvSpPr>
+          <p:spPr>
+            <a:xfrm>
+              <a:off x="887106" y="4546018"/>
+              <a:ext cx="7660515" cy="0"/>
+            </a:xfrm>
+            <a:custGeom>
+              <a:avLst/>
+              <a:pathLst>
+                <a:path w="7660515" h="0">
+                  <a:moveTo>
+                    <a:pt x="0" y="0"/>
+                  </a:moveTo>
+                  <a:lnTo>
+                    <a:pt x="7660515" y="0"/>
+                  </a:lnTo>
+                  <a:lnTo>
+                    <a:pt x="7660515" y="0"/>
+                  </a:lnTo>
+                </a:path>
+              </a:pathLst>
+            </a:custGeom>
+            <a:ln w="6775" cap="flat">
+              <a:solidFill>
+                <a:srgbClr val="EBEBEB">
+                  <a:alpha val="100000"/>
+                </a:srgbClr>
+              </a:solidFill>
+              <a:prstDash val="solid"/>
+              <a:round/>
+            </a:ln>
+          </p:spPr>
+          <p:txBody>
+            <a:bodyPr/>
+            <a:lstStyle/>
+            <a:p/>
+          </p:txBody>
+        </p:sp>
+        <p:sp>
+          <p:nvSpPr>
+            <p:cNvPr id="48" name="pl48"/>
+            <p:cNvSpPr/>
+            <p:nvPr/>
+          </p:nvSpPr>
+          <p:spPr>
+            <a:xfrm>
+              <a:off x="977504" y="4336484"/>
+              <a:ext cx="0" cy="1317069"/>
+            </a:xfrm>
+            <a:custGeom>
+              <a:avLst/>
+              <a:pathLst>
+                <a:path w="0" h="1317069">
+                  <a:moveTo>
+                    <a:pt x="0" y="1317069"/>
+                  </a:moveTo>
+                  <a:lnTo>
+                    <a:pt x="0" y="0"/>
+                  </a:lnTo>
+                  <a:lnTo>
+                    <a:pt x="0" y="0"/>
+                  </a:lnTo>
+                </a:path>
+              </a:pathLst>
+            </a:custGeom>
+            <a:ln w="6775" cap="flat">
+              <a:solidFill>
+                <a:srgbClr val="EBEBEB">
+                  <a:alpha val="100000"/>
+                </a:srgbClr>
+              </a:solidFill>
+              <a:prstDash val="solid"/>
+              <a:round/>
+            </a:ln>
+          </p:spPr>
+          <p:txBody>
+            <a:bodyPr/>
+            <a:lstStyle/>
+            <a:p/>
+          </p:txBody>
+        </p:sp>
+        <p:sp>
+          <p:nvSpPr>
+            <p:cNvPr id="49" name="pl49"/>
+            <p:cNvSpPr/>
+            <p:nvPr/>
+          </p:nvSpPr>
+          <p:spPr>
+            <a:xfrm>
+              <a:off x="1832530" y="4336484"/>
+              <a:ext cx="0" cy="1317069"/>
+            </a:xfrm>
+            <a:custGeom>
+              <a:avLst/>
+              <a:pathLst>
+                <a:path w="0" h="1317069">
+                  <a:moveTo>
+                    <a:pt x="0" y="1317069"/>
+                  </a:moveTo>
+                  <a:lnTo>
+                    <a:pt x="0" y="0"/>
+                  </a:lnTo>
+                  <a:lnTo>
+                    <a:pt x="0" y="0"/>
+                  </a:lnTo>
+                </a:path>
+              </a:pathLst>
+            </a:custGeom>
+            <a:ln w="6775" cap="flat">
+              <a:solidFill>
+                <a:srgbClr val="EBEBEB">
+                  <a:alpha val="100000"/>
+                </a:srgbClr>
+              </a:solidFill>
+              <a:prstDash val="solid"/>
+              <a:round/>
+            </a:ln>
+          </p:spPr>
+          <p:txBody>
+            <a:bodyPr/>
+            <a:lstStyle/>
+            <a:p/>
+          </p:txBody>
+        </p:sp>
+        <p:sp>
+          <p:nvSpPr>
+            <p:cNvPr id="50" name="pl50"/>
+            <p:cNvSpPr/>
+            <p:nvPr/>
+          </p:nvSpPr>
+          <p:spPr>
+            <a:xfrm>
+              <a:off x="2687556" y="4336484"/>
+              <a:ext cx="0" cy="1317069"/>
+            </a:xfrm>
+            <a:custGeom>
+              <a:avLst/>
+              <a:pathLst>
+                <a:path w="0" h="1317069">
+                  <a:moveTo>
+                    <a:pt x="0" y="1317069"/>
+                  </a:moveTo>
+                  <a:lnTo>
+                    <a:pt x="0" y="0"/>
+                  </a:lnTo>
+                  <a:lnTo>
+                    <a:pt x="0" y="0"/>
+                  </a:lnTo>
+                </a:path>
+              </a:pathLst>
+            </a:custGeom>
+            <a:ln w="6775" cap="flat">
+              <a:solidFill>
+                <a:srgbClr val="EBEBEB">
+                  <a:alpha val="100000"/>
+                </a:srgbClr>
+              </a:solidFill>
+              <a:prstDash val="solid"/>
+              <a:round/>
+            </a:ln>
+          </p:spPr>
+          <p:txBody>
+            <a:bodyPr/>
+            <a:lstStyle/>
+            <a:p/>
+          </p:txBody>
+        </p:sp>
+        <p:sp>
+          <p:nvSpPr>
+            <p:cNvPr id="51" name="pl51"/>
+            <p:cNvSpPr/>
+            <p:nvPr/>
+          </p:nvSpPr>
+          <p:spPr>
+            <a:xfrm>
+              <a:off x="3542582" y="4336484"/>
+              <a:ext cx="0" cy="1317069"/>
+            </a:xfrm>
+            <a:custGeom>
+              <a:avLst/>
+              <a:pathLst>
+                <a:path w="0" h="1317069">
+                  <a:moveTo>
+                    <a:pt x="0" y="1317069"/>
+                  </a:moveTo>
+                  <a:lnTo>
+                    <a:pt x="0" y="0"/>
+                  </a:lnTo>
+                  <a:lnTo>
+                    <a:pt x="0" y="0"/>
+                  </a:lnTo>
+                </a:path>
+              </a:pathLst>
+            </a:custGeom>
+            <a:ln w="6775" cap="flat">
+              <a:solidFill>
+                <a:srgbClr val="EBEBEB">
+                  <a:alpha val="100000"/>
+                </a:srgbClr>
+              </a:solidFill>
+              <a:prstDash val="solid"/>
+              <a:round/>
+            </a:ln>
+          </p:spPr>
+          <p:txBody>
+            <a:bodyPr/>
+            <a:lstStyle/>
+            <a:p/>
+          </p:txBody>
+        </p:sp>
+        <p:sp>
+          <p:nvSpPr>
+            <p:cNvPr id="52" name="pl52"/>
+            <p:cNvSpPr/>
+            <p:nvPr/>
+          </p:nvSpPr>
+          <p:spPr>
+            <a:xfrm>
+              <a:off x="4397608" y="4336484"/>
+              <a:ext cx="0" cy="1317069"/>
+            </a:xfrm>
+            <a:custGeom>
+              <a:avLst/>
+              <a:pathLst>
+                <a:path w="0" h="1317069">
+                  <a:moveTo>
+                    <a:pt x="0" y="1317069"/>
+                  </a:moveTo>
+                  <a:lnTo>
+                    <a:pt x="0" y="0"/>
+                  </a:lnTo>
+                  <a:lnTo>
+                    <a:pt x="0" y="0"/>
+                  </a:lnTo>
+                </a:path>
+              </a:pathLst>
+            </a:custGeom>
+            <a:ln w="6775" cap="flat">
+              <a:solidFill>
+                <a:srgbClr val="EBEBEB">
+                  <a:alpha val="100000"/>
+                </a:srgbClr>
+              </a:solidFill>
+              <a:prstDash val="solid"/>
+              <a:round/>
+            </a:ln>
+          </p:spPr>
+          <p:txBody>
+            <a:bodyPr/>
+            <a:lstStyle/>
+            <a:p/>
+          </p:txBody>
+        </p:sp>
+        <p:sp>
+          <p:nvSpPr>
+            <p:cNvPr id="53" name="pl53"/>
+            <p:cNvSpPr/>
+            <p:nvPr/>
+          </p:nvSpPr>
+          <p:spPr>
+            <a:xfrm>
+              <a:off x="5252634" y="4336484"/>
+              <a:ext cx="0" cy="1317069"/>
+            </a:xfrm>
+            <a:custGeom>
+              <a:avLst/>
+              <a:pathLst>
+                <a:path w="0" h="1317069">
+                  <a:moveTo>
+                    <a:pt x="0" y="1317069"/>
+                  </a:moveTo>
+                  <a:lnTo>
+                    <a:pt x="0" y="0"/>
+                  </a:lnTo>
+                  <a:lnTo>
+                    <a:pt x="0" y="0"/>
+                  </a:lnTo>
+                </a:path>
+              </a:pathLst>
+            </a:custGeom>
+            <a:ln w="6775" cap="flat">
+              <a:solidFill>
+                <a:srgbClr val="EBEBEB">
+                  <a:alpha val="100000"/>
+                </a:srgbClr>
+              </a:solidFill>
+              <a:prstDash val="solid"/>
+              <a:round/>
+            </a:ln>
+          </p:spPr>
+          <p:txBody>
+            <a:bodyPr/>
+            <a:lstStyle/>
+            <a:p/>
+          </p:txBody>
+        </p:sp>
+        <p:sp>
+          <p:nvSpPr>
+            <p:cNvPr id="54" name="pl54"/>
+            <p:cNvSpPr/>
+            <p:nvPr/>
+          </p:nvSpPr>
+          <p:spPr>
+            <a:xfrm>
+              <a:off x="6107660" y="4336484"/>
+              <a:ext cx="0" cy="1317069"/>
+            </a:xfrm>
+            <a:custGeom>
+              <a:avLst/>
+              <a:pathLst>
+                <a:path w="0" h="1317069">
+                  <a:moveTo>
+                    <a:pt x="0" y="1317069"/>
+                  </a:moveTo>
+                  <a:lnTo>
+                    <a:pt x="0" y="0"/>
+                  </a:lnTo>
+                  <a:lnTo>
+                    <a:pt x="0" y="0"/>
+                  </a:lnTo>
+                </a:path>
+              </a:pathLst>
+            </a:custGeom>
+            <a:ln w="6775" cap="flat">
+              <a:solidFill>
+                <a:srgbClr val="EBEBEB">
+                  <a:alpha val="100000"/>
+                </a:srgbClr>
+              </a:solidFill>
+              <a:prstDash val="solid"/>
+              <a:round/>
+            </a:ln>
+          </p:spPr>
+          <p:txBody>
+            <a:bodyPr/>
+            <a:lstStyle/>
+            <a:p/>
+          </p:txBody>
+        </p:sp>
+        <p:sp>
+          <p:nvSpPr>
+            <p:cNvPr id="55" name="pl55"/>
+            <p:cNvSpPr/>
+            <p:nvPr/>
+          </p:nvSpPr>
+          <p:spPr>
+            <a:xfrm>
+              <a:off x="6962686" y="4336484"/>
+              <a:ext cx="0" cy="1317069"/>
+            </a:xfrm>
+            <a:custGeom>
+              <a:avLst/>
+              <a:pathLst>
+                <a:path w="0" h="1317069">
+                  <a:moveTo>
+                    <a:pt x="0" y="1317069"/>
+                  </a:moveTo>
+                  <a:lnTo>
+                    <a:pt x="0" y="0"/>
+                  </a:lnTo>
+                  <a:lnTo>
+                    <a:pt x="0" y="0"/>
+                  </a:lnTo>
+                </a:path>
+              </a:pathLst>
+            </a:custGeom>
+            <a:ln w="6775" cap="flat">
+              <a:solidFill>
+                <a:srgbClr val="EBEBEB">
+                  <a:alpha val="100000"/>
+                </a:srgbClr>
+              </a:solidFill>
+              <a:prstDash val="solid"/>
+              <a:round/>
+            </a:ln>
+          </p:spPr>
+          <p:txBody>
+            <a:bodyPr/>
+            <a:lstStyle/>
+            <a:p/>
+          </p:txBody>
+        </p:sp>
+        <p:sp>
+          <p:nvSpPr>
+            <p:cNvPr id="56" name="pl56"/>
+            <p:cNvSpPr/>
+            <p:nvPr/>
+          </p:nvSpPr>
+          <p:spPr>
+            <a:xfrm>
+              <a:off x="7817712" y="4336484"/>
+              <a:ext cx="0" cy="1317069"/>
+            </a:xfrm>
+            <a:custGeom>
+              <a:avLst/>
+              <a:pathLst>
+                <a:path w="0" h="1317069">
+                  <a:moveTo>
+                    <a:pt x="0" y="1317069"/>
+                  </a:moveTo>
+                  <a:lnTo>
+                    <a:pt x="0" y="0"/>
+                  </a:lnTo>
+                  <a:lnTo>
+                    <a:pt x="0" y="0"/>
+                  </a:lnTo>
+                </a:path>
+              </a:pathLst>
+            </a:custGeom>
+            <a:ln w="6775" cap="flat">
+              <a:solidFill>
+                <a:srgbClr val="EBEBEB">
+                  <a:alpha val="100000"/>
+                </a:srgbClr>
+              </a:solidFill>
+              <a:prstDash val="solid"/>
+              <a:round/>
+            </a:ln>
+          </p:spPr>
+          <p:txBody>
+            <a:bodyPr/>
+            <a:lstStyle/>
+            <a:p/>
+          </p:txBody>
+        </p:sp>
+        <p:sp>
+          <p:nvSpPr>
+            <p:cNvPr id="57" name="pl57"/>
+            <p:cNvSpPr/>
+            <p:nvPr/>
+          </p:nvSpPr>
+          <p:spPr>
+            <a:xfrm>
+              <a:off x="887106" y="5593686"/>
+              <a:ext cx="7660515" cy="0"/>
+            </a:xfrm>
+            <a:custGeom>
+              <a:avLst/>
+              <a:pathLst>
+                <a:path w="7660515" h="0">
+                  <a:moveTo>
+                    <a:pt x="0" y="0"/>
+                  </a:moveTo>
+                  <a:lnTo>
+                    <a:pt x="7660515" y="0"/>
+                  </a:lnTo>
+                  <a:lnTo>
+                    <a:pt x="7660515" y="0"/>
+                  </a:lnTo>
+                </a:path>
+              </a:pathLst>
+            </a:custGeom>
+            <a:ln w="13550" cap="flat">
+              <a:solidFill>
+                <a:srgbClr val="EBEBEB">
+                  <a:alpha val="100000"/>
+                </a:srgbClr>
+              </a:solidFill>
+              <a:prstDash val="solid"/>
+              <a:round/>
+            </a:ln>
+          </p:spPr>
+          <p:txBody>
+            <a:bodyPr/>
+            <a:lstStyle/>
+            <a:p/>
+          </p:txBody>
+        </p:sp>
+        <p:sp>
+          <p:nvSpPr>
+            <p:cNvPr id="58" name="pl58"/>
+            <p:cNvSpPr/>
+            <p:nvPr/>
+          </p:nvSpPr>
+          <p:spPr>
+            <a:xfrm>
+              <a:off x="887106" y="5294352"/>
+              <a:ext cx="7660515" cy="0"/>
+            </a:xfrm>
+            <a:custGeom>
+              <a:avLst/>
+              <a:pathLst>
+                <a:path w="7660515" h="0">
+                  <a:moveTo>
+                    <a:pt x="0" y="0"/>
+                  </a:moveTo>
+                  <a:lnTo>
+                    <a:pt x="7660515" y="0"/>
+                  </a:lnTo>
+                  <a:lnTo>
+                    <a:pt x="7660515" y="0"/>
+                  </a:lnTo>
+                </a:path>
+              </a:pathLst>
+            </a:custGeom>
+            <a:ln w="13550" cap="flat">
+              <a:solidFill>
+                <a:srgbClr val="EBEBEB">
+                  <a:alpha val="100000"/>
+                </a:srgbClr>
+              </a:solidFill>
+              <a:prstDash val="solid"/>
+              <a:round/>
+            </a:ln>
+          </p:spPr>
+          <p:txBody>
+            <a:bodyPr/>
+            <a:lstStyle/>
+            <a:p/>
+          </p:txBody>
+        </p:sp>
+        <p:sp>
+          <p:nvSpPr>
+            <p:cNvPr id="59" name="pl59"/>
+            <p:cNvSpPr/>
+            <p:nvPr/>
+          </p:nvSpPr>
+          <p:spPr>
+            <a:xfrm>
+              <a:off x="887106" y="4995019"/>
+              <a:ext cx="7660515" cy="0"/>
+            </a:xfrm>
+            <a:custGeom>
+              <a:avLst/>
+              <a:pathLst>
+                <a:path w="7660515" h="0">
+                  <a:moveTo>
+                    <a:pt x="0" y="0"/>
+                  </a:moveTo>
+                  <a:lnTo>
+                    <a:pt x="7660515" y="0"/>
+                  </a:lnTo>
+                  <a:lnTo>
+                    <a:pt x="7660515" y="0"/>
+                  </a:lnTo>
+                </a:path>
+              </a:pathLst>
+            </a:custGeom>
+            <a:ln w="13550" cap="flat">
+              <a:solidFill>
+                <a:srgbClr val="EBEBEB">
+                  <a:alpha val="100000"/>
+                </a:srgbClr>
+              </a:solidFill>
+              <a:prstDash val="solid"/>
+              <a:round/>
+            </a:ln>
+          </p:spPr>
+          <p:txBody>
+            <a:bodyPr/>
+            <a:lstStyle/>
+            <a:p/>
+          </p:txBody>
+        </p:sp>
+        <p:sp>
+          <p:nvSpPr>
+            <p:cNvPr id="60" name="pl60"/>
+            <p:cNvSpPr/>
+            <p:nvPr/>
+          </p:nvSpPr>
+          <p:spPr>
+            <a:xfrm>
+              <a:off x="887106" y="4695685"/>
+              <a:ext cx="7660515" cy="0"/>
+            </a:xfrm>
+            <a:custGeom>
+              <a:avLst/>
+              <a:pathLst>
+                <a:path w="7660515" h="0">
+                  <a:moveTo>
+                    <a:pt x="0" y="0"/>
+                  </a:moveTo>
+                  <a:lnTo>
+                    <a:pt x="7660515" y="0"/>
+                  </a:lnTo>
+                  <a:lnTo>
+                    <a:pt x="7660515" y="0"/>
+                  </a:lnTo>
+                </a:path>
+              </a:pathLst>
+            </a:custGeom>
+            <a:ln w="13550" cap="flat">
+              <a:solidFill>
+                <a:srgbClr val="EBEBEB">
+                  <a:alpha val="100000"/>
+                </a:srgbClr>
+              </a:solidFill>
+              <a:prstDash val="solid"/>
+              <a:round/>
+            </a:ln>
+          </p:spPr>
+          <p:txBody>
+            <a:bodyPr/>
+            <a:lstStyle/>
+            <a:p/>
+          </p:txBody>
+        </p:sp>
+        <p:sp>
+          <p:nvSpPr>
+            <p:cNvPr id="61" name="pl61"/>
+            <p:cNvSpPr/>
+            <p:nvPr/>
+          </p:nvSpPr>
+          <p:spPr>
+            <a:xfrm>
+              <a:off x="887106" y="4396351"/>
+              <a:ext cx="7660515" cy="0"/>
+            </a:xfrm>
+            <a:custGeom>
+              <a:avLst/>
+              <a:pathLst>
+                <a:path w="7660515" h="0">
+                  <a:moveTo>
+                    <a:pt x="0" y="0"/>
+                  </a:moveTo>
+                  <a:lnTo>
+                    <a:pt x="7660515" y="0"/>
+                  </a:lnTo>
+                  <a:lnTo>
+                    <a:pt x="7660515" y="0"/>
+                  </a:lnTo>
+                </a:path>
+              </a:pathLst>
+            </a:custGeom>
+            <a:ln w="13550" cap="flat">
+              <a:solidFill>
+                <a:srgbClr val="EBEBEB">
+                  <a:alpha val="100000"/>
+                </a:srgbClr>
+              </a:solidFill>
+              <a:prstDash val="solid"/>
+              <a:round/>
+            </a:ln>
+          </p:spPr>
+          <p:txBody>
+            <a:bodyPr/>
+            <a:lstStyle/>
+            <a:p/>
+          </p:txBody>
+        </p:sp>
+        <p:sp>
+          <p:nvSpPr>
+            <p:cNvPr id="62" name="pl62"/>
+            <p:cNvSpPr/>
+            <p:nvPr/>
+          </p:nvSpPr>
+          <p:spPr>
+            <a:xfrm>
+              <a:off x="1405017" y="4336484"/>
+              <a:ext cx="0" cy="1317069"/>
+            </a:xfrm>
+            <a:custGeom>
+              <a:avLst/>
+              <a:pathLst>
+                <a:path w="0" h="1317069">
+                  <a:moveTo>
+                    <a:pt x="0" y="1317069"/>
+                  </a:moveTo>
+                  <a:lnTo>
+                    <a:pt x="0" y="0"/>
+                  </a:lnTo>
+                  <a:lnTo>
+                    <a:pt x="0" y="0"/>
+                  </a:lnTo>
+                </a:path>
+              </a:pathLst>
+            </a:custGeom>
+            <a:ln w="13550" cap="flat">
+              <a:solidFill>
+                <a:srgbClr val="EBEBEB">
+                  <a:alpha val="100000"/>
+                </a:srgbClr>
+              </a:solidFill>
+              <a:prstDash val="solid"/>
+              <a:round/>
+            </a:ln>
+          </p:spPr>
+          <p:txBody>
+            <a:bodyPr/>
+            <a:lstStyle/>
+            <a:p/>
+          </p:txBody>
+        </p:sp>
+        <p:sp>
+          <p:nvSpPr>
+            <p:cNvPr id="63" name="pl63"/>
+            <p:cNvSpPr/>
+            <p:nvPr/>
+          </p:nvSpPr>
+          <p:spPr>
+            <a:xfrm>
+              <a:off x="2260043" y="4336484"/>
+              <a:ext cx="0" cy="1317069"/>
+            </a:xfrm>
+            <a:custGeom>
+              <a:avLst/>
+              <a:pathLst>
+                <a:path w="0" h="1317069">
+                  <a:moveTo>
+                    <a:pt x="0" y="1317069"/>
+                  </a:moveTo>
+                  <a:lnTo>
+                    <a:pt x="0" y="0"/>
+                  </a:lnTo>
+                  <a:lnTo>
+                    <a:pt x="0" y="0"/>
+                  </a:lnTo>
+                </a:path>
+              </a:pathLst>
+            </a:custGeom>
+            <a:ln w="13550" cap="flat">
+              <a:solidFill>
+                <a:srgbClr val="EBEBEB">
+                  <a:alpha val="100000"/>
+                </a:srgbClr>
+              </a:solidFill>
+              <a:prstDash val="solid"/>
+              <a:round/>
+            </a:ln>
+          </p:spPr>
+          <p:txBody>
+            <a:bodyPr/>
+            <a:lstStyle/>
+            <a:p/>
+          </p:txBody>
+        </p:sp>
+        <p:sp>
+          <p:nvSpPr>
+            <p:cNvPr id="64" name="pl64"/>
+            <p:cNvSpPr/>
+            <p:nvPr/>
+          </p:nvSpPr>
+          <p:spPr>
+            <a:xfrm>
+              <a:off x="3115069" y="4336484"/>
+              <a:ext cx="0" cy="1317069"/>
+            </a:xfrm>
+            <a:custGeom>
+              <a:avLst/>
+              <a:pathLst>
+                <a:path w="0" h="1317069">
+                  <a:moveTo>
+                    <a:pt x="0" y="1317069"/>
+                  </a:moveTo>
+                  <a:lnTo>
+                    <a:pt x="0" y="0"/>
+                  </a:lnTo>
+                  <a:lnTo>
+                    <a:pt x="0" y="0"/>
+                  </a:lnTo>
+                </a:path>
+              </a:pathLst>
+            </a:custGeom>
+            <a:ln w="13550" cap="flat">
+              <a:solidFill>
+                <a:srgbClr val="EBEBEB">
+                  <a:alpha val="100000"/>
+                </a:srgbClr>
+              </a:solidFill>
+              <a:prstDash val="solid"/>
+              <a:round/>
+            </a:ln>
+          </p:spPr>
+          <p:txBody>
+            <a:bodyPr/>
+            <a:lstStyle/>
+            <a:p/>
+          </p:txBody>
+        </p:sp>
+        <p:sp>
+          <p:nvSpPr>
+            <p:cNvPr id="65" name="pl65"/>
+            <p:cNvSpPr/>
+            <p:nvPr/>
+          </p:nvSpPr>
+          <p:spPr>
+            <a:xfrm>
+              <a:off x="3970095" y="4336484"/>
+              <a:ext cx="0" cy="1317069"/>
+            </a:xfrm>
+            <a:custGeom>
+              <a:avLst/>
+              <a:pathLst>
+                <a:path w="0" h="1317069">
+                  <a:moveTo>
+                    <a:pt x="0" y="1317069"/>
+                  </a:moveTo>
+                  <a:lnTo>
+                    <a:pt x="0" y="0"/>
+                  </a:lnTo>
+                  <a:lnTo>
+                    <a:pt x="0" y="0"/>
+                  </a:lnTo>
+                </a:path>
+              </a:pathLst>
+            </a:custGeom>
+            <a:ln w="13550" cap="flat">
+              <a:solidFill>
+                <a:srgbClr val="EBEBEB">
+                  <a:alpha val="100000"/>
+                </a:srgbClr>
+              </a:solidFill>
+              <a:prstDash val="solid"/>
+              <a:round/>
+            </a:ln>
+          </p:spPr>
+          <p:txBody>
+            <a:bodyPr/>
+            <a:lstStyle/>
+            <a:p/>
+          </p:txBody>
+        </p:sp>
+        <p:sp>
+          <p:nvSpPr>
+            <p:cNvPr id="66" name="pl66"/>
+            <p:cNvSpPr/>
+            <p:nvPr/>
+          </p:nvSpPr>
+          <p:spPr>
+            <a:xfrm>
+              <a:off x="4825121" y="4336484"/>
+              <a:ext cx="0" cy="1317069"/>
+            </a:xfrm>
+            <a:custGeom>
+              <a:avLst/>
+              <a:pathLst>
+                <a:path w="0" h="1317069">
+                  <a:moveTo>
+                    <a:pt x="0" y="1317069"/>
+                  </a:moveTo>
+                  <a:lnTo>
+                    <a:pt x="0" y="0"/>
+                  </a:lnTo>
+                  <a:lnTo>
+                    <a:pt x="0" y="0"/>
+                  </a:lnTo>
+                </a:path>
+              </a:pathLst>
+            </a:custGeom>
+            <a:ln w="13550" cap="flat">
+              <a:solidFill>
+                <a:srgbClr val="EBEBEB">
+                  <a:alpha val="100000"/>
+                </a:srgbClr>
+              </a:solidFill>
+              <a:prstDash val="solid"/>
+              <a:round/>
+            </a:ln>
+          </p:spPr>
+          <p:txBody>
+            <a:bodyPr/>
+            <a:lstStyle/>
+            <a:p/>
+          </p:txBody>
+        </p:sp>
+        <p:sp>
+          <p:nvSpPr>
+            <p:cNvPr id="67" name="pl67"/>
+            <p:cNvSpPr/>
+            <p:nvPr/>
+          </p:nvSpPr>
+          <p:spPr>
+            <a:xfrm>
+              <a:off x="5680147" y="4336484"/>
+              <a:ext cx="0" cy="1317069"/>
+            </a:xfrm>
+            <a:custGeom>
+              <a:avLst/>
+              <a:pathLst>
+                <a:path w="0" h="1317069">
+                  <a:moveTo>
+                    <a:pt x="0" y="1317069"/>
+                  </a:moveTo>
+                  <a:lnTo>
+                    <a:pt x="0" y="0"/>
+                  </a:lnTo>
+                  <a:lnTo>
+                    <a:pt x="0" y="0"/>
+                  </a:lnTo>
+                </a:path>
+              </a:pathLst>
+            </a:custGeom>
+            <a:ln w="13550" cap="flat">
+              <a:solidFill>
+                <a:srgbClr val="EBEBEB">
+                  <a:alpha val="100000"/>
+                </a:srgbClr>
+              </a:solidFill>
+              <a:prstDash val="solid"/>
+              <a:round/>
+            </a:ln>
+          </p:spPr>
+          <p:txBody>
+            <a:bodyPr/>
+            <a:lstStyle/>
+            <a:p/>
+          </p:txBody>
+        </p:sp>
+        <p:sp>
+          <p:nvSpPr>
+            <p:cNvPr id="68" name="pl68"/>
+            <p:cNvSpPr/>
+            <p:nvPr/>
+          </p:nvSpPr>
+          <p:spPr>
+            <a:xfrm>
+              <a:off x="6535173" y="4336484"/>
+              <a:ext cx="0" cy="1317069"/>
+            </a:xfrm>
+            <a:custGeom>
+              <a:avLst/>
+              <a:pathLst>
+                <a:path w="0" h="1317069">
+                  <a:moveTo>
+                    <a:pt x="0" y="1317069"/>
+                  </a:moveTo>
+                  <a:lnTo>
+                    <a:pt x="0" y="0"/>
+                  </a:lnTo>
+                  <a:lnTo>
+                    <a:pt x="0" y="0"/>
+                  </a:lnTo>
+                </a:path>
+              </a:pathLst>
+            </a:custGeom>
+            <a:ln w="13550" cap="flat">
+              <a:solidFill>
+                <a:srgbClr val="EBEBEB">
+                  <a:alpha val="100000"/>
+                </a:srgbClr>
+              </a:solidFill>
+              <a:prstDash val="solid"/>
+              <a:round/>
+            </a:ln>
+          </p:spPr>
+          <p:txBody>
+            <a:bodyPr/>
+            <a:lstStyle/>
+            <a:p/>
+          </p:txBody>
+        </p:sp>
+        <p:sp>
+          <p:nvSpPr>
+            <p:cNvPr id="69" name="pl69"/>
+            <p:cNvSpPr/>
+            <p:nvPr/>
+          </p:nvSpPr>
+          <p:spPr>
+            <a:xfrm>
+              <a:off x="7390199" y="4336484"/>
+              <a:ext cx="0" cy="1317069"/>
+            </a:xfrm>
+            <a:custGeom>
+              <a:avLst/>
+              <a:pathLst>
+                <a:path w="0" h="1317069">
+                  <a:moveTo>
+                    <a:pt x="0" y="1317069"/>
+                  </a:moveTo>
+                  <a:lnTo>
+                    <a:pt x="0" y="0"/>
+                  </a:lnTo>
+                  <a:lnTo>
+                    <a:pt x="0" y="0"/>
+                  </a:lnTo>
+                </a:path>
+              </a:pathLst>
+            </a:custGeom>
+            <a:ln w="13550" cap="flat">
+              <a:solidFill>
+                <a:srgbClr val="EBEBEB">
+                  <a:alpha val="100000"/>
+                </a:srgbClr>
+              </a:solidFill>
+              <a:prstDash val="solid"/>
+              <a:round/>
+            </a:ln>
+          </p:spPr>
+          <p:txBody>
+            <a:bodyPr/>
+            <a:lstStyle/>
+            <a:p/>
+          </p:txBody>
+        </p:sp>
+        <p:sp>
+          <p:nvSpPr>
+            <p:cNvPr id="70" name="pl70"/>
+            <p:cNvSpPr/>
+            <p:nvPr/>
+          </p:nvSpPr>
+          <p:spPr>
+            <a:xfrm>
+              <a:off x="8245225" y="4336484"/>
+              <a:ext cx="0" cy="1317069"/>
+            </a:xfrm>
+            <a:custGeom>
+              <a:avLst/>
+              <a:pathLst>
+                <a:path w="0" h="1317069">
+                  <a:moveTo>
+                    <a:pt x="0" y="1317069"/>
+                  </a:moveTo>
+                  <a:lnTo>
+                    <a:pt x="0" y="0"/>
+                  </a:lnTo>
+                  <a:lnTo>
+                    <a:pt x="0" y="0"/>
+                  </a:lnTo>
+                </a:path>
+              </a:pathLst>
+            </a:custGeom>
+            <a:ln w="13550" cap="flat">
+              <a:solidFill>
+                <a:srgbClr val="EBEBEB">
+                  <a:alpha val="100000"/>
+                </a:srgbClr>
+              </a:solidFill>
+              <a:prstDash val="solid"/>
+              <a:round/>
+            </a:ln>
+          </p:spPr>
+          <p:txBody>
+            <a:bodyPr/>
+            <a:lstStyle/>
+            <a:p/>
+          </p:txBody>
+        </p:sp>
+        <p:sp>
+          <p:nvSpPr>
+            <p:cNvPr id="71" name="pg71"/>
+            <p:cNvSpPr/>
+            <p:nvPr/>
+          </p:nvSpPr>
+          <p:spPr>
+            <a:xfrm>
+              <a:off x="1235312" y="4462688"/>
+              <a:ext cx="6964104" cy="1075801"/>
+            </a:xfrm>
+            <a:custGeom>
+              <a:avLst/>
+              <a:pathLst>
+                <a:path w="6964104" h="1075801">
+                  <a:moveTo>
+                    <a:pt x="0" y="0"/>
+                  </a:moveTo>
+                  <a:lnTo>
+                    <a:pt x="70344" y="33979"/>
+                  </a:lnTo>
+                  <a:lnTo>
+                    <a:pt x="140688" y="66938"/>
+                  </a:lnTo>
+                  <a:lnTo>
+                    <a:pt x="211033" y="98907"/>
+                  </a:lnTo>
+                  <a:lnTo>
+                    <a:pt x="281377" y="129915"/>
+                  </a:lnTo>
+                  <a:lnTo>
+                    <a:pt x="351722" y="159991"/>
+                  </a:lnTo>
+                  <a:lnTo>
+                    <a:pt x="422066" y="189164"/>
+                  </a:lnTo>
+                  <a:lnTo>
+                    <a:pt x="492411" y="217461"/>
+                  </a:lnTo>
+                  <a:lnTo>
+                    <a:pt x="562755" y="244907"/>
+                  </a:lnTo>
+                  <a:lnTo>
+                    <a:pt x="633100" y="271529"/>
+                  </a:lnTo>
+                  <a:lnTo>
+                    <a:pt x="703444" y="297351"/>
+                  </a:lnTo>
+                  <a:lnTo>
+                    <a:pt x="773789" y="322397"/>
+                  </a:lnTo>
+                  <a:lnTo>
+                    <a:pt x="844133" y="346690"/>
+                  </a:lnTo>
+                  <a:lnTo>
+                    <a:pt x="914478" y="370254"/>
+                  </a:lnTo>
+                  <a:lnTo>
+                    <a:pt x="984822" y="393110"/>
+                  </a:lnTo>
+                  <a:lnTo>
+                    <a:pt x="1055167" y="415279"/>
+                  </a:lnTo>
+                  <a:lnTo>
+                    <a:pt x="1125511" y="436782"/>
+                  </a:lnTo>
+                  <a:lnTo>
+                    <a:pt x="1195856" y="457639"/>
+                  </a:lnTo>
+                  <a:lnTo>
+                    <a:pt x="1266200" y="477869"/>
+                  </a:lnTo>
+                  <a:lnTo>
+                    <a:pt x="1336545" y="497492"/>
+                  </a:lnTo>
+                  <a:lnTo>
+                    <a:pt x="1406889" y="516525"/>
+                  </a:lnTo>
+                  <a:lnTo>
+                    <a:pt x="1477234" y="534986"/>
+                  </a:lnTo>
+                  <a:lnTo>
+                    <a:pt x="1547578" y="552893"/>
+                  </a:lnTo>
+                  <a:lnTo>
+                    <a:pt x="1617923" y="570261"/>
+                  </a:lnTo>
+                  <a:lnTo>
+                    <a:pt x="1688267" y="587108"/>
+                  </a:lnTo>
+                  <a:lnTo>
+                    <a:pt x="1758612" y="603449"/>
+                  </a:lnTo>
+                  <a:lnTo>
+                    <a:pt x="1828956" y="619298"/>
+                  </a:lnTo>
+                  <a:lnTo>
+                    <a:pt x="1899301" y="634672"/>
+                  </a:lnTo>
+                  <a:lnTo>
+                    <a:pt x="1969645" y="649584"/>
+                  </a:lnTo>
+                  <a:lnTo>
+                    <a:pt x="2039990" y="664047"/>
+                  </a:lnTo>
+                  <a:lnTo>
+                    <a:pt x="2110334" y="678076"/>
+                  </a:lnTo>
+                  <a:lnTo>
+                    <a:pt x="2180679" y="691684"/>
+                  </a:lnTo>
+                  <a:lnTo>
+                    <a:pt x="2251023" y="704883"/>
+                  </a:lnTo>
+                  <a:lnTo>
+                    <a:pt x="2321368" y="717685"/>
+                  </a:lnTo>
+                  <a:lnTo>
+                    <a:pt x="2391712" y="730102"/>
+                  </a:lnTo>
+                  <a:lnTo>
+                    <a:pt x="2462057" y="742147"/>
+                  </a:lnTo>
+                  <a:lnTo>
+                    <a:pt x="2532401" y="753829"/>
+                  </a:lnTo>
+                  <a:lnTo>
+                    <a:pt x="2602746" y="765161"/>
+                  </a:lnTo>
+                  <a:lnTo>
+                    <a:pt x="2673090" y="776152"/>
+                  </a:lnTo>
+                  <a:lnTo>
+                    <a:pt x="2743435" y="786813"/>
+                  </a:lnTo>
+                  <a:lnTo>
+                    <a:pt x="2813779" y="797154"/>
+                  </a:lnTo>
+                  <a:lnTo>
+                    <a:pt x="2884124" y="807184"/>
+                  </a:lnTo>
+                  <a:lnTo>
+                    <a:pt x="2954468" y="816913"/>
+                  </a:lnTo>
+                  <a:lnTo>
+                    <a:pt x="3024813" y="826349"/>
+                  </a:lnTo>
+                  <a:lnTo>
+                    <a:pt x="3095157" y="831890"/>
+                  </a:lnTo>
+                  <a:lnTo>
+                    <a:pt x="3165502" y="832424"/>
+                  </a:lnTo>
+                  <a:lnTo>
+                    <a:pt x="3235846" y="832956"/>
+                  </a:lnTo>
+                  <a:lnTo>
+                    <a:pt x="3306191" y="833488"/>
+                  </a:lnTo>
+                  <a:lnTo>
+                    <a:pt x="3376535" y="834018"/>
+                  </a:lnTo>
+                  <a:lnTo>
+                    <a:pt x="3446880" y="834548"/>
+                  </a:lnTo>
+                  <a:lnTo>
+                    <a:pt x="3517224" y="835077"/>
+                  </a:lnTo>
+                  <a:lnTo>
+                    <a:pt x="3587569" y="835604"/>
+                  </a:lnTo>
+                  <a:lnTo>
+                    <a:pt x="3657913" y="836131"/>
+                  </a:lnTo>
+                  <a:lnTo>
+                    <a:pt x="3728257" y="836657"/>
+                  </a:lnTo>
+                  <a:lnTo>
+                    <a:pt x="3798602" y="837182"/>
+                  </a:lnTo>
+                  <a:lnTo>
+                    <a:pt x="3868946" y="837706"/>
+                  </a:lnTo>
+                  <a:lnTo>
+                    <a:pt x="3939291" y="838229"/>
+                  </a:lnTo>
+                  <a:lnTo>
+                    <a:pt x="4009635" y="838751"/>
+                  </a:lnTo>
+                  <a:lnTo>
+                    <a:pt x="4079980" y="839273"/>
+                  </a:lnTo>
+                  <a:lnTo>
+                    <a:pt x="4150324" y="839793"/>
+                  </a:lnTo>
+                  <a:lnTo>
+                    <a:pt x="4220669" y="840312"/>
+                  </a:lnTo>
+                  <a:lnTo>
+                    <a:pt x="4291013" y="840831"/>
+                  </a:lnTo>
+                  <a:lnTo>
+                    <a:pt x="4361358" y="841348"/>
+                  </a:lnTo>
+                  <a:lnTo>
+                    <a:pt x="4431702" y="841865"/>
+                  </a:lnTo>
+                  <a:lnTo>
+                    <a:pt x="4502047" y="842380"/>
+                  </a:lnTo>
+                  <a:lnTo>
+                    <a:pt x="4572391" y="842895"/>
+                  </a:lnTo>
+                  <a:lnTo>
+                    <a:pt x="4642736" y="843409"/>
+                  </a:lnTo>
+                  <a:lnTo>
+                    <a:pt x="4713080" y="843922"/>
+                  </a:lnTo>
+                  <a:lnTo>
+                    <a:pt x="4783425" y="844434"/>
+                  </a:lnTo>
+                  <a:lnTo>
+                    <a:pt x="4853769" y="844945"/>
+                  </a:lnTo>
+                  <a:lnTo>
+                    <a:pt x="4924114" y="845455"/>
+                  </a:lnTo>
+                  <a:lnTo>
+                    <a:pt x="4994458" y="845964"/>
+                  </a:lnTo>
+                  <a:lnTo>
+                    <a:pt x="5064803" y="846473"/>
+                  </a:lnTo>
+                  <a:lnTo>
+                    <a:pt x="5135147" y="846980"/>
+                  </a:lnTo>
+                  <a:lnTo>
+                    <a:pt x="5205492" y="847487"/>
+                  </a:lnTo>
+                  <a:lnTo>
+                    <a:pt x="5275836" y="847992"/>
+                  </a:lnTo>
+                  <a:lnTo>
+                    <a:pt x="5346181" y="848497"/>
+                  </a:lnTo>
+                  <a:lnTo>
+                    <a:pt x="5416525" y="849001"/>
+                  </a:lnTo>
+                  <a:lnTo>
+                    <a:pt x="5486870" y="849504"/>
+                  </a:lnTo>
+                  <a:lnTo>
+                    <a:pt x="5557214" y="850006"/>
+                  </a:lnTo>
+                  <a:lnTo>
+                    <a:pt x="5627559" y="850507"/>
+                  </a:lnTo>
+                  <a:lnTo>
+                    <a:pt x="5697903" y="851007"/>
+                  </a:lnTo>
+                  <a:lnTo>
+                    <a:pt x="5768248" y="851506"/>
+                  </a:lnTo>
+                  <a:lnTo>
+                    <a:pt x="5838592" y="852005"/>
+                  </a:lnTo>
+                  <a:lnTo>
+                    <a:pt x="5908937" y="852503"/>
+                  </a:lnTo>
+                  <a:lnTo>
+                    <a:pt x="5979281" y="852999"/>
+                  </a:lnTo>
+                  <a:lnTo>
+                    <a:pt x="6049626" y="853495"/>
+                  </a:lnTo>
+                  <a:lnTo>
+                    <a:pt x="6119970" y="853990"/>
+                  </a:lnTo>
+                  <a:lnTo>
+                    <a:pt x="6190315" y="854484"/>
+                  </a:lnTo>
+                  <a:lnTo>
+                    <a:pt x="6260659" y="854977"/>
+                  </a:lnTo>
+                  <a:lnTo>
+                    <a:pt x="6331004" y="855469"/>
+                  </a:lnTo>
+                  <a:lnTo>
+                    <a:pt x="6401348" y="855961"/>
+                  </a:lnTo>
+                  <a:lnTo>
+                    <a:pt x="6471693" y="856451"/>
+                  </a:lnTo>
+                  <a:lnTo>
+                    <a:pt x="6542037" y="856941"/>
+                  </a:lnTo>
+                  <a:lnTo>
+                    <a:pt x="6612382" y="857430"/>
+                  </a:lnTo>
+                  <a:lnTo>
+                    <a:pt x="6682726" y="857918"/>
+                  </a:lnTo>
+                  <a:lnTo>
+                    <a:pt x="6753071" y="858405"/>
+                  </a:lnTo>
+                  <a:lnTo>
+                    <a:pt x="6823415" y="858891"/>
+                  </a:lnTo>
+                  <a:lnTo>
+                    <a:pt x="6893760" y="859376"/>
+                  </a:lnTo>
+                  <a:lnTo>
+                    <a:pt x="6964104" y="859861"/>
+                  </a:lnTo>
+                  <a:lnTo>
+                    <a:pt x="6964104" y="1075801"/>
+                  </a:lnTo>
+                  <a:lnTo>
+                    <a:pt x="6893760" y="1074092"/>
+                  </a:lnTo>
+                  <a:lnTo>
+                    <a:pt x="6823415" y="1072329"/>
+                  </a:lnTo>
+                  <a:lnTo>
+                    <a:pt x="6753071" y="1070512"/>
+                  </a:lnTo>
+                  <a:lnTo>
+                    <a:pt x="6682726" y="1068638"/>
+                  </a:lnTo>
+                  <a:lnTo>
+                    <a:pt x="6612382" y="1066707"/>
+                  </a:lnTo>
+                  <a:lnTo>
+                    <a:pt x="6542037" y="1064715"/>
+                  </a:lnTo>
+                  <a:lnTo>
+                    <a:pt x="6471693" y="1062662"/>
+                  </a:lnTo>
+                  <a:lnTo>
+                    <a:pt x="6401348" y="1060545"/>
+                  </a:lnTo>
+                  <a:lnTo>
+                    <a:pt x="6331004" y="1058363"/>
+                  </a:lnTo>
+                  <a:lnTo>
+                    <a:pt x="6260659" y="1056113"/>
+                  </a:lnTo>
+                  <a:lnTo>
+                    <a:pt x="6190315" y="1053794"/>
+                  </a:lnTo>
+                  <a:lnTo>
+                    <a:pt x="6119970" y="1051402"/>
+                  </a:lnTo>
+                  <a:lnTo>
+                    <a:pt x="6049626" y="1048937"/>
+                  </a:lnTo>
+                  <a:lnTo>
+                    <a:pt x="5979281" y="1046395"/>
+                  </a:lnTo>
+                  <a:lnTo>
+                    <a:pt x="5908937" y="1043775"/>
+                  </a:lnTo>
+                  <a:lnTo>
+                    <a:pt x="5838592" y="1041073"/>
+                  </a:lnTo>
+                  <a:lnTo>
+                    <a:pt x="5768248" y="1038288"/>
+                  </a:lnTo>
+                  <a:lnTo>
+                    <a:pt x="5697903" y="1035416"/>
+                  </a:lnTo>
+                  <a:lnTo>
+                    <a:pt x="5627559" y="1032455"/>
+                  </a:lnTo>
+                  <a:lnTo>
+                    <a:pt x="5557214" y="1029403"/>
+                  </a:lnTo>
+                  <a:lnTo>
+                    <a:pt x="5486870" y="1026256"/>
+                  </a:lnTo>
+                  <a:lnTo>
+                    <a:pt x="5416525" y="1023012"/>
+                  </a:lnTo>
+                  <a:lnTo>
+                    <a:pt x="5346181" y="1019667"/>
+                  </a:lnTo>
+                  <a:lnTo>
+                    <a:pt x="5275836" y="1016218"/>
+                  </a:lnTo>
+                  <a:lnTo>
+                    <a:pt x="5205492" y="1012663"/>
+                  </a:lnTo>
+                  <a:lnTo>
+                    <a:pt x="5135147" y="1008998"/>
+                  </a:lnTo>
+                  <a:lnTo>
+                    <a:pt x="5064803" y="1005219"/>
+                  </a:lnTo>
+                  <a:lnTo>
+                    <a:pt x="4994458" y="1001323"/>
+                  </a:lnTo>
+                  <a:lnTo>
+                    <a:pt x="4924114" y="997306"/>
+                  </a:lnTo>
+                  <a:lnTo>
+                    <a:pt x="4853769" y="993165"/>
+                  </a:lnTo>
+                  <a:lnTo>
+                    <a:pt x="4783425" y="988896"/>
+                  </a:lnTo>
+                  <a:lnTo>
+                    <a:pt x="4713080" y="984494"/>
+                  </a:lnTo>
+                  <a:lnTo>
+                    <a:pt x="4642736" y="979956"/>
+                  </a:lnTo>
+                  <a:lnTo>
+                    <a:pt x="4572391" y="975278"/>
+                  </a:lnTo>
+                  <a:lnTo>
+                    <a:pt x="4502047" y="970455"/>
+                  </a:lnTo>
+                  <a:lnTo>
+                    <a:pt x="4431702" y="965482"/>
+                  </a:lnTo>
+                  <a:lnTo>
+                    <a:pt x="4361358" y="960355"/>
+                  </a:lnTo>
+                  <a:lnTo>
+                    <a:pt x="4291013" y="955069"/>
+                  </a:lnTo>
+                  <a:lnTo>
+                    <a:pt x="4220669" y="949620"/>
+                  </a:lnTo>
+                  <a:lnTo>
+                    <a:pt x="4150324" y="944002"/>
+                  </a:lnTo>
+                  <a:lnTo>
+                    <a:pt x="4079980" y="938210"/>
+                  </a:lnTo>
+                  <a:lnTo>
+                    <a:pt x="4009635" y="932238"/>
+                  </a:lnTo>
+                  <a:lnTo>
+                    <a:pt x="3939291" y="926082"/>
+                  </a:lnTo>
+                  <a:lnTo>
+                    <a:pt x="3868946" y="919735"/>
+                  </a:lnTo>
+                  <a:lnTo>
+                    <a:pt x="3798602" y="913191"/>
+                  </a:lnTo>
+                  <a:lnTo>
+                    <a:pt x="3728257" y="906444"/>
+                  </a:lnTo>
+                  <a:lnTo>
+                    <a:pt x="3657913" y="899489"/>
+                  </a:lnTo>
+                  <a:lnTo>
+                    <a:pt x="3587569" y="892318"/>
+                  </a:lnTo>
+                  <a:lnTo>
+                    <a:pt x="3517224" y="884925"/>
+                  </a:lnTo>
+                  <a:lnTo>
+                    <a:pt x="3446880" y="877303"/>
+                  </a:lnTo>
+                  <a:lnTo>
+                    <a:pt x="3376535" y="869445"/>
+                  </a:lnTo>
+                  <a:lnTo>
+                    <a:pt x="3306191" y="861343"/>
+                  </a:lnTo>
+                  <a:lnTo>
+                    <a:pt x="3235846" y="852991"/>
+                  </a:lnTo>
+                  <a:lnTo>
+                    <a:pt x="3165502" y="844380"/>
+                  </a:lnTo>
+                  <a:lnTo>
+                    <a:pt x="3095157" y="835502"/>
+                  </a:lnTo>
+                  <a:lnTo>
+                    <a:pt x="3024813" y="831356"/>
+                  </a:lnTo>
+                  <a:lnTo>
+                    <a:pt x="2954468" y="830820"/>
+                  </a:lnTo>
+                  <a:lnTo>
+                    <a:pt x="2884124" y="830284"/>
+                  </a:lnTo>
+                  <a:lnTo>
+                    <a:pt x="2813779" y="829747"/>
+                  </a:lnTo>
+                  <a:lnTo>
+                    <a:pt x="2743435" y="829209"/>
+                  </a:lnTo>
+                  <a:lnTo>
+                    <a:pt x="2673090" y="828669"/>
+                  </a:lnTo>
+                  <a:lnTo>
+                    <a:pt x="2602746" y="828129"/>
+                  </a:lnTo>
+                  <a:lnTo>
+                    <a:pt x="2532401" y="827588"/>
+                  </a:lnTo>
+                  <a:lnTo>
+                    <a:pt x="2462057" y="827046"/>
+                  </a:lnTo>
+                  <a:lnTo>
+                    <a:pt x="2391712" y="826503"/>
+                  </a:lnTo>
+                  <a:lnTo>
+                    <a:pt x="2321368" y="825959"/>
+                  </a:lnTo>
+                  <a:lnTo>
+                    <a:pt x="2251023" y="825414"/>
+                  </a:lnTo>
+                  <a:lnTo>
+                    <a:pt x="2180679" y="824868"/>
+                  </a:lnTo>
+                  <a:lnTo>
+                    <a:pt x="2110334" y="824321"/>
+                  </a:lnTo>
+                  <a:lnTo>
+                    <a:pt x="2039990" y="823773"/>
+                  </a:lnTo>
+                  <a:lnTo>
+                    <a:pt x="1969645" y="823224"/>
+                  </a:lnTo>
+                  <a:lnTo>
+                    <a:pt x="1899301" y="822674"/>
+                  </a:lnTo>
+                  <a:lnTo>
+                    <a:pt x="1828956" y="822124"/>
+                  </a:lnTo>
+                  <a:lnTo>
+                    <a:pt x="1758612" y="821572"/>
+                  </a:lnTo>
+                  <a:lnTo>
+                    <a:pt x="1688267" y="821019"/>
+                  </a:lnTo>
+                  <a:lnTo>
+                    <a:pt x="1617923" y="820465"/>
+                  </a:lnTo>
+                  <a:lnTo>
+                    <a:pt x="1547578" y="819910"/>
+                  </a:lnTo>
+                  <a:lnTo>
+                    <a:pt x="1477234" y="819354"/>
+                  </a:lnTo>
+                  <a:lnTo>
+                    <a:pt x="1406889" y="818798"/>
+                  </a:lnTo>
+                  <a:lnTo>
+                    <a:pt x="1336545" y="818240"/>
+                  </a:lnTo>
+                  <a:lnTo>
+                    <a:pt x="1266200" y="817681"/>
+                  </a:lnTo>
+                  <a:lnTo>
+                    <a:pt x="1195856" y="817121"/>
+                  </a:lnTo>
+                  <a:lnTo>
+                    <a:pt x="1125511" y="816560"/>
+                  </a:lnTo>
+                  <a:lnTo>
+                    <a:pt x="1055167" y="815999"/>
+                  </a:lnTo>
+                  <a:lnTo>
+                    <a:pt x="984822" y="815436"/>
+                  </a:lnTo>
+                  <a:lnTo>
+                    <a:pt x="914478" y="814872"/>
+                  </a:lnTo>
+                  <a:lnTo>
+                    <a:pt x="844133" y="814307"/>
+                  </a:lnTo>
+                  <a:lnTo>
+                    <a:pt x="773789" y="813741"/>
+                  </a:lnTo>
+                  <a:lnTo>
+                    <a:pt x="703444" y="813175"/>
+                  </a:lnTo>
+                  <a:lnTo>
+                    <a:pt x="633100" y="812607"/>
+                  </a:lnTo>
+                  <a:lnTo>
+                    <a:pt x="562755" y="812038"/>
+                  </a:lnTo>
+                  <a:lnTo>
+                    <a:pt x="492411" y="811468"/>
+                  </a:lnTo>
+                  <a:lnTo>
+                    <a:pt x="422066" y="810897"/>
+                  </a:lnTo>
+                  <a:lnTo>
+                    <a:pt x="351722" y="810325"/>
+                  </a:lnTo>
+                  <a:lnTo>
+                    <a:pt x="281377" y="809752"/>
+                  </a:lnTo>
+                  <a:lnTo>
+                    <a:pt x="211033" y="809178"/>
+                  </a:lnTo>
+                  <a:lnTo>
+                    <a:pt x="140688" y="808603"/>
+                  </a:lnTo>
+                  <a:lnTo>
+                    <a:pt x="70344" y="808027"/>
+                  </a:lnTo>
+                  <a:lnTo>
+                    <a:pt x="0" y="807450"/>
+                  </a:lnTo>
+                  <a:close/>
+                </a:path>
+              </a:pathLst>
+            </a:custGeom>
+            <a:solidFill>
+              <a:srgbClr val="FF8C00">
+                <a:alpha val="20000"/>
+              </a:srgbClr>
+            </a:solidFill>
+          </p:spPr>
+          <p:txBody>
+            <a:bodyPr/>
+            <a:lstStyle/>
+            <a:p/>
+          </p:txBody>
+        </p:sp>
+        <p:sp>
+          <p:nvSpPr>
+            <p:cNvPr id="72" name="pl72"/>
+            <p:cNvSpPr/>
+            <p:nvPr/>
+          </p:nvSpPr>
+          <p:spPr>
+            <a:xfrm>
+              <a:off x="1235312" y="4462688"/>
+              <a:ext cx="6964104" cy="859861"/>
+            </a:xfrm>
+            <a:custGeom>
+              <a:avLst/>
+              <a:pathLst>
+                <a:path w="6964104" h="859861">
+                  <a:moveTo>
+                    <a:pt x="0" y="0"/>
+                  </a:moveTo>
+                  <a:lnTo>
+                    <a:pt x="70344" y="33979"/>
+                  </a:lnTo>
+                  <a:lnTo>
+                    <a:pt x="140688" y="66938"/>
+                  </a:lnTo>
+                  <a:lnTo>
+                    <a:pt x="211033" y="98907"/>
+                  </a:lnTo>
+                  <a:lnTo>
+                    <a:pt x="281377" y="129915"/>
+                  </a:lnTo>
+                  <a:lnTo>
+                    <a:pt x="351722" y="159991"/>
+                  </a:lnTo>
+                  <a:lnTo>
+                    <a:pt x="422066" y="189164"/>
+                  </a:lnTo>
+                  <a:lnTo>
+                    <a:pt x="492411" y="217461"/>
+                  </a:lnTo>
+                  <a:lnTo>
+                    <a:pt x="562755" y="244907"/>
+                  </a:lnTo>
+                  <a:lnTo>
+                    <a:pt x="633100" y="271529"/>
+                  </a:lnTo>
+                  <a:lnTo>
+                    <a:pt x="703444" y="297351"/>
+                  </a:lnTo>
+                  <a:lnTo>
+                    <a:pt x="773789" y="322397"/>
+                  </a:lnTo>
+                  <a:lnTo>
+                    <a:pt x="844133" y="346690"/>
+                  </a:lnTo>
+                  <a:lnTo>
+                    <a:pt x="914478" y="370254"/>
+                  </a:lnTo>
+                  <a:lnTo>
+                    <a:pt x="984822" y="393110"/>
+                  </a:lnTo>
+                  <a:lnTo>
+                    <a:pt x="1055167" y="415279"/>
+                  </a:lnTo>
+                  <a:lnTo>
+                    <a:pt x="1125511" y="436782"/>
+                  </a:lnTo>
+                  <a:lnTo>
+                    <a:pt x="1195856" y="457639"/>
+                  </a:lnTo>
+                  <a:lnTo>
+                    <a:pt x="1266200" y="477869"/>
+                  </a:lnTo>
+                  <a:lnTo>
+                    <a:pt x="1336545" y="497492"/>
+                  </a:lnTo>
+                  <a:lnTo>
+                    <a:pt x="1406889" y="516525"/>
+                  </a:lnTo>
+                  <a:lnTo>
+                    <a:pt x="1477234" y="534986"/>
+                  </a:lnTo>
+                  <a:lnTo>
+                    <a:pt x="1547578" y="552893"/>
+                  </a:lnTo>
+                  <a:lnTo>
+                    <a:pt x="1617923" y="570261"/>
+                  </a:lnTo>
+                  <a:lnTo>
+                    <a:pt x="1688267" y="587108"/>
+                  </a:lnTo>
+                  <a:lnTo>
+                    <a:pt x="1758612" y="603449"/>
+                  </a:lnTo>
+                  <a:lnTo>
+                    <a:pt x="1828956" y="619298"/>
+                  </a:lnTo>
+                  <a:lnTo>
+                    <a:pt x="1899301" y="634672"/>
+                  </a:lnTo>
+                  <a:lnTo>
+                    <a:pt x="1969645" y="649584"/>
+                  </a:lnTo>
+                  <a:lnTo>
+                    <a:pt x="2039990" y="664047"/>
+                  </a:lnTo>
+                  <a:lnTo>
+                    <a:pt x="2110334" y="678076"/>
+                  </a:lnTo>
+                  <a:lnTo>
+                    <a:pt x="2180679" y="691684"/>
+                  </a:lnTo>
+                  <a:lnTo>
+                    <a:pt x="2251023" y="704883"/>
+                  </a:lnTo>
+                  <a:lnTo>
+                    <a:pt x="2321368" y="717685"/>
+                  </a:lnTo>
+                  <a:lnTo>
+                    <a:pt x="2391712" y="730102"/>
+                  </a:lnTo>
+                  <a:lnTo>
+                    <a:pt x="2462057" y="742147"/>
+                  </a:lnTo>
+                  <a:lnTo>
+                    <a:pt x="2532401" y="753829"/>
+                  </a:lnTo>
+                  <a:lnTo>
+                    <a:pt x="2602746" y="765161"/>
+                  </a:lnTo>
+                  <a:lnTo>
+                    <a:pt x="2673090" y="776152"/>
+                  </a:lnTo>
+                  <a:lnTo>
+                    <a:pt x="2743435" y="786813"/>
+                  </a:lnTo>
+                  <a:lnTo>
+                    <a:pt x="2813779" y="797154"/>
+                  </a:lnTo>
+                  <a:lnTo>
+                    <a:pt x="2884124" y="807184"/>
+                  </a:lnTo>
+                  <a:lnTo>
+                    <a:pt x="2954468" y="816913"/>
+                  </a:lnTo>
+                  <a:lnTo>
+                    <a:pt x="3024813" y="826349"/>
+                  </a:lnTo>
+                  <a:lnTo>
+                    <a:pt x="3095157" y="831890"/>
+                  </a:lnTo>
+                  <a:lnTo>
+                    <a:pt x="3165502" y="832424"/>
+                  </a:lnTo>
+                  <a:lnTo>
+                    <a:pt x="3235846" y="832956"/>
+                  </a:lnTo>
+                  <a:lnTo>
+                    <a:pt x="3306191" y="833488"/>
+                  </a:lnTo>
+                  <a:lnTo>
+                    <a:pt x="3376535" y="834018"/>
+                  </a:lnTo>
+                  <a:lnTo>
+                    <a:pt x="3446880" y="834548"/>
+                  </a:lnTo>
+                  <a:lnTo>
+                    <a:pt x="3517224" y="835077"/>
+                  </a:lnTo>
+                  <a:lnTo>
+                    <a:pt x="3587569" y="835604"/>
+                  </a:lnTo>
+                  <a:lnTo>
+                    <a:pt x="3657913" y="836131"/>
+                  </a:lnTo>
+                  <a:lnTo>
+                    <a:pt x="3728257" y="836657"/>
+                  </a:lnTo>
+                  <a:lnTo>
+                    <a:pt x="3798602" y="837182"/>
+                  </a:lnTo>
+                  <a:lnTo>
+                    <a:pt x="3868946" y="837706"/>
+                  </a:lnTo>
+                  <a:lnTo>
+                    <a:pt x="3939291" y="838229"/>
+                  </a:lnTo>
+                  <a:lnTo>
+                    <a:pt x="4009635" y="838751"/>
+                  </a:lnTo>
+                  <a:lnTo>
+                    <a:pt x="4079980" y="839273"/>
+                  </a:lnTo>
+                  <a:lnTo>
+                    <a:pt x="4150324" y="839793"/>
+                  </a:lnTo>
+                  <a:lnTo>
+                    <a:pt x="4220669" y="840312"/>
+                  </a:lnTo>
+                  <a:lnTo>
+                    <a:pt x="4291013" y="840831"/>
+                  </a:lnTo>
+                  <a:lnTo>
+                    <a:pt x="4361358" y="841348"/>
+                  </a:lnTo>
+                  <a:lnTo>
+                    <a:pt x="4431702" y="841865"/>
+                  </a:lnTo>
+                  <a:lnTo>
+                    <a:pt x="4502047" y="842380"/>
+                  </a:lnTo>
+                  <a:lnTo>
+                    <a:pt x="4572391" y="842895"/>
+                  </a:lnTo>
+                  <a:lnTo>
+                    <a:pt x="4642736" y="843409"/>
+                  </a:lnTo>
+                  <a:lnTo>
+                    <a:pt x="4713080" y="843922"/>
+                  </a:lnTo>
+                  <a:lnTo>
+                    <a:pt x="4783425" y="844434"/>
+                  </a:lnTo>
+                  <a:lnTo>
+                    <a:pt x="4853769" y="844945"/>
+                  </a:lnTo>
+                  <a:lnTo>
+                    <a:pt x="4924114" y="845455"/>
+                  </a:lnTo>
+                  <a:lnTo>
+                    <a:pt x="4994458" y="845964"/>
+                  </a:lnTo>
+                  <a:lnTo>
+                    <a:pt x="5064803" y="846473"/>
+                  </a:lnTo>
+                  <a:lnTo>
+                    <a:pt x="5135147" y="846980"/>
+                  </a:lnTo>
+                  <a:lnTo>
+                    <a:pt x="5205492" y="847487"/>
+                  </a:lnTo>
+                  <a:lnTo>
+                    <a:pt x="5275836" y="847992"/>
+                  </a:lnTo>
+                  <a:lnTo>
+                    <a:pt x="5346181" y="848497"/>
+                  </a:lnTo>
+                  <a:lnTo>
+                    <a:pt x="5416525" y="849001"/>
+                  </a:lnTo>
+                  <a:lnTo>
+                    <a:pt x="5486870" y="849504"/>
+                  </a:lnTo>
+                  <a:lnTo>
+                    <a:pt x="5557214" y="850006"/>
+                  </a:lnTo>
+                  <a:lnTo>
+                    <a:pt x="5627559" y="850507"/>
+                  </a:lnTo>
+                  <a:lnTo>
+                    <a:pt x="5697903" y="851007"/>
+                  </a:lnTo>
+                  <a:lnTo>
+                    <a:pt x="5768248" y="851506"/>
+                  </a:lnTo>
+                  <a:lnTo>
+                    <a:pt x="5838592" y="852005"/>
+                  </a:lnTo>
+                  <a:lnTo>
+                    <a:pt x="5908937" y="852503"/>
+                  </a:lnTo>
+                  <a:lnTo>
+                    <a:pt x="5979281" y="852999"/>
+                  </a:lnTo>
+                  <a:lnTo>
+                    <a:pt x="6049626" y="853495"/>
+                  </a:lnTo>
+                  <a:lnTo>
+                    <a:pt x="6119970" y="853990"/>
+                  </a:lnTo>
+                  <a:lnTo>
+                    <a:pt x="6190315" y="854484"/>
+                  </a:lnTo>
+                  <a:lnTo>
+                    <a:pt x="6260659" y="854977"/>
+                  </a:lnTo>
+                  <a:lnTo>
+                    <a:pt x="6331004" y="855469"/>
+                  </a:lnTo>
+                  <a:lnTo>
+                    <a:pt x="6401348" y="855961"/>
+                  </a:lnTo>
+                  <a:lnTo>
+                    <a:pt x="6471693" y="856451"/>
+                  </a:lnTo>
+                  <a:lnTo>
+                    <a:pt x="6542037" y="856941"/>
+                  </a:lnTo>
+                  <a:lnTo>
+                    <a:pt x="6612382" y="857430"/>
+                  </a:lnTo>
+                  <a:lnTo>
+                    <a:pt x="6682726" y="857918"/>
+                  </a:lnTo>
+                  <a:lnTo>
+                    <a:pt x="6753071" y="858405"/>
+                  </a:lnTo>
+                  <a:lnTo>
+                    <a:pt x="6823415" y="858891"/>
+                  </a:lnTo>
+                  <a:lnTo>
+                    <a:pt x="6893760" y="859376"/>
+                  </a:lnTo>
+                  <a:lnTo>
+                    <a:pt x="6964104" y="859861"/>
+                  </a:lnTo>
+                </a:path>
+              </a:pathLst>
+            </a:custGeom>
+          </p:spPr>
+          <p:txBody>
+            <a:bodyPr/>
+            <a:lstStyle/>
+            <a:p/>
+          </p:txBody>
+        </p:sp>
+        <p:sp>
+          <p:nvSpPr>
+            <p:cNvPr id="73" name="pl73"/>
+            <p:cNvSpPr/>
+            <p:nvPr/>
+          </p:nvSpPr>
+          <p:spPr>
+            <a:xfrm>
+              <a:off x="1235312" y="5270139"/>
+              <a:ext cx="6964104" cy="268350"/>
+            </a:xfrm>
+            <a:custGeom>
+              <a:avLst/>
+              <a:pathLst>
+                <a:path w="6964104" h="268350">
+                  <a:moveTo>
+                    <a:pt x="6964104" y="268350"/>
+                  </a:moveTo>
+                  <a:lnTo>
+                    <a:pt x="6893760" y="266641"/>
+                  </a:lnTo>
+                  <a:lnTo>
+                    <a:pt x="6823415" y="264878"/>
+                  </a:lnTo>
+                  <a:lnTo>
+                    <a:pt x="6753071" y="263061"/>
+                  </a:lnTo>
+                  <a:lnTo>
+                    <a:pt x="6682726" y="261187"/>
+                  </a:lnTo>
+                  <a:lnTo>
+                    <a:pt x="6612382" y="259256"/>
+                  </a:lnTo>
+                  <a:lnTo>
+                    <a:pt x="6542037" y="257264"/>
+                  </a:lnTo>
+                  <a:lnTo>
+                    <a:pt x="6471693" y="255211"/>
+                  </a:lnTo>
+                  <a:lnTo>
+                    <a:pt x="6401348" y="253095"/>
+                  </a:lnTo>
+                  <a:lnTo>
+                    <a:pt x="6331004" y="250912"/>
+                  </a:lnTo>
+                  <a:lnTo>
+                    <a:pt x="6260659" y="248662"/>
+                  </a:lnTo>
+                  <a:lnTo>
+                    <a:pt x="6190315" y="246343"/>
+                  </a:lnTo>
+                  <a:lnTo>
+                    <a:pt x="6119970" y="243952"/>
+                  </a:lnTo>
+                  <a:lnTo>
+                    <a:pt x="6049626" y="241486"/>
+                  </a:lnTo>
+                  <a:lnTo>
+                    <a:pt x="5979281" y="238944"/>
+                  </a:lnTo>
+                  <a:lnTo>
+                    <a:pt x="5908937" y="236324"/>
+                  </a:lnTo>
+                  <a:lnTo>
+                    <a:pt x="5838592" y="233622"/>
+                  </a:lnTo>
+                  <a:lnTo>
+                    <a:pt x="5768248" y="230837"/>
+                  </a:lnTo>
+                  <a:lnTo>
+                    <a:pt x="5697903" y="227965"/>
+                  </a:lnTo>
+                  <a:lnTo>
+                    <a:pt x="5627559" y="225004"/>
+                  </a:lnTo>
+                  <a:lnTo>
+                    <a:pt x="5557214" y="221952"/>
+                  </a:lnTo>
+                  <a:lnTo>
+                    <a:pt x="5486870" y="218805"/>
+                  </a:lnTo>
+                  <a:lnTo>
+                    <a:pt x="5416525" y="215561"/>
+                  </a:lnTo>
+                  <a:lnTo>
+                    <a:pt x="5346181" y="212216"/>
+                  </a:lnTo>
+                  <a:lnTo>
+                    <a:pt x="5275836" y="208768"/>
+                  </a:lnTo>
+                  <a:lnTo>
+                    <a:pt x="5205492" y="205212"/>
+                  </a:lnTo>
+                  <a:lnTo>
+                    <a:pt x="5135147" y="201547"/>
+                  </a:lnTo>
+                  <a:lnTo>
+                    <a:pt x="5064803" y="197768"/>
+                  </a:lnTo>
+                  <a:lnTo>
+                    <a:pt x="4994458" y="193872"/>
+                  </a:lnTo>
+                  <a:lnTo>
+                    <a:pt x="4924114" y="189855"/>
+                  </a:lnTo>
+                  <a:lnTo>
+                    <a:pt x="4853769" y="185714"/>
+                  </a:lnTo>
+                  <a:lnTo>
+                    <a:pt x="4783425" y="181445"/>
+                  </a:lnTo>
+                  <a:lnTo>
+                    <a:pt x="4713080" y="177043"/>
+                  </a:lnTo>
+                  <a:lnTo>
+                    <a:pt x="4642736" y="172506"/>
+                  </a:lnTo>
+                  <a:lnTo>
+                    <a:pt x="4572391" y="167827"/>
+                  </a:lnTo>
+                  <a:lnTo>
+                    <a:pt x="4502047" y="163004"/>
+                  </a:lnTo>
+                  <a:lnTo>
+                    <a:pt x="4431702" y="158031"/>
+                  </a:lnTo>
+                  <a:lnTo>
+                    <a:pt x="4361358" y="152904"/>
+                  </a:lnTo>
+                  <a:lnTo>
+                    <a:pt x="4291013" y="147619"/>
+                  </a:lnTo>
+                  <a:lnTo>
+                    <a:pt x="4220669" y="142169"/>
+                  </a:lnTo>
+                  <a:lnTo>
+                    <a:pt x="4150324" y="136551"/>
+                  </a:lnTo>
+                  <a:lnTo>
+                    <a:pt x="4079980" y="130759"/>
+                  </a:lnTo>
+                  <a:lnTo>
+                    <a:pt x="4009635" y="124788"/>
+                  </a:lnTo>
+                  <a:lnTo>
+                    <a:pt x="3939291" y="118631"/>
+                  </a:lnTo>
+                  <a:lnTo>
+                    <a:pt x="3868946" y="112284"/>
+                  </a:lnTo>
+                  <a:lnTo>
+                    <a:pt x="3798602" y="105740"/>
+                  </a:lnTo>
+                  <a:lnTo>
+                    <a:pt x="3728257" y="98994"/>
+                  </a:lnTo>
+                  <a:lnTo>
+                    <a:pt x="3657913" y="92038"/>
+                  </a:lnTo>
+                  <a:lnTo>
+                    <a:pt x="3587569" y="84867"/>
+                  </a:lnTo>
+                  <a:lnTo>
+                    <a:pt x="3517224" y="77474"/>
+                  </a:lnTo>
+                  <a:lnTo>
+                    <a:pt x="3446880" y="69852"/>
+                  </a:lnTo>
+                  <a:lnTo>
+                    <a:pt x="3376535" y="61994"/>
+                  </a:lnTo>
+                  <a:lnTo>
+                    <a:pt x="3306191" y="53893"/>
+                  </a:lnTo>
+                  <a:lnTo>
+                    <a:pt x="3235846" y="45540"/>
+                  </a:lnTo>
+                  <a:lnTo>
+                    <a:pt x="3165502" y="36929"/>
+                  </a:lnTo>
+                  <a:lnTo>
+                    <a:pt x="3095157" y="28051"/>
+                  </a:lnTo>
+                  <a:lnTo>
+                    <a:pt x="3024813" y="23905"/>
+                  </a:lnTo>
+                  <a:lnTo>
+                    <a:pt x="2954468" y="23370"/>
+                  </a:lnTo>
+                  <a:lnTo>
+                    <a:pt x="2884124" y="22833"/>
+                  </a:lnTo>
+                  <a:lnTo>
+                    <a:pt x="2813779" y="22296"/>
+                  </a:lnTo>
+                  <a:lnTo>
+                    <a:pt x="2743435" y="21758"/>
+                  </a:lnTo>
+                  <a:lnTo>
+                    <a:pt x="2673090" y="21219"/>
+                  </a:lnTo>
+                  <a:lnTo>
+                    <a:pt x="2602746" y="20678"/>
+                  </a:lnTo>
+                  <a:lnTo>
+                    <a:pt x="2532401" y="20137"/>
+                  </a:lnTo>
+                  <a:lnTo>
+                    <a:pt x="2462057" y="19595"/>
+                  </a:lnTo>
+                  <a:lnTo>
+                    <a:pt x="2391712" y="19052"/>
+                  </a:lnTo>
+                  <a:lnTo>
+                    <a:pt x="2321368" y="18508"/>
+                  </a:lnTo>
+                  <a:lnTo>
+                    <a:pt x="2251023" y="17963"/>
+                  </a:lnTo>
+                  <a:lnTo>
+                    <a:pt x="2180679" y="17417"/>
+                  </a:lnTo>
+                  <a:lnTo>
+                    <a:pt x="2110334" y="16870"/>
+                  </a:lnTo>
+                  <a:lnTo>
+                    <a:pt x="2039990" y="16322"/>
+                  </a:lnTo>
+                  <a:lnTo>
+                    <a:pt x="1969645" y="15773"/>
+                  </a:lnTo>
+                  <a:lnTo>
+                    <a:pt x="1899301" y="15224"/>
+                  </a:lnTo>
+                  <a:lnTo>
+                    <a:pt x="1828956" y="14673"/>
+                  </a:lnTo>
+                  <a:lnTo>
+                    <a:pt x="1758612" y="14121"/>
+                  </a:lnTo>
+                  <a:lnTo>
+                    <a:pt x="1688267" y="13568"/>
+                  </a:lnTo>
+                  <a:lnTo>
+                    <a:pt x="1617923" y="13014"/>
+                  </a:lnTo>
+                  <a:lnTo>
+                    <a:pt x="1547578" y="12459"/>
+                  </a:lnTo>
+                  <a:lnTo>
+                    <a:pt x="1477234" y="11904"/>
+                  </a:lnTo>
+                  <a:lnTo>
+                    <a:pt x="1406889" y="11347"/>
+                  </a:lnTo>
+                  <a:lnTo>
+                    <a:pt x="1336545" y="10789"/>
+                  </a:lnTo>
+                  <a:lnTo>
+                    <a:pt x="1266200" y="10230"/>
+                  </a:lnTo>
+                  <a:lnTo>
+                    <a:pt x="1195856" y="9670"/>
+                  </a:lnTo>
+                  <a:lnTo>
+                    <a:pt x="1125511" y="9110"/>
+                  </a:lnTo>
+                  <a:lnTo>
+                    <a:pt x="1055167" y="8548"/>
+                  </a:lnTo>
+                  <a:lnTo>
+                    <a:pt x="984822" y="7985"/>
+                  </a:lnTo>
+                  <a:lnTo>
+                    <a:pt x="914478" y="7421"/>
+                  </a:lnTo>
+                  <a:lnTo>
+                    <a:pt x="844133" y="6856"/>
+                  </a:lnTo>
+                  <a:lnTo>
+                    <a:pt x="773789" y="6291"/>
+                  </a:lnTo>
+                  <a:lnTo>
+                    <a:pt x="703444" y="5724"/>
+                  </a:lnTo>
+                  <a:lnTo>
+                    <a:pt x="633100" y="5156"/>
+                  </a:lnTo>
+                  <a:lnTo>
+                    <a:pt x="562755" y="4587"/>
+                  </a:lnTo>
+                  <a:lnTo>
+                    <a:pt x="492411" y="4017"/>
+                  </a:lnTo>
+                  <a:lnTo>
+                    <a:pt x="422066" y="3446"/>
+                  </a:lnTo>
+                  <a:lnTo>
+                    <a:pt x="351722" y="2874"/>
+                  </a:lnTo>
+                  <a:lnTo>
+                    <a:pt x="281377" y="2301"/>
+                  </a:lnTo>
+                  <a:lnTo>
+                    <a:pt x="211033" y="1728"/>
+                  </a:lnTo>
+                  <a:lnTo>
+                    <a:pt x="140688" y="1153"/>
+                  </a:lnTo>
+                  <a:lnTo>
+                    <a:pt x="70344" y="577"/>
+                  </a:lnTo>
+                  <a:lnTo>
+                    <a:pt x="0" y="0"/>
+                  </a:lnTo>
+                </a:path>
+              </a:pathLst>
+            </a:custGeom>
+          </p:spPr>
+          <p:txBody>
+            <a:bodyPr/>
+            <a:lstStyle/>
+            <a:p/>
+          </p:txBody>
+        </p:sp>
+        <p:sp>
+          <p:nvSpPr>
+            <p:cNvPr id="74" name="pl74"/>
+            <p:cNvSpPr/>
+            <p:nvPr/>
+          </p:nvSpPr>
+          <p:spPr>
+            <a:xfrm>
+              <a:off x="1235312" y="4988763"/>
+              <a:ext cx="6964104" cy="482587"/>
+            </a:xfrm>
+            <a:custGeom>
+              <a:avLst/>
+              <a:pathLst>
+                <a:path w="6964104" h="482587">
+                  <a:moveTo>
+                    <a:pt x="0" y="0"/>
+                  </a:moveTo>
+                  <a:lnTo>
+                    <a:pt x="70344" y="9687"/>
+                  </a:lnTo>
+                  <a:lnTo>
+                    <a:pt x="140688" y="19220"/>
+                  </a:lnTo>
+                  <a:lnTo>
+                    <a:pt x="211033" y="28600"/>
+                  </a:lnTo>
+                  <a:lnTo>
+                    <a:pt x="281377" y="37830"/>
+                  </a:lnTo>
+                  <a:lnTo>
+                    <a:pt x="351722" y="46912"/>
+                  </a:lnTo>
+                  <a:lnTo>
+                    <a:pt x="422066" y="55849"/>
+                  </a:lnTo>
+                  <a:lnTo>
+                    <a:pt x="492411" y="64643"/>
+                  </a:lnTo>
+                  <a:lnTo>
+                    <a:pt x="562755" y="73295"/>
+                  </a:lnTo>
+                  <a:lnTo>
+                    <a:pt x="633100" y="81809"/>
+                  </a:lnTo>
+                  <a:lnTo>
+                    <a:pt x="703444" y="90187"/>
+                  </a:lnTo>
+                  <a:lnTo>
+                    <a:pt x="773789" y="98431"/>
+                  </a:lnTo>
+                  <a:lnTo>
+                    <a:pt x="844133" y="106542"/>
+                  </a:lnTo>
+                  <a:lnTo>
+                    <a:pt x="914478" y="114524"/>
+                  </a:lnTo>
+                  <a:lnTo>
+                    <a:pt x="984822" y="122378"/>
+                  </a:lnTo>
+                  <a:lnTo>
+                    <a:pt x="1055167" y="130106"/>
+                  </a:lnTo>
+                  <a:lnTo>
+                    <a:pt x="1125511" y="137710"/>
+                  </a:lnTo>
+                  <a:lnTo>
+                    <a:pt x="1195856" y="145192"/>
+                  </a:lnTo>
+                  <a:lnTo>
+                    <a:pt x="1266200" y="152555"/>
+                  </a:lnTo>
+                  <a:lnTo>
+                    <a:pt x="1336545" y="159800"/>
+                  </a:lnTo>
+                  <a:lnTo>
+                    <a:pt x="1406889" y="166929"/>
+                  </a:lnTo>
+                  <a:lnTo>
+                    <a:pt x="1477234" y="173943"/>
+                  </a:lnTo>
+                  <a:lnTo>
+                    <a:pt x="1547578" y="180845"/>
+                  </a:lnTo>
+                  <a:lnTo>
+                    <a:pt x="1617923" y="187637"/>
+                  </a:lnTo>
+                  <a:lnTo>
+                    <a:pt x="1688267" y="194320"/>
+                  </a:lnTo>
+                  <a:lnTo>
+                    <a:pt x="1758612" y="200896"/>
+                  </a:lnTo>
+                  <a:lnTo>
+                    <a:pt x="1828956" y="207366"/>
+                  </a:lnTo>
+                  <a:lnTo>
+                    <a:pt x="1899301" y="213733"/>
+                  </a:lnTo>
+                  <a:lnTo>
+                    <a:pt x="1969645" y="219998"/>
+                  </a:lnTo>
+                  <a:lnTo>
+                    <a:pt x="2039990" y="226163"/>
+                  </a:lnTo>
+                  <a:lnTo>
+                    <a:pt x="2110334" y="232229"/>
+                  </a:lnTo>
+                  <a:lnTo>
+                    <a:pt x="2180679" y="238198"/>
+                  </a:lnTo>
+                  <a:lnTo>
+                    <a:pt x="2251023" y="244071"/>
+                  </a:lnTo>
+                  <a:lnTo>
+                    <a:pt x="2321368" y="249850"/>
+                  </a:lnTo>
+                  <a:lnTo>
+                    <a:pt x="2391712" y="255536"/>
+                  </a:lnTo>
+                  <a:lnTo>
+                    <a:pt x="2462057" y="261132"/>
+                  </a:lnTo>
+                  <a:lnTo>
+                    <a:pt x="2532401" y="266638"/>
+                  </a:lnTo>
+                  <a:lnTo>
+                    <a:pt x="2602746" y="272055"/>
+                  </a:lnTo>
+                  <a:lnTo>
+                    <a:pt x="2673090" y="277386"/>
+                  </a:lnTo>
+                  <a:lnTo>
+                    <a:pt x="2743435" y="282632"/>
+                  </a:lnTo>
+                  <a:lnTo>
+                    <a:pt x="2813779" y="287793"/>
+                  </a:lnTo>
+                  <a:lnTo>
+                    <a:pt x="2884124" y="292872"/>
+                  </a:lnTo>
+                  <a:lnTo>
+                    <a:pt x="2954468" y="297870"/>
+                  </a:lnTo>
+                  <a:lnTo>
+                    <a:pt x="3024813" y="302787"/>
+                  </a:lnTo>
+                  <a:lnTo>
+                    <a:pt x="3095157" y="307626"/>
+                  </a:lnTo>
+                  <a:lnTo>
+                    <a:pt x="3165502" y="312387"/>
+                  </a:lnTo>
+                  <a:lnTo>
+                    <a:pt x="3235846" y="317072"/>
+                  </a:lnTo>
+                  <a:lnTo>
+                    <a:pt x="3306191" y="321682"/>
+                  </a:lnTo>
+                  <a:lnTo>
+                    <a:pt x="3376535" y="326219"/>
+                  </a:lnTo>
+                  <a:lnTo>
+                    <a:pt x="3446880" y="330682"/>
+                  </a:lnTo>
+                  <a:lnTo>
+                    <a:pt x="3517224" y="335074"/>
+                  </a:lnTo>
+                  <a:lnTo>
+                    <a:pt x="3587569" y="339396"/>
+                  </a:lnTo>
+                  <a:lnTo>
+                    <a:pt x="3657913" y="343648"/>
+                  </a:lnTo>
+                  <a:lnTo>
+                    <a:pt x="3728257" y="347833"/>
+                  </a:lnTo>
+                  <a:lnTo>
+                    <a:pt x="3798602" y="351950"/>
+                  </a:lnTo>
+                  <a:lnTo>
+                    <a:pt x="3868946" y="356001"/>
+                  </a:lnTo>
+                  <a:lnTo>
+                    <a:pt x="3939291" y="359988"/>
+                  </a:lnTo>
+                  <a:lnTo>
+                    <a:pt x="4009635" y="363910"/>
+                  </a:lnTo>
+                  <a:lnTo>
+                    <a:pt x="4079980" y="367770"/>
+                  </a:lnTo>
+                  <a:lnTo>
+                    <a:pt x="4150324" y="371568"/>
+                  </a:lnTo>
+                  <a:lnTo>
+                    <a:pt x="4220669" y="375306"/>
+                  </a:lnTo>
+                  <a:lnTo>
+                    <a:pt x="4291013" y="378983"/>
+                  </a:lnTo>
+                  <a:lnTo>
+                    <a:pt x="4361358" y="382601"/>
+                  </a:lnTo>
+                  <a:lnTo>
+                    <a:pt x="4431702" y="386162"/>
+                  </a:lnTo>
+                  <a:lnTo>
+                    <a:pt x="4502047" y="389665"/>
+                  </a:lnTo>
+                  <a:lnTo>
+                    <a:pt x="4572391" y="393113"/>
+                  </a:lnTo>
+                  <a:lnTo>
+                    <a:pt x="4642736" y="396505"/>
+                  </a:lnTo>
+                  <a:lnTo>
+                    <a:pt x="4713080" y="399843"/>
+                  </a:lnTo>
+                  <a:lnTo>
+                    <a:pt x="4783425" y="403127"/>
+                  </a:lnTo>
+                  <a:lnTo>
+                    <a:pt x="4853769" y="406359"/>
+                  </a:lnTo>
+                  <a:lnTo>
+                    <a:pt x="4924114" y="409539"/>
+                  </a:lnTo>
+                  <a:lnTo>
+                    <a:pt x="4994458" y="412668"/>
+                  </a:lnTo>
+                  <a:lnTo>
+                    <a:pt x="5064803" y="415747"/>
+                  </a:lnTo>
+                  <a:lnTo>
+                    <a:pt x="5135147" y="418777"/>
+                  </a:lnTo>
+                  <a:lnTo>
+                    <a:pt x="5205492" y="421758"/>
+                  </a:lnTo>
+                  <a:lnTo>
+                    <a:pt x="5275836" y="424691"/>
+                  </a:lnTo>
+                  <a:lnTo>
+                    <a:pt x="5346181" y="427578"/>
+                  </a:lnTo>
+                  <a:lnTo>
+                    <a:pt x="5416525" y="430418"/>
+                  </a:lnTo>
+                  <a:lnTo>
+                    <a:pt x="5486870" y="433213"/>
+                  </a:lnTo>
+                  <a:lnTo>
+                    <a:pt x="5557214" y="435963"/>
+                  </a:lnTo>
+                  <a:lnTo>
+                    <a:pt x="5627559" y="438669"/>
+                  </a:lnTo>
+                  <a:lnTo>
+                    <a:pt x="5697903" y="441331"/>
+                  </a:lnTo>
+                  <a:lnTo>
+                    <a:pt x="5768248" y="443951"/>
+                  </a:lnTo>
+                  <a:lnTo>
+                    <a:pt x="5838592" y="446529"/>
+                  </a:lnTo>
+                  <a:lnTo>
+                    <a:pt x="5908937" y="449066"/>
+                  </a:lnTo>
+                  <a:lnTo>
+                    <a:pt x="5979281" y="451562"/>
+                  </a:lnTo>
+                  <a:lnTo>
+                    <a:pt x="6049626" y="454018"/>
+                  </a:lnTo>
+                  <a:lnTo>
+                    <a:pt x="6119970" y="456435"/>
+                  </a:lnTo>
+                  <a:lnTo>
+                    <a:pt x="6190315" y="458813"/>
+                  </a:lnTo>
+                  <a:lnTo>
+                    <a:pt x="6260659" y="461153"/>
+                  </a:lnTo>
+                  <a:lnTo>
+                    <a:pt x="6331004" y="463455"/>
+                  </a:lnTo>
+                  <a:lnTo>
+                    <a:pt x="6401348" y="465721"/>
+                  </a:lnTo>
+                  <a:lnTo>
+                    <a:pt x="6471693" y="467950"/>
+                  </a:lnTo>
+                  <a:lnTo>
+                    <a:pt x="6542037" y="470144"/>
+                  </a:lnTo>
+                  <a:lnTo>
+                    <a:pt x="6612382" y="472302"/>
+                  </a:lnTo>
+                  <a:lnTo>
+                    <a:pt x="6682726" y="474426"/>
+                  </a:lnTo>
+                  <a:lnTo>
+                    <a:pt x="6753071" y="476516"/>
+                  </a:lnTo>
+                  <a:lnTo>
+                    <a:pt x="6823415" y="478573"/>
+                  </a:lnTo>
+                  <a:lnTo>
+                    <a:pt x="6893760" y="480596"/>
+                  </a:lnTo>
+                  <a:lnTo>
+                    <a:pt x="6964104" y="482587"/>
+                  </a:lnTo>
+                </a:path>
+              </a:pathLst>
+            </a:custGeom>
+            <a:ln w="27101" cap="flat">
+              <a:solidFill>
+                <a:srgbClr val="FF8C00">
+                  <a:alpha val="100000"/>
+                </a:srgbClr>
+              </a:solidFill>
+              <a:prstDash val="solid"/>
+              <a:round/>
+            </a:ln>
+          </p:spPr>
+          <p:txBody>
+            <a:bodyPr/>
+            <a:lstStyle/>
+            <a:p/>
+          </p:txBody>
+        </p:sp>
+        <p:sp>
+          <p:nvSpPr>
+            <p:cNvPr id="75" name="pl75"/>
+            <p:cNvSpPr/>
+            <p:nvPr/>
+          </p:nvSpPr>
+          <p:spPr>
+            <a:xfrm>
+              <a:off x="887106" y="5294352"/>
+              <a:ext cx="7660515" cy="0"/>
+            </a:xfrm>
+            <a:custGeom>
+              <a:avLst/>
+              <a:pathLst>
+                <a:path w="7660515" h="0">
+                  <a:moveTo>
+                    <a:pt x="0" y="0"/>
+                  </a:moveTo>
+                  <a:lnTo>
+                    <a:pt x="7660515" y="0"/>
+                  </a:lnTo>
+                  <a:lnTo>
+                    <a:pt x="7660515" y="0"/>
+                  </a:lnTo>
+                </a:path>
+              </a:pathLst>
+            </a:custGeom>
+            <a:ln w="13550" cap="flat">
+              <a:solidFill>
+                <a:srgbClr val="7F7F7F">
+                  <a:alpha val="100000"/>
+                </a:srgbClr>
+              </a:solidFill>
+              <a:prstDash val="dash"/>
+              <a:round/>
+            </a:ln>
+          </p:spPr>
+          <p:txBody>
+            <a:bodyPr/>
+            <a:lstStyle/>
+            <a:p/>
+          </p:txBody>
+        </p:sp>
+        <p:sp>
+          <p:nvSpPr>
+            <p:cNvPr id="76" name="pl76"/>
+            <p:cNvSpPr/>
+            <p:nvPr/>
+          </p:nvSpPr>
+          <p:spPr>
+            <a:xfrm>
+              <a:off x="4300713" y="4336484"/>
+              <a:ext cx="0" cy="1317069"/>
+            </a:xfrm>
+            <a:custGeom>
+              <a:avLst/>
+              <a:pathLst>
+                <a:path w="0" h="1317069">
+                  <a:moveTo>
+                    <a:pt x="0" y="1317069"/>
+                  </a:moveTo>
+                  <a:lnTo>
+                    <a:pt x="0" y="0"/>
+                  </a:lnTo>
+                  <a:lnTo>
+                    <a:pt x="0" y="0"/>
+                  </a:lnTo>
+                </a:path>
+              </a:pathLst>
+            </a:custGeom>
+            <a:ln w="13550" cap="flat">
+              <a:solidFill>
+                <a:srgbClr val="666666">
+                  <a:alpha val="100000"/>
+                </a:srgbClr>
+              </a:solidFill>
+              <a:prstDash val="dot"/>
+              <a:round/>
+            </a:ln>
+          </p:spPr>
+          <p:txBody>
+            <a:bodyPr/>
+            <a:lstStyle/>
+            <a:p/>
+          </p:txBody>
+        </p:sp>
+        <p:sp>
+          <p:nvSpPr>
+            <p:cNvPr id="77" name="pl77"/>
+            <p:cNvSpPr/>
+            <p:nvPr/>
+          </p:nvSpPr>
+          <p:spPr>
+            <a:xfrm>
+              <a:off x="3103710" y="4336484"/>
+              <a:ext cx="0" cy="1317069"/>
+            </a:xfrm>
+            <a:custGeom>
+              <a:avLst/>
+              <a:pathLst>
+                <a:path w="0" h="1317069">
+                  <a:moveTo>
+                    <a:pt x="0" y="1317069"/>
+                  </a:moveTo>
+                  <a:lnTo>
+                    <a:pt x="0" y="0"/>
+                  </a:lnTo>
+                  <a:lnTo>
+                    <a:pt x="0" y="0"/>
+                  </a:lnTo>
+                </a:path>
+              </a:pathLst>
+            </a:custGeom>
+            <a:ln w="13550" cap="flat">
+              <a:solidFill>
+                <a:srgbClr val="4682B4">
+                  <a:alpha val="69803"/>
+                </a:srgbClr>
+              </a:solidFill>
+              <a:prstDash val="dash"/>
+              <a:round/>
+            </a:ln>
+          </p:spPr>
+          <p:txBody>
+            <a:bodyPr/>
+            <a:lstStyle/>
+            <a:p/>
+          </p:txBody>
+        </p:sp>
+        <p:sp>
+          <p:nvSpPr>
+            <p:cNvPr id="78" name="pl78"/>
+            <p:cNvSpPr/>
+            <p:nvPr/>
+          </p:nvSpPr>
+          <p:spPr>
+            <a:xfrm>
+              <a:off x="5504283" y="4336484"/>
+              <a:ext cx="0" cy="1317069"/>
+            </a:xfrm>
+            <a:custGeom>
+              <a:avLst/>
+              <a:pathLst>
+                <a:path w="0" h="1317069">
+                  <a:moveTo>
+                    <a:pt x="0" y="1317069"/>
+                  </a:moveTo>
+                  <a:lnTo>
+                    <a:pt x="0" y="0"/>
+                  </a:lnTo>
+                  <a:lnTo>
+                    <a:pt x="0" y="0"/>
+                  </a:lnTo>
+                </a:path>
+              </a:pathLst>
+            </a:custGeom>
+            <a:ln w="13550" cap="flat">
+              <a:solidFill>
+                <a:srgbClr val="4682B4">
+                  <a:alpha val="69803"/>
+                </a:srgbClr>
+              </a:solidFill>
+              <a:prstDash val="dash"/>
+              <a:round/>
+            </a:ln>
+          </p:spPr>
+          <p:txBody>
+            <a:bodyPr/>
+            <a:lstStyle/>
+            <a:p/>
+          </p:txBody>
+        </p:sp>
+        <p:sp>
+          <p:nvSpPr>
+            <p:cNvPr id="79" name="tx79"/>
+            <p:cNvSpPr/>
+            <p:nvPr/>
+          </p:nvSpPr>
+          <p:spPr>
+            <a:xfrm>
+              <a:off x="762297" y="5553636"/>
+              <a:ext cx="62179" cy="80101"/>
+            </a:xfrm>
+            <a:prstGeom prst="rect">
+              <a:avLst/>
+            </a:prstGeom>
+            <a:noFill/>
+          </p:spPr>
+          <p:txBody>
+            <a:bodyPr lIns="0" rIns="0" tIns="0" bIns="0" anchorCtr="1" anchor="ctr" wrap="none"/>
+            <a:lstStyle/>
+            <a:p>
+              <a:pPr algn="l" marL="0" marR="0" indent="0">
+                <a:lnSpc>
+                  <a:spcPts val="880"/>
+                </a:lnSpc>
+                <a:spcBef>
+                  <a:spcPts val="0"/>
+                </a:spcBef>
+                <a:spcAft>
+                  <a:spcPts val="0"/>
+                </a:spcAft>
+              </a:pPr>
+              <a:r>
+                <a:rPr sz="880">
+                  <a:solidFill>
+                    <a:srgbClr val="4D4D4D">
+                      <a:alpha val="100000"/>
+                    </a:srgbClr>
+                  </a:solidFill>
+                  <a:latin typeface="Helvetica"/>
+                  <a:cs typeface="Helvetica"/>
+                </a:rPr>
+                <a:t>0</a:t>
+              </a:r>
+            </a:p>
+          </p:txBody>
+        </p:sp>
+        <p:sp>
+          <p:nvSpPr>
+            <p:cNvPr id="80" name="tx80"/>
+            <p:cNvSpPr/>
+            <p:nvPr/>
+          </p:nvSpPr>
+          <p:spPr>
+            <a:xfrm>
+              <a:off x="762297" y="5254302"/>
+              <a:ext cx="62179" cy="80101"/>
+            </a:xfrm>
+            <a:prstGeom prst="rect">
+              <a:avLst/>
+            </a:prstGeom>
+            <a:noFill/>
+          </p:spPr>
+          <p:txBody>
+            <a:bodyPr lIns="0" rIns="0" tIns="0" bIns="0" anchorCtr="1" anchor="ctr" wrap="none"/>
+            <a:lstStyle/>
+            <a:p>
+              <a:pPr algn="l" marL="0" marR="0" indent="0">
+                <a:lnSpc>
+                  <a:spcPts val="880"/>
+                </a:lnSpc>
+                <a:spcBef>
+                  <a:spcPts val="0"/>
+                </a:spcBef>
+                <a:spcAft>
+                  <a:spcPts val="0"/>
+                </a:spcAft>
+              </a:pPr>
+              <a:r>
+                <a:rPr sz="880">
+                  <a:solidFill>
+                    <a:srgbClr val="4D4D4D">
+                      <a:alpha val="100000"/>
+                    </a:srgbClr>
+                  </a:solidFill>
+                  <a:latin typeface="Helvetica"/>
+                  <a:cs typeface="Helvetica"/>
+                </a:rPr>
+                <a:t>1</a:t>
+              </a:r>
+            </a:p>
+          </p:txBody>
+        </p:sp>
+        <p:sp>
+          <p:nvSpPr>
+            <p:cNvPr id="81" name="tx81"/>
+            <p:cNvSpPr/>
+            <p:nvPr/>
+          </p:nvSpPr>
+          <p:spPr>
+            <a:xfrm>
+              <a:off x="762297" y="4954968"/>
+              <a:ext cx="62179" cy="80101"/>
+            </a:xfrm>
+            <a:prstGeom prst="rect">
+              <a:avLst/>
+            </a:prstGeom>
+            <a:noFill/>
+          </p:spPr>
+          <p:txBody>
+            <a:bodyPr lIns="0" rIns="0" tIns="0" bIns="0" anchorCtr="1" anchor="ctr" wrap="none"/>
+            <a:lstStyle/>
+            <a:p>
+              <a:pPr algn="l" marL="0" marR="0" indent="0">
+                <a:lnSpc>
+                  <a:spcPts val="880"/>
+                </a:lnSpc>
+                <a:spcBef>
+                  <a:spcPts val="0"/>
+                </a:spcBef>
+                <a:spcAft>
+                  <a:spcPts val="0"/>
+                </a:spcAft>
+              </a:pPr>
+              <a:r>
+                <a:rPr sz="880">
+                  <a:solidFill>
+                    <a:srgbClr val="4D4D4D">
+                      <a:alpha val="100000"/>
+                    </a:srgbClr>
+                  </a:solidFill>
+                  <a:latin typeface="Helvetica"/>
+                  <a:cs typeface="Helvetica"/>
+                </a:rPr>
+                <a:t>2</a:t>
+              </a:r>
+            </a:p>
+          </p:txBody>
+        </p:sp>
+        <p:sp>
+          <p:nvSpPr>
+            <p:cNvPr id="82" name="tx82"/>
+            <p:cNvSpPr/>
+            <p:nvPr/>
+          </p:nvSpPr>
+          <p:spPr>
+            <a:xfrm>
+              <a:off x="762297" y="4655634"/>
+              <a:ext cx="62179" cy="80101"/>
+            </a:xfrm>
+            <a:prstGeom prst="rect">
+              <a:avLst/>
+            </a:prstGeom>
+            <a:noFill/>
+          </p:spPr>
+          <p:txBody>
+            <a:bodyPr lIns="0" rIns="0" tIns="0" bIns="0" anchorCtr="1" anchor="ctr" wrap="none"/>
+            <a:lstStyle/>
+            <a:p>
+              <a:pPr algn="l" marL="0" marR="0" indent="0">
+                <a:lnSpc>
+                  <a:spcPts val="880"/>
+                </a:lnSpc>
+                <a:spcBef>
+                  <a:spcPts val="0"/>
+                </a:spcBef>
+                <a:spcAft>
+                  <a:spcPts val="0"/>
+                </a:spcAft>
+              </a:pPr>
+              <a:r>
+                <a:rPr sz="880">
+                  <a:solidFill>
+                    <a:srgbClr val="4D4D4D">
+                      <a:alpha val="100000"/>
+                    </a:srgbClr>
+                  </a:solidFill>
+                  <a:latin typeface="Helvetica"/>
+                  <a:cs typeface="Helvetica"/>
+                </a:rPr>
+                <a:t>3</a:t>
+              </a:r>
+            </a:p>
+          </p:txBody>
+        </p:sp>
+        <p:sp>
+          <p:nvSpPr>
+            <p:cNvPr id="83" name="tx83"/>
+            <p:cNvSpPr/>
+            <p:nvPr/>
+          </p:nvSpPr>
+          <p:spPr>
+            <a:xfrm>
+              <a:off x="762297" y="4356300"/>
+              <a:ext cx="62179" cy="80101"/>
+            </a:xfrm>
+            <a:prstGeom prst="rect">
+              <a:avLst/>
+            </a:prstGeom>
+            <a:noFill/>
+          </p:spPr>
+          <p:txBody>
+            <a:bodyPr lIns="0" rIns="0" tIns="0" bIns="0" anchorCtr="1" anchor="ctr" wrap="none"/>
+            <a:lstStyle/>
+            <a:p>
+              <a:pPr algn="l" marL="0" marR="0" indent="0">
+                <a:lnSpc>
+                  <a:spcPts val="880"/>
+                </a:lnSpc>
+                <a:spcBef>
+                  <a:spcPts val="0"/>
+                </a:spcBef>
+                <a:spcAft>
+                  <a:spcPts val="0"/>
+                </a:spcAft>
+              </a:pPr>
+              <a:r>
+                <a:rPr sz="880">
+                  <a:solidFill>
+                    <a:srgbClr val="4D4D4D">
+                      <a:alpha val="100000"/>
+                    </a:srgbClr>
+                  </a:solidFill>
+                  <a:latin typeface="Helvetica"/>
+                  <a:cs typeface="Helvetica"/>
+                </a:rPr>
+                <a:t>4</a:t>
+              </a:r>
+            </a:p>
+          </p:txBody>
+        </p:sp>
+        <p:sp>
+          <p:nvSpPr>
+            <p:cNvPr id="84" name="tx84"/>
+            <p:cNvSpPr/>
+            <p:nvPr/>
+          </p:nvSpPr>
+          <p:spPr>
+            <a:xfrm>
+              <a:off x="1324230" y="5716183"/>
+              <a:ext cx="161574" cy="80101"/>
+            </a:xfrm>
+            <a:prstGeom prst="rect">
+              <a:avLst/>
+            </a:prstGeom>
+            <a:noFill/>
+          </p:spPr>
+          <p:txBody>
+            <a:bodyPr lIns="0" rIns="0" tIns="0" bIns="0" anchorCtr="1" anchor="ctr" wrap="none"/>
+            <a:lstStyle/>
+            <a:p>
+              <a:pPr algn="l" marL="0" marR="0" indent="0">
+                <a:lnSpc>
+                  <a:spcPts val="880"/>
+                </a:lnSpc>
+                <a:spcBef>
+                  <a:spcPts val="0"/>
+                </a:spcBef>
+                <a:spcAft>
+                  <a:spcPts val="0"/>
+                </a:spcAft>
+              </a:pPr>
+              <a:r>
+                <a:rPr sz="880">
+                  <a:solidFill>
+                    <a:srgbClr val="4D4D4D">
+                      <a:alpha val="100000"/>
+                    </a:srgbClr>
+                  </a:solidFill>
+                  <a:latin typeface="Helvetica"/>
+                  <a:cs typeface="Helvetica"/>
+                </a:rPr>
+                <a:t>-50</a:t>
+              </a:r>
+            </a:p>
+          </p:txBody>
+        </p:sp>
+        <p:sp>
+          <p:nvSpPr>
+            <p:cNvPr id="85" name="tx85"/>
+            <p:cNvSpPr/>
+            <p:nvPr/>
+          </p:nvSpPr>
+          <p:spPr>
+            <a:xfrm>
+              <a:off x="2179256" y="5716183"/>
+              <a:ext cx="161574" cy="80101"/>
+            </a:xfrm>
+            <a:prstGeom prst="rect">
+              <a:avLst/>
+            </a:prstGeom>
+            <a:noFill/>
+          </p:spPr>
+          <p:txBody>
+            <a:bodyPr lIns="0" rIns="0" tIns="0" bIns="0" anchorCtr="1" anchor="ctr" wrap="none"/>
+            <a:lstStyle/>
+            <a:p>
+              <a:pPr algn="l" marL="0" marR="0" indent="0">
+                <a:lnSpc>
+                  <a:spcPts val="880"/>
+                </a:lnSpc>
+                <a:spcBef>
+                  <a:spcPts val="0"/>
+                </a:spcBef>
+                <a:spcAft>
+                  <a:spcPts val="0"/>
+                </a:spcAft>
+              </a:pPr>
+              <a:r>
+                <a:rPr sz="880">
+                  <a:solidFill>
+                    <a:srgbClr val="4D4D4D">
+                      <a:alpha val="100000"/>
+                    </a:srgbClr>
+                  </a:solidFill>
+                  <a:latin typeface="Helvetica"/>
+                  <a:cs typeface="Helvetica"/>
+                </a:rPr>
+                <a:t>-40</a:t>
+              </a:r>
+            </a:p>
+          </p:txBody>
+        </p:sp>
+        <p:sp>
+          <p:nvSpPr>
+            <p:cNvPr id="86" name="tx86"/>
+            <p:cNvSpPr/>
+            <p:nvPr/>
+          </p:nvSpPr>
+          <p:spPr>
+            <a:xfrm>
+              <a:off x="3034282" y="5716183"/>
+              <a:ext cx="161574" cy="80101"/>
+            </a:xfrm>
+            <a:prstGeom prst="rect">
+              <a:avLst/>
+            </a:prstGeom>
+            <a:noFill/>
+          </p:spPr>
+          <p:txBody>
+            <a:bodyPr lIns="0" rIns="0" tIns="0" bIns="0" anchorCtr="1" anchor="ctr" wrap="none"/>
+            <a:lstStyle/>
+            <a:p>
+              <a:pPr algn="l" marL="0" marR="0" indent="0">
+                <a:lnSpc>
+                  <a:spcPts val="880"/>
+                </a:lnSpc>
+                <a:spcBef>
+                  <a:spcPts val="0"/>
+                </a:spcBef>
+                <a:spcAft>
+                  <a:spcPts val="0"/>
+                </a:spcAft>
+              </a:pPr>
+              <a:r>
+                <a:rPr sz="880">
+                  <a:solidFill>
+                    <a:srgbClr val="4D4D4D">
+                      <a:alpha val="100000"/>
+                    </a:srgbClr>
+                  </a:solidFill>
+                  <a:latin typeface="Helvetica"/>
+                  <a:cs typeface="Helvetica"/>
+                </a:rPr>
+                <a:t>-30</a:t>
+              </a:r>
+            </a:p>
+          </p:txBody>
+        </p:sp>
+        <p:sp>
+          <p:nvSpPr>
+            <p:cNvPr id="87" name="tx87"/>
+            <p:cNvSpPr/>
+            <p:nvPr/>
+          </p:nvSpPr>
+          <p:spPr>
+            <a:xfrm>
+              <a:off x="3889308" y="5716183"/>
+              <a:ext cx="161574" cy="80101"/>
+            </a:xfrm>
+            <a:prstGeom prst="rect">
+              <a:avLst/>
+            </a:prstGeom>
+            <a:noFill/>
+          </p:spPr>
+          <p:txBody>
+            <a:bodyPr lIns="0" rIns="0" tIns="0" bIns="0" anchorCtr="1" anchor="ctr" wrap="none"/>
+            <a:lstStyle/>
+            <a:p>
+              <a:pPr algn="l" marL="0" marR="0" indent="0">
+                <a:lnSpc>
+                  <a:spcPts val="880"/>
+                </a:lnSpc>
+                <a:spcBef>
+                  <a:spcPts val="0"/>
+                </a:spcBef>
+                <a:spcAft>
+                  <a:spcPts val="0"/>
+                </a:spcAft>
+              </a:pPr>
+              <a:r>
+                <a:rPr sz="880">
+                  <a:solidFill>
+                    <a:srgbClr val="4D4D4D">
+                      <a:alpha val="100000"/>
+                    </a:srgbClr>
+                  </a:solidFill>
+                  <a:latin typeface="Helvetica"/>
+                  <a:cs typeface="Helvetica"/>
+                </a:rPr>
+                <a:t>-20</a:t>
+              </a:r>
+            </a:p>
+          </p:txBody>
+        </p:sp>
+        <p:sp>
+          <p:nvSpPr>
+            <p:cNvPr id="88" name="tx88"/>
+            <p:cNvSpPr/>
+            <p:nvPr/>
+          </p:nvSpPr>
+          <p:spPr>
+            <a:xfrm>
+              <a:off x="4744334" y="5716183"/>
+              <a:ext cx="161574" cy="80101"/>
+            </a:xfrm>
+            <a:prstGeom prst="rect">
+              <a:avLst/>
+            </a:prstGeom>
+            <a:noFill/>
+          </p:spPr>
+          <p:txBody>
+            <a:bodyPr lIns="0" rIns="0" tIns="0" bIns="0" anchorCtr="1" anchor="ctr" wrap="none"/>
+            <a:lstStyle/>
+            <a:p>
+              <a:pPr algn="l" marL="0" marR="0" indent="0">
+                <a:lnSpc>
+                  <a:spcPts val="880"/>
+                </a:lnSpc>
+                <a:spcBef>
+                  <a:spcPts val="0"/>
+                </a:spcBef>
+                <a:spcAft>
+                  <a:spcPts val="0"/>
+                </a:spcAft>
+              </a:pPr>
+              <a:r>
+                <a:rPr sz="880">
+                  <a:solidFill>
+                    <a:srgbClr val="4D4D4D">
+                      <a:alpha val="100000"/>
+                    </a:srgbClr>
+                  </a:solidFill>
+                  <a:latin typeface="Helvetica"/>
+                  <a:cs typeface="Helvetica"/>
+                </a:rPr>
+                <a:t>-10</a:t>
+              </a:r>
+            </a:p>
+          </p:txBody>
+        </p:sp>
+        <p:sp>
+          <p:nvSpPr>
+            <p:cNvPr id="89" name="tx89"/>
+            <p:cNvSpPr/>
+            <p:nvPr/>
+          </p:nvSpPr>
+          <p:spPr>
+            <a:xfrm>
+              <a:off x="5649057" y="5716183"/>
+              <a:ext cx="62179" cy="80101"/>
+            </a:xfrm>
+            <a:prstGeom prst="rect">
+              <a:avLst/>
+            </a:prstGeom>
+            <a:noFill/>
+          </p:spPr>
+          <p:txBody>
+            <a:bodyPr lIns="0" rIns="0" tIns="0" bIns="0" anchorCtr="1" anchor="ctr" wrap="none"/>
+            <a:lstStyle/>
+            <a:p>
+              <a:pPr algn="l" marL="0" marR="0" indent="0">
+                <a:lnSpc>
+                  <a:spcPts val="880"/>
+                </a:lnSpc>
+                <a:spcBef>
+                  <a:spcPts val="0"/>
+                </a:spcBef>
+                <a:spcAft>
+                  <a:spcPts val="0"/>
+                </a:spcAft>
+              </a:pPr>
+              <a:r>
+                <a:rPr sz="880">
+                  <a:solidFill>
+                    <a:srgbClr val="4D4D4D">
+                      <a:alpha val="100000"/>
+                    </a:srgbClr>
+                  </a:solidFill>
+                  <a:latin typeface="Helvetica"/>
+                  <a:cs typeface="Helvetica"/>
+                </a:rPr>
+                <a:t>0</a:t>
+              </a:r>
+            </a:p>
+          </p:txBody>
+        </p:sp>
+        <p:sp>
+          <p:nvSpPr>
+            <p:cNvPr id="90" name="tx90"/>
+            <p:cNvSpPr/>
+            <p:nvPr/>
+          </p:nvSpPr>
+          <p:spPr>
+            <a:xfrm>
+              <a:off x="6472994" y="5716183"/>
+              <a:ext cx="124358" cy="80101"/>
+            </a:xfrm>
+            <a:prstGeom prst="rect">
+              <a:avLst/>
+            </a:prstGeom>
+            <a:noFill/>
+          </p:spPr>
+          <p:txBody>
+            <a:bodyPr lIns="0" rIns="0" tIns="0" bIns="0" anchorCtr="1" anchor="ctr" wrap="none"/>
+            <a:lstStyle/>
+            <a:p>
+              <a:pPr algn="l" marL="0" marR="0" indent="0">
+                <a:lnSpc>
+                  <a:spcPts val="880"/>
+                </a:lnSpc>
+                <a:spcBef>
+                  <a:spcPts val="0"/>
+                </a:spcBef>
+                <a:spcAft>
+                  <a:spcPts val="0"/>
+                </a:spcAft>
+              </a:pPr>
+              <a:r>
+                <a:rPr sz="880">
+                  <a:solidFill>
+                    <a:srgbClr val="4D4D4D">
+                      <a:alpha val="100000"/>
+                    </a:srgbClr>
+                  </a:solidFill>
+                  <a:latin typeface="Helvetica"/>
+                  <a:cs typeface="Helvetica"/>
+                </a:rPr>
+                <a:t>10</a:t>
+              </a:r>
+            </a:p>
+          </p:txBody>
+        </p:sp>
+        <p:sp>
+          <p:nvSpPr>
+            <p:cNvPr id="91" name="tx91"/>
+            <p:cNvSpPr/>
+            <p:nvPr/>
+          </p:nvSpPr>
+          <p:spPr>
+            <a:xfrm>
+              <a:off x="7328020" y="5716183"/>
+              <a:ext cx="124358" cy="80101"/>
+            </a:xfrm>
+            <a:prstGeom prst="rect">
+              <a:avLst/>
+            </a:prstGeom>
+            <a:noFill/>
+          </p:spPr>
+          <p:txBody>
+            <a:bodyPr lIns="0" rIns="0" tIns="0" bIns="0" anchorCtr="1" anchor="ctr" wrap="none"/>
+            <a:lstStyle/>
+            <a:p>
+              <a:pPr algn="l" marL="0" marR="0" indent="0">
+                <a:lnSpc>
+                  <a:spcPts val="880"/>
+                </a:lnSpc>
+                <a:spcBef>
+                  <a:spcPts val="0"/>
+                </a:spcBef>
+                <a:spcAft>
+                  <a:spcPts val="0"/>
+                </a:spcAft>
+              </a:pPr>
+              <a:r>
+                <a:rPr sz="880">
+                  <a:solidFill>
+                    <a:srgbClr val="4D4D4D">
+                      <a:alpha val="100000"/>
+                    </a:srgbClr>
+                  </a:solidFill>
+                  <a:latin typeface="Helvetica"/>
+                  <a:cs typeface="Helvetica"/>
+                </a:rPr>
+                <a:t>20</a:t>
+              </a:r>
+            </a:p>
+          </p:txBody>
+        </p:sp>
+        <p:sp>
+          <p:nvSpPr>
+            <p:cNvPr id="92" name="tx92"/>
+            <p:cNvSpPr/>
+            <p:nvPr/>
+          </p:nvSpPr>
+          <p:spPr>
+            <a:xfrm>
+              <a:off x="8183046" y="5716183"/>
+              <a:ext cx="124358" cy="80101"/>
+            </a:xfrm>
+            <a:prstGeom prst="rect">
+              <a:avLst/>
+            </a:prstGeom>
+            <a:noFill/>
+          </p:spPr>
+          <p:txBody>
+            <a:bodyPr lIns="0" rIns="0" tIns="0" bIns="0" anchorCtr="1" anchor="ctr" wrap="none"/>
+            <a:lstStyle/>
+            <a:p>
+              <a:pPr algn="l" marL="0" marR="0" indent="0">
+                <a:lnSpc>
+                  <a:spcPts val="880"/>
+                </a:lnSpc>
+                <a:spcBef>
+                  <a:spcPts val="0"/>
+                </a:spcBef>
+                <a:spcAft>
+                  <a:spcPts val="0"/>
+                </a:spcAft>
+              </a:pPr>
+              <a:r>
+                <a:rPr sz="880">
+                  <a:solidFill>
+                    <a:srgbClr val="4D4D4D">
+                      <a:alpha val="100000"/>
+                    </a:srgbClr>
+                  </a:solidFill>
+                  <a:latin typeface="Helvetica"/>
+                  <a:cs typeface="Helvetica"/>
+                </a:rPr>
+                <a:t>30</a:t>
+              </a:r>
+            </a:p>
+          </p:txBody>
+        </p:sp>
+        <p:sp>
+          <p:nvSpPr>
+            <p:cNvPr id="93" name="tx93"/>
+            <p:cNvSpPr/>
+            <p:nvPr/>
+          </p:nvSpPr>
+          <p:spPr>
+            <a:xfrm>
+              <a:off x="1561815" y="5855859"/>
+              <a:ext cx="6311097" cy="100218"/>
+            </a:xfrm>
+            <a:prstGeom prst="rect">
+              <a:avLst/>
+            </a:prstGeom>
+            <a:noFill/>
+          </p:spPr>
+          <p:txBody>
+            <a:bodyPr lIns="0" rIns="0" tIns="0" bIns="0" anchorCtr="1" anchor="ctr" wrap="none"/>
+            <a:lstStyle/>
+            <a:p>
+              <a:pPr algn="l" marL="0" marR="0" indent="0">
+                <a:lnSpc>
+                  <a:spcPts val="1100"/>
+                </a:lnSpc>
+                <a:spcBef>
+                  <a:spcPts val="0"/>
+                </a:spcBef>
+                <a:spcAft>
+                  <a:spcPts val="0"/>
+                </a:spcAft>
+              </a:pPr>
+              <a:r>
+                <a:rPr sz="1100">
+                  <a:solidFill>
+                    <a:srgbClr val="000000">
+                      <a:alpha val="100000"/>
+                    </a:srgbClr>
+                  </a:solidFill>
+                  <a:latin typeface="Helvetica"/>
+                  <a:cs typeface="Helvetica"/>
+                </a:rPr>
+                <a:t>Sensitivity eGFR Difference (%): 100 × (CKD-EPI 2012 CysC − CKD-EPI 2021 Cr) / CKD-EPI 2021 Cr</a:t>
+              </a:r>
+            </a:p>
+          </p:txBody>
+        </p:sp>
+        <p:sp>
+          <p:nvSpPr>
+            <p:cNvPr id="94" name="tx94"/>
+            <p:cNvSpPr/>
+            <p:nvPr/>
+          </p:nvSpPr>
+          <p:spPr>
+            <a:xfrm rot="-5400000">
+              <a:off x="138035" y="4944909"/>
+              <a:ext cx="1016904" cy="100218"/>
+            </a:xfrm>
+            <a:prstGeom prst="rect">
+              <a:avLst/>
+            </a:prstGeom>
+            <a:noFill/>
+          </p:spPr>
+          <p:txBody>
+            <a:bodyPr lIns="0" rIns="0" tIns="0" bIns="0" anchorCtr="1" anchor="ctr" wrap="none"/>
+            <a:lstStyle/>
+            <a:p>
+              <a:pPr algn="l" marL="0" marR="0" indent="0">
+                <a:lnSpc>
+                  <a:spcPts val="1100"/>
+                </a:lnSpc>
+                <a:spcBef>
+                  <a:spcPts val="0"/>
+                </a:spcBef>
+                <a:spcAft>
+                  <a:spcPts val="0"/>
+                </a:spcAft>
+              </a:pPr>
+              <a:r>
+                <a:rPr sz="1100">
+                  <a:solidFill>
+                    <a:srgbClr val="000000">
+                      <a:alpha val="100000"/>
+                    </a:srgbClr>
+                  </a:solidFill>
+                  <a:latin typeface="Helvetica"/>
+                  <a:cs typeface="Helvetica"/>
+                </a:rPr>
+                <a:t>subHR (95% CI)</a:t>
+              </a:r>
+            </a:p>
+          </p:txBody>
+        </p:sp>
+        <p:sp>
+          <p:nvSpPr>
+            <p:cNvPr id="95" name="tx95"/>
+            <p:cNvSpPr/>
+            <p:nvPr/>
+          </p:nvSpPr>
+          <p:spPr>
+            <a:xfrm>
+              <a:off x="887106" y="4159544"/>
+              <a:ext cx="6959864" cy="82021"/>
+            </a:xfrm>
+            <a:prstGeom prst="rect">
+              <a:avLst/>
+            </a:prstGeom>
+            <a:noFill/>
+          </p:spPr>
+          <p:txBody>
+            <a:bodyPr lIns="0" rIns="0" tIns="0" bIns="0" anchorCtr="1" anchor="ctr" wrap="none"/>
+            <a:lstStyle/>
+            <a:p>
+              <a:pPr algn="l" marL="0" marR="0" indent="0">
+                <a:lnSpc>
+                  <a:spcPts val="900"/>
+                </a:lnSpc>
+                <a:spcBef>
+                  <a:spcPts val="0"/>
+                </a:spcBef>
+                <a:spcAft>
+                  <a:spcPts val="0"/>
+                </a:spcAft>
+              </a:pPr>
+              <a:r>
+                <a:rPr sz="900">
+                  <a:solidFill>
+                    <a:srgbClr val="404040">
+                      <a:alpha val="100000"/>
+                    </a:srgbClr>
+                  </a:solidFill>
+                  <a:latin typeface="Helvetica"/>
+                  <a:cs typeface="Helvetica"/>
+                </a:rPr>
+                <a:t>subHR per 10 % decline: 1.22 (1.02-1.45), p_Bonf = 0.165 (n = 6)  |  per IQR decline (Δ = 28.1 %): 1.73 (1.06-2.83)  |  IQR: [-30.1, -2.1] %</a:t>
+              </a:r>
+            </a:p>
+          </p:txBody>
+        </p:sp>
+        <p:sp>
+          <p:nvSpPr>
+            <p:cNvPr id="96" name="tx96"/>
+            <p:cNvSpPr/>
+            <p:nvPr/>
+          </p:nvSpPr>
+          <p:spPr>
+            <a:xfrm>
+              <a:off x="887106" y="3932770"/>
               <a:ext cx="3760378" cy="120152"/>
             </a:xfrm>
             <a:prstGeom prst="rect">
